--- a/download/CINT-11_CP2_Review-II.pptx
+++ b/download/CINT-11_CP2_Review-II.pptx
@@ -1,9 +1,9 @@
 
 <file path=ppt/presentation.xml><?xml version="1.0" encoding="utf-8"?>
-<p:presentation xmlns:a="http://schemas.openxmlformats.org/drawingml/2006/main" xmlns:r="http://schemas.openxmlformats.org/officeDocument/2006/relationships" xmlns:p="http://schemas.openxmlformats.org/presentationml/2006/main" autoCompressPictures="0">
+<p:presentation xmlns:a="http://schemas.openxmlformats.org/drawingml/2006/main" xmlns:r="http://schemas.openxmlformats.org/officeDocument/2006/relationships" xmlns:p="http://schemas.openxmlformats.org/presentationml/2006/main" saveSubsetFonts="1" autoCompressPictures="0">
   <p:sldMasterIdLst>
     <p:sldMasterId id="2147483648" r:id="rId1"/>
-    <p:sldMasterId id="2147483660" r:id="rId3"/>
+    <p:sldMasterId id="2147483660" r:id="rId2"/>
   </p:sldMasterIdLst>
   <p:notesMasterIdLst>
     <p:notesMasterId r:id="rId16"/>
@@ -122,30 +122,26 @@
       </a:defRPr>
     </a:lvl9pPr>
   </p:defaultTextStyle>
+  <p:extLst>
+    <p:ext uri="{EFAFB233-063F-42B5-8137-9DF3F51BA10A}">
+      <p15:sldGuideLst xmlns:p15="http://schemas.microsoft.com/office/powerpoint/2012/main" xmlns=""/>
+    </p:ext>
+    <p:ext uri="{2D200454-40CA-4A62-9FC3-DE9A4176ACB9}">
+      <p15:notesGuideLst xmlns:p15="http://schemas.microsoft.com/office/powerpoint/2012/main" xmlns=""/>
+    </p:ext>
+  </p:extLst>
 </p:presentation>
 </file>
 
 <file path=ppt/charts/chart1.xml><?xml version="1.0" encoding="utf-8"?>
 <c:chartSpace xmlns:c="http://schemas.openxmlformats.org/drawingml/2006/chart" xmlns:a="http://schemas.openxmlformats.org/drawingml/2006/main" xmlns:r="http://schemas.openxmlformats.org/officeDocument/2006/relationships">
   <c:date1904 val="0"/>
-  <c:lang val="zh-CN"/>
-  <c:roundedCorners val="0"/>
-  <mc:AlternateContent xmlns:mc="http://schemas.openxmlformats.org/markup-compatibility/2006">
-    <mc:Choice xmlns:c14="http://schemas.microsoft.com/office/drawing/2007/8/2/chart" Requires="c14">
-      <c14:style val="102"/>
-    </mc:Choice>
-    <mc:Fallback>
-      <c:style val="2"/>
-    </mc:Fallback>
-  </mc:AlternateContent>
   <c:chart>
-    <c:autoTitleDeleted val="1"/>
+    <c:autoTitleDeleted val="0"/>
     <c:plotArea>
-      <c:layout/>
       <c:barChart>
         <c:barDir val="bar"/>
         <c:grouping val="clustered"/>
-        <c:varyColors val="0"/>
         <c:ser>
           <c:idx val="0"/>
           <c:order val="0"/>
@@ -165,10 +161,6 @@
               <a:srgbClr val="A6A6A6"/>
             </a:solidFill>
           </c:spPr>
-          <c:invertIfNegative val="0"/>
-          <c:dLbls>
-            <c:delete val="1"/>
-          </c:dLbls>
           <c:cat>
             <c:strRef>
               <c:f>Sheet1!$A$2:$A$4</c:f>
@@ -224,10 +216,6 @@
               <a:srgbClr val="0070C0"/>
             </a:solidFill>
           </c:spPr>
-          <c:invertIfNegative val="0"/>
-          <c:dLbls>
-            <c:delete val="1"/>
-          </c:dLbls>
           <c:cat>
             <c:strRef>
               <c:f>Sheet1!$A$2:$A$4</c:f>
@@ -283,10 +271,6 @@
               <a:srgbClr val="0070C0"/>
             </a:solidFill>
           </c:spPr>
-          <c:invertIfNegative val="0"/>
-          <c:dLbls>
-            <c:delete val="1"/>
-          </c:dLbls>
           <c:cat>
             <c:strRef>
               <c:f>Sheet1!$A$2:$A$4</c:f>
@@ -323,15 +307,6 @@
             </c:numRef>
           </c:val>
         </c:ser>
-        <c:dLbls>
-          <c:showLegendKey val="0"/>
-          <c:showVal val="0"/>
-          <c:showCatName val="0"/>
-          <c:showSerName val="0"/>
-          <c:showPercent val="0"/>
-          <c:showBubbleSize val="0"/>
-        </c:dLbls>
-        <c:gapWidth val="150"/>
         <c:axId val="-2068027336"/>
         <c:axId val="-2113994440"/>
       </c:barChart>
@@ -346,17 +321,12 @@
         <c:minorTickMark val="none"/>
         <c:tickLblPos val="nextTo"/>
         <c:txPr>
-          <a:bodyPr rot="-60000000" spcFirstLastPara="0" vertOverflow="ellipsis" vert="horz" wrap="square" anchor="ctr" anchorCtr="1"/>
+          <a:bodyPr/>
           <a:lstStyle/>
           <a:p>
             <a:pPr>
-              <a:defRPr lang="en-US" sz="1300" b="0" i="0" u="none" strike="noStrike" kern="1200" baseline="0">
-                <a:solidFill>
-                  <a:schemeClr val="tx1"/>
-                </a:solidFill>
-                <a:latin typeface="Calibri" panose="020F0502020204030204"/>
-                <a:ea typeface="+mn-ea"/>
-                <a:cs typeface="+mn-cs"/>
+              <a:defRPr sz="1300">
+                <a:latin typeface="Calibri"/>
               </a:defRPr>
             </a:pPr>
           </a:p>
@@ -371,71 +341,45 @@
       <c:valAx>
         <c:axId val="-2113994440"/>
         <c:scaling>
-          <c:orientation val="minMax"/>
-          <c:max val="8"/>
-          <c:min val="0"/>
+          <c:max val="8.0"/>
+          <c:min val="0.0"/>
         </c:scaling>
         <c:delete val="0"/>
         <c:axPos val="b"/>
         <c:majorGridlines/>
-        <c:numFmt formatCode="General" sourceLinked="1"/>
         <c:majorTickMark val="out"/>
         <c:minorTickMark val="none"/>
         <c:tickLblPos val="nextTo"/>
         <c:txPr>
-          <a:bodyPr rot="-60000000" spcFirstLastPara="0" vertOverflow="ellipsis" vert="horz" wrap="square" anchor="ctr" anchorCtr="1"/>
+          <a:bodyPr/>
           <a:lstStyle/>
           <a:p>
             <a:pPr>
-              <a:defRPr lang="en-US" sz="1200" b="0" i="0" u="none" strike="noStrike" kern="1200" baseline="0">
-                <a:solidFill>
-                  <a:schemeClr val="tx1"/>
-                </a:solidFill>
-                <a:latin typeface="Calibri" panose="020F0502020204030204"/>
-                <a:ea typeface="+mn-ea"/>
-                <a:cs typeface="+mn-cs"/>
+              <a:defRPr sz="1200">
+                <a:latin typeface="Calibri"/>
               </a:defRPr>
             </a:pPr>
           </a:p>
         </c:txPr>
         <c:crossAx val="-2068027336"/>
         <c:crosses val="autoZero"/>
-        <c:crossBetween val="between"/>
-        <c:majorUnit val="2"/>
+        <c:majorUnit val="2.0"/>
       </c:valAx>
     </c:plotArea>
     <c:legend>
       <c:legendPos val="b"/>
-      <c:layout/>
       <c:overlay val="0"/>
-      <c:txPr>
-        <a:bodyPr rot="0" spcFirstLastPara="0" vertOverflow="ellipsis" vert="horz" wrap="square" anchor="ctr" anchorCtr="1"/>
-        <a:lstStyle/>
-        <a:p>
-          <a:pPr>
-            <a:defRPr lang="en-US" sz="1800" b="0" i="0" u="none" strike="noStrike" kern="1200" baseline="0">
-              <a:solidFill>
-                <a:schemeClr val="tx1"/>
-              </a:solidFill>
-              <a:latin typeface="+mn-lt"/>
-              <a:ea typeface="+mn-ea"/>
-              <a:cs typeface="+mn-cs"/>
-            </a:defRPr>
-          </a:pPr>
-        </a:p>
-      </c:txPr>
     </c:legend>
-    <c:plotVisOnly val="0"/>
     <c:dispBlanksAs val="gap"/>
-    <c:showDLblsOverMax val="0"/>
   </c:chart>
   <c:txPr>
     <a:bodyPr/>
     <a:lstStyle/>
     <a:p>
       <a:pPr>
-        <a:defRPr lang="en-US" sz="1800"/>
+        <a:defRPr sz="1800"/>
       </a:pPr>
+      <a:endParaRPr lang="en-US"/>
     </a:p>
   </c:txPr>
   <c:externalData r:id="rId1">
@@ -468,7 +412,13 @@
       </p:grpSpPr>
       <p:sp>
         <p:nvSpPr>
-          <p:cNvPr id="2" name="Header Placeholder 1"/>
+          <p:cNvPr id="2" name="Header Placeholder 1">
+            <a:extLst>
+              <a:ext uri="{FF2B5EF4-FFF2-40B4-BE49-F238E27FC236}">
+                <a16:creationId xmlns:a16="http://schemas.microsoft.com/office/drawing/2014/main" xmlns="" id="{8EFD0E32-84B7-61F7-BC6E-7F3D3E58F422}"/>
+              </a:ext>
+            </a:extLst>
+          </p:cNvPr>
           <p:cNvSpPr>
             <a:spLocks noGrp="1"/>
           </p:cNvSpPr>
@@ -499,7 +449,13 @@
       </p:sp>
       <p:sp>
         <p:nvSpPr>
-          <p:cNvPr id="3" name="Date Placeholder 2"/>
+          <p:cNvPr id="3" name="Date Placeholder 2">
+            <a:extLst>
+              <a:ext uri="{FF2B5EF4-FFF2-40B4-BE49-F238E27FC236}">
+                <a16:creationId xmlns:a16="http://schemas.microsoft.com/office/drawing/2014/main" xmlns="" id="{F28D96D9-5F98-A44D-2018-D6A2A308A4FF}"/>
+              </a:ext>
+            </a:extLst>
+          </p:cNvPr>
           <p:cNvSpPr>
             <a:spLocks noGrp="1"/>
           </p:cNvSpPr>
@@ -526,6 +482,8 @@
           <a:p>
             <a:fld id="{469F6064-4237-BA4C-A655-B64A9E0DF723}" type="datetimeFigureOut">
               <a:rPr lang="en-US" smtClean="0"/>
+              <a:pPr/>
+              <a:t>9/21/2026</a:t>
             </a:fld>
             <a:endParaRPr lang="en-US"/>
           </a:p>
@@ -533,7 +491,13 @@
       </p:sp>
       <p:sp>
         <p:nvSpPr>
-          <p:cNvPr id="4" name="Footer Placeholder 3"/>
+          <p:cNvPr id="4" name="Footer Placeholder 3">
+            <a:extLst>
+              <a:ext uri="{FF2B5EF4-FFF2-40B4-BE49-F238E27FC236}">
+                <a16:creationId xmlns:a16="http://schemas.microsoft.com/office/drawing/2014/main" xmlns="" id="{DA93AFF6-B32C-BF80-479E-15EDD755C5E9}"/>
+              </a:ext>
+            </a:extLst>
+          </p:cNvPr>
           <p:cNvSpPr>
             <a:spLocks noGrp="1"/>
           </p:cNvSpPr>
@@ -564,7 +528,13 @@
       </p:sp>
       <p:sp>
         <p:nvSpPr>
-          <p:cNvPr id="5" name="Slide Number Placeholder 4"/>
+          <p:cNvPr id="5" name="Slide Number Placeholder 4">
+            <a:extLst>
+              <a:ext uri="{FF2B5EF4-FFF2-40B4-BE49-F238E27FC236}">
+                <a16:creationId xmlns:a16="http://schemas.microsoft.com/office/drawing/2014/main" xmlns="" id="{911E1A79-2016-95C1-5829-B295A2C98574}"/>
+              </a:ext>
+            </a:extLst>
+          </p:cNvPr>
           <p:cNvSpPr>
             <a:spLocks noGrp="1"/>
           </p:cNvSpPr>
@@ -591,6 +561,8 @@
           <a:p>
             <a:fld id="{7EFBAABA-A336-9B4F-BB34-8D7F4005576F}" type="slidenum">
               <a:rPr lang="en-US" smtClean="0"/>
+              <a:pPr/>
+              <a:t>‹#›</a:t>
             </a:fld>
             <a:endParaRPr lang="en-US"/>
           </a:p>
@@ -598,14 +570,20 @@
       </p:sp>
       <p:pic>
         <p:nvPicPr>
-          <p:cNvPr id="7" name="Picture 6"/>
+          <p:cNvPr id="7" name="Picture 6">
+            <a:extLst>
+              <a:ext uri="{FF2B5EF4-FFF2-40B4-BE49-F238E27FC236}">
+                <a16:creationId xmlns:a16="http://schemas.microsoft.com/office/drawing/2014/main" xmlns="" id="{3E12229D-753E-D112-EA38-F8EB6301E656}"/>
+              </a:ext>
+            </a:extLst>
+          </p:cNvPr>
           <p:cNvPicPr>
             <a:picLocks noChangeAspect="1"/>
           </p:cNvPicPr>
           <p:nvPr/>
         </p:nvPicPr>
         <p:blipFill>
-          <a:blip r:embed="rId1"/>
+          <a:blip r:embed="rId2"/>
           <a:stretch>
             <a:fillRect/>
           </a:stretch>
@@ -621,6 +599,11 @@
         </p:spPr>
       </p:pic>
     </p:spTree>
+    <p:extLst>
+      <p:ext uri="{BB962C8B-B14F-4D97-AF65-F5344CB8AC3E}">
+        <p14:creationId xmlns:p14="http://schemas.microsoft.com/office/powerpoint/2010/main" xmlns="" val="2590585815"/>
+      </p:ext>
+    </p:extLst>
   </p:cSld>
   <p:clrMap bg1="lt1" tx1="dk1" bg2="lt2" tx2="dk2" accent1="accent1" accent2="accent2" accent3="accent3" accent4="accent4" accent5="accent5" accent6="accent6" hlink="hlink" folHlink="folHlink"/>
 </p:handoutMaster>
@@ -708,6 +691,8 @@
           <a:p>
             <a:fld id="{85A854B6-73EE-3647-B9F0-9FDDAF047BDA}" type="datetimeFigureOut">
               <a:rPr lang="en-US" smtClean="0"/>
+              <a:pPr/>
+              <a:t>9/21/2026</a:t>
             </a:fld>
             <a:endParaRPr lang="en-US"/>
           </a:p>
@@ -774,7 +759,6 @@
               <a:rPr lang="en-GB"/>
               <a:t>Click to edit Master text styles</a:t>
             </a:r>
-            <a:endParaRPr lang="en-GB"/>
           </a:p>
           <a:p>
             <a:pPr lvl="1"/>
@@ -782,7 +766,6 @@
               <a:rPr lang="en-GB"/>
               <a:t>Second level</a:t>
             </a:r>
-            <a:endParaRPr lang="en-GB"/>
           </a:p>
           <a:p>
             <a:pPr lvl="2"/>
@@ -790,7 +773,6 @@
               <a:rPr lang="en-GB"/>
               <a:t>Third level</a:t>
             </a:r>
-            <a:endParaRPr lang="en-GB"/>
           </a:p>
           <a:p>
             <a:pPr lvl="3"/>
@@ -798,7 +780,6 @@
               <a:rPr lang="en-GB"/>
               <a:t>Fourth level</a:t>
             </a:r>
-            <a:endParaRPr lang="en-GB"/>
           </a:p>
           <a:p>
             <a:pPr lvl="4"/>
@@ -870,12 +851,19 @@
           <a:p>
             <a:fld id="{68329816-4D5E-3B44-810B-F5C416F14AE8}" type="slidenum">
               <a:rPr lang="en-US" smtClean="0"/>
+              <a:pPr/>
+              <a:t>‹#›</a:t>
             </a:fld>
             <a:endParaRPr lang="en-US"/>
           </a:p>
         </p:txBody>
       </p:sp>
     </p:spTree>
+    <p:extLst>
+      <p:ext uri="{BB962C8B-B14F-4D97-AF65-F5344CB8AC3E}">
+        <p14:creationId xmlns:p14="http://schemas.microsoft.com/office/powerpoint/2010/main" xmlns="" val="4187155271"/>
+      </p:ext>
+    </p:extLst>
   </p:cSld>
   <p:clrMap bg1="lt1" tx1="dk1" bg2="lt2" tx2="dk2" accent1="accent1" accent2="accent2" accent3="accent3" accent4="accent4" accent5="accent5" accent6="accent6" hlink="hlink" folHlink="folHlink"/>
   <p:notesStyle>
@@ -992,7 +980,13 @@
       </p:grpSpPr>
       <p:sp>
         <p:nvSpPr>
-          <p:cNvPr id="2" name="Title 1"/>
+          <p:cNvPr id="2" name="Title 1">
+            <a:extLst>
+              <a:ext uri="{FF2B5EF4-FFF2-40B4-BE49-F238E27FC236}">
+                <a16:creationId xmlns:a16="http://schemas.microsoft.com/office/drawing/2014/main" xmlns="" id="{B2227E06-5BF0-54B9-FB5D-CFB52D43BFEF}"/>
+              </a:ext>
+            </a:extLst>
+          </p:cNvPr>
           <p:cNvSpPr>
             <a:spLocks noGrp="1"/>
           </p:cNvSpPr>
@@ -1024,7 +1018,13 @@
       </p:sp>
       <p:sp>
         <p:nvSpPr>
-          <p:cNvPr id="3" name="Subtitle 2"/>
+          <p:cNvPr id="3" name="Subtitle 2">
+            <a:extLst>
+              <a:ext uri="{FF2B5EF4-FFF2-40B4-BE49-F238E27FC236}">
+                <a16:creationId xmlns:a16="http://schemas.microsoft.com/office/drawing/2014/main" xmlns="" id="{226EA4E6-D507-DC8D-31AA-A4CB32D7CEC4}"/>
+              </a:ext>
+            </a:extLst>
+          </p:cNvPr>
           <p:cNvSpPr>
             <a:spLocks noGrp="1"/>
           </p:cNvSpPr>
@@ -1089,7 +1089,13 @@
       </p:sp>
       <p:sp>
         <p:nvSpPr>
-          <p:cNvPr id="4" name="Date Placeholder 3"/>
+          <p:cNvPr id="4" name="Date Placeholder 3">
+            <a:extLst>
+              <a:ext uri="{FF2B5EF4-FFF2-40B4-BE49-F238E27FC236}">
+                <a16:creationId xmlns:a16="http://schemas.microsoft.com/office/drawing/2014/main" xmlns="" id="{62C99788-2E86-FADA-072C-884B0261564B}"/>
+              </a:ext>
+            </a:extLst>
+          </p:cNvPr>
           <p:cNvSpPr>
             <a:spLocks noGrp="1"/>
           </p:cNvSpPr>
@@ -1112,7 +1118,13 @@
       </p:sp>
       <p:sp>
         <p:nvSpPr>
-          <p:cNvPr id="5" name="Footer Placeholder 4"/>
+          <p:cNvPr id="5" name="Footer Placeholder 4">
+            <a:extLst>
+              <a:ext uri="{FF2B5EF4-FFF2-40B4-BE49-F238E27FC236}">
+                <a16:creationId xmlns:a16="http://schemas.microsoft.com/office/drawing/2014/main" xmlns="" id="{A54D1ADA-8991-D408-DA0A-FE3B043FE895}"/>
+              </a:ext>
+            </a:extLst>
+          </p:cNvPr>
           <p:cNvSpPr>
             <a:spLocks noGrp="1"/>
           </p:cNvSpPr>
@@ -1135,7 +1147,13 @@
       </p:sp>
       <p:sp>
         <p:nvSpPr>
-          <p:cNvPr id="6" name="Slide Number Placeholder 5"/>
+          <p:cNvPr id="6" name="Slide Number Placeholder 5">
+            <a:extLst>
+              <a:ext uri="{FF2B5EF4-FFF2-40B4-BE49-F238E27FC236}">
+                <a16:creationId xmlns:a16="http://schemas.microsoft.com/office/drawing/2014/main" xmlns="" id="{037DF78D-056F-7C9E-8F10-682094624882}"/>
+              </a:ext>
+            </a:extLst>
+          </p:cNvPr>
           <p:cNvSpPr>
             <a:spLocks noGrp="1"/>
           </p:cNvSpPr>
@@ -1150,12 +1168,19 @@
           <a:p>
             <a:fld id="{B961B71F-4B40-8942-BB88-E0F5C0B46E10}" type="slidenum">
               <a:rPr lang="en-US" smtClean="0"/>
+              <a:pPr/>
+              <a:t>‹#›</a:t>
             </a:fld>
             <a:endParaRPr lang="en-US"/>
           </a:p>
         </p:txBody>
       </p:sp>
     </p:spTree>
+    <p:extLst>
+      <p:ext uri="{BB962C8B-B14F-4D97-AF65-F5344CB8AC3E}">
+        <p14:creationId xmlns:p14="http://schemas.microsoft.com/office/powerpoint/2010/main" xmlns="" val="1223291163"/>
+      </p:ext>
+    </p:extLst>
   </p:cSld>
   <p:clrMapOvr>
     <a:masterClrMapping/>
@@ -1182,7 +1207,13 @@
       </p:grpSpPr>
       <p:sp>
         <p:nvSpPr>
-          <p:cNvPr id="2" name="Title 1"/>
+          <p:cNvPr id="2" name="Title 1">
+            <a:extLst>
+              <a:ext uri="{FF2B5EF4-FFF2-40B4-BE49-F238E27FC236}">
+                <a16:creationId xmlns:a16="http://schemas.microsoft.com/office/drawing/2014/main" xmlns="" id="{50A9F7F1-0136-E40C-5B0F-C1D42F6EFBBE}"/>
+              </a:ext>
+            </a:extLst>
+          </p:cNvPr>
           <p:cNvSpPr>
             <a:spLocks noGrp="1"/>
           </p:cNvSpPr>
@@ -1205,7 +1236,13 @@
       </p:sp>
       <p:sp>
         <p:nvSpPr>
-          <p:cNvPr id="3" name="Vertical Text Placeholder 2"/>
+          <p:cNvPr id="3" name="Vertical Text Placeholder 2">
+            <a:extLst>
+              <a:ext uri="{FF2B5EF4-FFF2-40B4-BE49-F238E27FC236}">
+                <a16:creationId xmlns:a16="http://schemas.microsoft.com/office/drawing/2014/main" xmlns="" id="{AA08B89F-EA4C-AA4F-0EB2-C715E5B0D675}"/>
+              </a:ext>
+            </a:extLst>
+          </p:cNvPr>
           <p:cNvSpPr>
             <a:spLocks noGrp="1"/>
           </p:cNvSpPr>
@@ -1223,7 +1260,6 @@
               <a:rPr lang="en-GB"/>
               <a:t>Click to edit Master text styles</a:t>
             </a:r>
-            <a:endParaRPr lang="en-GB"/>
           </a:p>
           <a:p>
             <a:pPr lvl="1"/>
@@ -1231,7 +1267,6 @@
               <a:rPr lang="en-GB"/>
               <a:t>Second level</a:t>
             </a:r>
-            <a:endParaRPr lang="en-GB"/>
           </a:p>
           <a:p>
             <a:pPr lvl="2"/>
@@ -1239,7 +1274,6 @@
               <a:rPr lang="en-GB"/>
               <a:t>Third level</a:t>
             </a:r>
-            <a:endParaRPr lang="en-GB"/>
           </a:p>
           <a:p>
             <a:pPr lvl="3"/>
@@ -1247,7 +1281,6 @@
               <a:rPr lang="en-GB"/>
               <a:t>Fourth level</a:t>
             </a:r>
-            <a:endParaRPr lang="en-GB"/>
           </a:p>
           <a:p>
             <a:pPr lvl="4"/>
@@ -1261,7 +1294,13 @@
       </p:sp>
       <p:sp>
         <p:nvSpPr>
-          <p:cNvPr id="4" name="Date Placeholder 3"/>
+          <p:cNvPr id="4" name="Date Placeholder 3">
+            <a:extLst>
+              <a:ext uri="{FF2B5EF4-FFF2-40B4-BE49-F238E27FC236}">
+                <a16:creationId xmlns:a16="http://schemas.microsoft.com/office/drawing/2014/main" xmlns="" id="{8CC2AEC3-3D5C-B4D8-ADAC-C6249EB46A19}"/>
+              </a:ext>
+            </a:extLst>
+          </p:cNvPr>
           <p:cNvSpPr>
             <a:spLocks noGrp="1"/>
           </p:cNvSpPr>
@@ -1284,7 +1323,13 @@
       </p:sp>
       <p:sp>
         <p:nvSpPr>
-          <p:cNvPr id="5" name="Footer Placeholder 4"/>
+          <p:cNvPr id="5" name="Footer Placeholder 4">
+            <a:extLst>
+              <a:ext uri="{FF2B5EF4-FFF2-40B4-BE49-F238E27FC236}">
+                <a16:creationId xmlns:a16="http://schemas.microsoft.com/office/drawing/2014/main" xmlns="" id="{8B19FED2-229B-3728-C7BA-7E8D51577AE3}"/>
+              </a:ext>
+            </a:extLst>
+          </p:cNvPr>
           <p:cNvSpPr>
             <a:spLocks noGrp="1"/>
           </p:cNvSpPr>
@@ -1307,7 +1352,13 @@
       </p:sp>
       <p:sp>
         <p:nvSpPr>
-          <p:cNvPr id="6" name="Slide Number Placeholder 5"/>
+          <p:cNvPr id="6" name="Slide Number Placeholder 5">
+            <a:extLst>
+              <a:ext uri="{FF2B5EF4-FFF2-40B4-BE49-F238E27FC236}">
+                <a16:creationId xmlns:a16="http://schemas.microsoft.com/office/drawing/2014/main" xmlns="" id="{9D8B8F22-95FA-4A5E-31CC-C3851B52EF73}"/>
+              </a:ext>
+            </a:extLst>
+          </p:cNvPr>
           <p:cNvSpPr>
             <a:spLocks noGrp="1"/>
           </p:cNvSpPr>
@@ -1322,12 +1373,19 @@
           <a:p>
             <a:fld id="{B961B71F-4B40-8942-BB88-E0F5C0B46E10}" type="slidenum">
               <a:rPr lang="en-US" smtClean="0"/>
+              <a:pPr/>
+              <a:t>‹#›</a:t>
             </a:fld>
             <a:endParaRPr lang="en-US"/>
           </a:p>
         </p:txBody>
       </p:sp>
     </p:spTree>
+    <p:extLst>
+      <p:ext uri="{BB962C8B-B14F-4D97-AF65-F5344CB8AC3E}">
+        <p14:creationId xmlns:p14="http://schemas.microsoft.com/office/powerpoint/2010/main" xmlns="" val="2842613168"/>
+      </p:ext>
+    </p:extLst>
   </p:cSld>
   <p:clrMapOvr>
     <a:masterClrMapping/>
@@ -1354,7 +1412,13 @@
       </p:grpSpPr>
       <p:sp>
         <p:nvSpPr>
-          <p:cNvPr id="2" name="Vertical Title 1"/>
+          <p:cNvPr id="2" name="Vertical Title 1">
+            <a:extLst>
+              <a:ext uri="{FF2B5EF4-FFF2-40B4-BE49-F238E27FC236}">
+                <a16:creationId xmlns:a16="http://schemas.microsoft.com/office/drawing/2014/main" xmlns="" id="{AC6F1B25-2FA5-C4F6-09E8-D6F7A8DF83DC}"/>
+              </a:ext>
+            </a:extLst>
+          </p:cNvPr>
           <p:cNvSpPr>
             <a:spLocks noGrp="1"/>
           </p:cNvSpPr>
@@ -1382,7 +1446,13 @@
       </p:sp>
       <p:sp>
         <p:nvSpPr>
-          <p:cNvPr id="3" name="Vertical Text Placeholder 2"/>
+          <p:cNvPr id="3" name="Vertical Text Placeholder 2">
+            <a:extLst>
+              <a:ext uri="{FF2B5EF4-FFF2-40B4-BE49-F238E27FC236}">
+                <a16:creationId xmlns:a16="http://schemas.microsoft.com/office/drawing/2014/main" xmlns="" id="{F61113B0-02D5-BBE3-31A5-47396162981A}"/>
+              </a:ext>
+            </a:extLst>
+          </p:cNvPr>
           <p:cNvSpPr>
             <a:spLocks noGrp="1"/>
           </p:cNvSpPr>
@@ -1405,7 +1475,6 @@
               <a:rPr lang="en-GB"/>
               <a:t>Click to edit Master text styles</a:t>
             </a:r>
-            <a:endParaRPr lang="en-GB"/>
           </a:p>
           <a:p>
             <a:pPr lvl="1"/>
@@ -1413,7 +1482,6 @@
               <a:rPr lang="en-GB"/>
               <a:t>Second level</a:t>
             </a:r>
-            <a:endParaRPr lang="en-GB"/>
           </a:p>
           <a:p>
             <a:pPr lvl="2"/>
@@ -1421,7 +1489,6 @@
               <a:rPr lang="en-GB"/>
               <a:t>Third level</a:t>
             </a:r>
-            <a:endParaRPr lang="en-GB"/>
           </a:p>
           <a:p>
             <a:pPr lvl="3"/>
@@ -1429,7 +1496,6 @@
               <a:rPr lang="en-GB"/>
               <a:t>Fourth level</a:t>
             </a:r>
-            <a:endParaRPr lang="en-GB"/>
           </a:p>
           <a:p>
             <a:pPr lvl="4"/>
@@ -1443,7 +1509,13 @@
       </p:sp>
       <p:sp>
         <p:nvSpPr>
-          <p:cNvPr id="4" name="Date Placeholder 3"/>
+          <p:cNvPr id="4" name="Date Placeholder 3">
+            <a:extLst>
+              <a:ext uri="{FF2B5EF4-FFF2-40B4-BE49-F238E27FC236}">
+                <a16:creationId xmlns:a16="http://schemas.microsoft.com/office/drawing/2014/main" xmlns="" id="{6B9CAE10-6B7D-C48F-F3FF-419AD4413A07}"/>
+              </a:ext>
+            </a:extLst>
+          </p:cNvPr>
           <p:cNvSpPr>
             <a:spLocks noGrp="1"/>
           </p:cNvSpPr>
@@ -1466,7 +1538,13 @@
       </p:sp>
       <p:sp>
         <p:nvSpPr>
-          <p:cNvPr id="5" name="Footer Placeholder 4"/>
+          <p:cNvPr id="5" name="Footer Placeholder 4">
+            <a:extLst>
+              <a:ext uri="{FF2B5EF4-FFF2-40B4-BE49-F238E27FC236}">
+                <a16:creationId xmlns:a16="http://schemas.microsoft.com/office/drawing/2014/main" xmlns="" id="{2652D582-0634-2511-6F7E-7229EC0722E5}"/>
+              </a:ext>
+            </a:extLst>
+          </p:cNvPr>
           <p:cNvSpPr>
             <a:spLocks noGrp="1"/>
           </p:cNvSpPr>
@@ -1489,7 +1567,13 @@
       </p:sp>
       <p:sp>
         <p:nvSpPr>
-          <p:cNvPr id="6" name="Slide Number Placeholder 5"/>
+          <p:cNvPr id="6" name="Slide Number Placeholder 5">
+            <a:extLst>
+              <a:ext uri="{FF2B5EF4-FFF2-40B4-BE49-F238E27FC236}">
+                <a16:creationId xmlns:a16="http://schemas.microsoft.com/office/drawing/2014/main" xmlns="" id="{CEBAE7E1-0525-6C8B-2077-B55EFBEA69D4}"/>
+              </a:ext>
+            </a:extLst>
+          </p:cNvPr>
           <p:cNvSpPr>
             <a:spLocks noGrp="1"/>
           </p:cNvSpPr>
@@ -1504,12 +1588,19 @@
           <a:p>
             <a:fld id="{B961B71F-4B40-8942-BB88-E0F5C0B46E10}" type="slidenum">
               <a:rPr lang="en-US" smtClean="0"/>
+              <a:pPr/>
+              <a:t>‹#›</a:t>
             </a:fld>
             <a:endParaRPr lang="en-US"/>
           </a:p>
         </p:txBody>
       </p:sp>
     </p:spTree>
+    <p:extLst>
+      <p:ext uri="{BB962C8B-B14F-4D97-AF65-F5344CB8AC3E}">
+        <p14:creationId xmlns:p14="http://schemas.microsoft.com/office/powerpoint/2010/main" xmlns="" val="1566250740"/>
+      </p:ext>
+    </p:extLst>
   </p:cSld>
   <p:clrMapOvr>
     <a:masterClrMapping/>
@@ -1536,7 +1627,13 @@
       </p:grpSpPr>
       <p:sp>
         <p:nvSpPr>
-          <p:cNvPr id="2" name="Title 1"/>
+          <p:cNvPr id="2" name="Title 1">
+            <a:extLst>
+              <a:ext uri="{FF2B5EF4-FFF2-40B4-BE49-F238E27FC236}">
+                <a16:creationId xmlns:a16="http://schemas.microsoft.com/office/drawing/2014/main" xmlns="" id="{D2F2A4A3-2E21-E418-73DE-E22247EE4174}"/>
+              </a:ext>
+            </a:extLst>
+          </p:cNvPr>
           <p:cNvSpPr>
             <a:spLocks noGrp="1"/>
           </p:cNvSpPr>
@@ -1568,7 +1665,13 @@
       </p:sp>
       <p:sp>
         <p:nvSpPr>
-          <p:cNvPr id="3" name="Subtitle 2"/>
+          <p:cNvPr id="3" name="Subtitle 2">
+            <a:extLst>
+              <a:ext uri="{FF2B5EF4-FFF2-40B4-BE49-F238E27FC236}">
+                <a16:creationId xmlns:a16="http://schemas.microsoft.com/office/drawing/2014/main" xmlns="" id="{93C87DE1-CAF2-229C-5776-9562B79560FD}"/>
+              </a:ext>
+            </a:extLst>
+          </p:cNvPr>
           <p:cNvSpPr>
             <a:spLocks noGrp="1"/>
           </p:cNvSpPr>
@@ -1633,7 +1736,13 @@
       </p:sp>
       <p:sp>
         <p:nvSpPr>
-          <p:cNvPr id="4" name="Date Placeholder 3"/>
+          <p:cNvPr id="4" name="Date Placeholder 3">
+            <a:extLst>
+              <a:ext uri="{FF2B5EF4-FFF2-40B4-BE49-F238E27FC236}">
+                <a16:creationId xmlns:a16="http://schemas.microsoft.com/office/drawing/2014/main" xmlns="" id="{00154DD8-14C4-ACB8-D444-27F005A4C5CB}"/>
+              </a:ext>
+            </a:extLst>
+          </p:cNvPr>
           <p:cNvSpPr>
             <a:spLocks noGrp="1"/>
           </p:cNvSpPr>
@@ -1656,7 +1765,13 @@
       </p:sp>
       <p:sp>
         <p:nvSpPr>
-          <p:cNvPr id="5" name="Footer Placeholder 4"/>
+          <p:cNvPr id="5" name="Footer Placeholder 4">
+            <a:extLst>
+              <a:ext uri="{FF2B5EF4-FFF2-40B4-BE49-F238E27FC236}">
+                <a16:creationId xmlns:a16="http://schemas.microsoft.com/office/drawing/2014/main" xmlns="" id="{886BF891-4BCD-EC21-1259-8661D36C8A57}"/>
+              </a:ext>
+            </a:extLst>
+          </p:cNvPr>
           <p:cNvSpPr>
             <a:spLocks noGrp="1"/>
           </p:cNvSpPr>
@@ -1679,7 +1794,13 @@
       </p:sp>
       <p:sp>
         <p:nvSpPr>
-          <p:cNvPr id="6" name="Slide Number Placeholder 5"/>
+          <p:cNvPr id="6" name="Slide Number Placeholder 5">
+            <a:extLst>
+              <a:ext uri="{FF2B5EF4-FFF2-40B4-BE49-F238E27FC236}">
+                <a16:creationId xmlns:a16="http://schemas.microsoft.com/office/drawing/2014/main" xmlns="" id="{A93951AF-D1A2-07A4-0B2A-7E9D6B416DE0}"/>
+              </a:ext>
+            </a:extLst>
+          </p:cNvPr>
           <p:cNvSpPr>
             <a:spLocks noGrp="1"/>
           </p:cNvSpPr>
@@ -1694,12 +1815,19 @@
           <a:p>
             <a:fld id="{D6396F81-1074-6B40-A92F-A06CCD3B4178}" type="slidenum">
               <a:rPr lang="en-US" smtClean="0"/>
+              <a:pPr/>
+              <a:t>‹#›</a:t>
             </a:fld>
             <a:endParaRPr lang="en-US"/>
           </a:p>
         </p:txBody>
       </p:sp>
     </p:spTree>
+    <p:extLst>
+      <p:ext uri="{BB962C8B-B14F-4D97-AF65-F5344CB8AC3E}">
+        <p14:creationId xmlns:p14="http://schemas.microsoft.com/office/powerpoint/2010/main" xmlns="" val="1216852442"/>
+      </p:ext>
+    </p:extLst>
   </p:cSld>
   <p:clrMapOvr>
     <a:masterClrMapping/>
@@ -1726,7 +1854,13 @@
       </p:grpSpPr>
       <p:sp>
         <p:nvSpPr>
-          <p:cNvPr id="2" name="Title 1"/>
+          <p:cNvPr id="2" name="Title 1">
+            <a:extLst>
+              <a:ext uri="{FF2B5EF4-FFF2-40B4-BE49-F238E27FC236}">
+                <a16:creationId xmlns:a16="http://schemas.microsoft.com/office/drawing/2014/main" xmlns="" id="{188CBFB9-B574-3DEB-F162-FE89B3802B30}"/>
+              </a:ext>
+            </a:extLst>
+          </p:cNvPr>
           <p:cNvSpPr>
             <a:spLocks noGrp="1"/>
           </p:cNvSpPr>
@@ -1749,7 +1883,13 @@
       </p:sp>
       <p:sp>
         <p:nvSpPr>
-          <p:cNvPr id="3" name="Content Placeholder 2"/>
+          <p:cNvPr id="3" name="Content Placeholder 2">
+            <a:extLst>
+              <a:ext uri="{FF2B5EF4-FFF2-40B4-BE49-F238E27FC236}">
+                <a16:creationId xmlns:a16="http://schemas.microsoft.com/office/drawing/2014/main" xmlns="" id="{8094B0E9-24AC-9760-0CBD-E5D0888E3FAA}"/>
+              </a:ext>
+            </a:extLst>
+          </p:cNvPr>
           <p:cNvSpPr>
             <a:spLocks noGrp="1"/>
           </p:cNvSpPr>
@@ -1767,7 +1907,6 @@
               <a:rPr lang="en-GB"/>
               <a:t>Click to edit Master text styles</a:t>
             </a:r>
-            <a:endParaRPr lang="en-GB"/>
           </a:p>
           <a:p>
             <a:pPr lvl="1"/>
@@ -1775,7 +1914,6 @@
               <a:rPr lang="en-GB"/>
               <a:t>Second level</a:t>
             </a:r>
-            <a:endParaRPr lang="en-GB"/>
           </a:p>
           <a:p>
             <a:pPr lvl="2"/>
@@ -1783,7 +1921,6 @@
               <a:rPr lang="en-GB"/>
               <a:t>Third level</a:t>
             </a:r>
-            <a:endParaRPr lang="en-GB"/>
           </a:p>
           <a:p>
             <a:pPr lvl="3"/>
@@ -1791,7 +1928,6 @@
               <a:rPr lang="en-GB"/>
               <a:t>Fourth level</a:t>
             </a:r>
-            <a:endParaRPr lang="en-GB"/>
           </a:p>
           <a:p>
             <a:pPr lvl="4"/>
@@ -1805,7 +1941,13 @@
       </p:sp>
       <p:sp>
         <p:nvSpPr>
-          <p:cNvPr id="4" name="Date Placeholder 3"/>
+          <p:cNvPr id="4" name="Date Placeholder 3">
+            <a:extLst>
+              <a:ext uri="{FF2B5EF4-FFF2-40B4-BE49-F238E27FC236}">
+                <a16:creationId xmlns:a16="http://schemas.microsoft.com/office/drawing/2014/main" xmlns="" id="{95C41205-CA2E-9649-1960-8F17E0E6D292}"/>
+              </a:ext>
+            </a:extLst>
+          </p:cNvPr>
           <p:cNvSpPr>
             <a:spLocks noGrp="1"/>
           </p:cNvSpPr>
@@ -1828,7 +1970,13 @@
       </p:sp>
       <p:sp>
         <p:nvSpPr>
-          <p:cNvPr id="5" name="Footer Placeholder 4"/>
+          <p:cNvPr id="5" name="Footer Placeholder 4">
+            <a:extLst>
+              <a:ext uri="{FF2B5EF4-FFF2-40B4-BE49-F238E27FC236}">
+                <a16:creationId xmlns:a16="http://schemas.microsoft.com/office/drawing/2014/main" xmlns="" id="{BC702BAD-D0DE-F254-BBD1-2AFE276BD322}"/>
+              </a:ext>
+            </a:extLst>
+          </p:cNvPr>
           <p:cNvSpPr>
             <a:spLocks noGrp="1"/>
           </p:cNvSpPr>
@@ -1851,7 +1999,13 @@
       </p:sp>
       <p:sp>
         <p:nvSpPr>
-          <p:cNvPr id="6" name="Slide Number Placeholder 5"/>
+          <p:cNvPr id="6" name="Slide Number Placeholder 5">
+            <a:extLst>
+              <a:ext uri="{FF2B5EF4-FFF2-40B4-BE49-F238E27FC236}">
+                <a16:creationId xmlns:a16="http://schemas.microsoft.com/office/drawing/2014/main" xmlns="" id="{C7787769-B833-24E6-E30B-DCE74558AC9F}"/>
+              </a:ext>
+            </a:extLst>
+          </p:cNvPr>
           <p:cNvSpPr>
             <a:spLocks noGrp="1"/>
           </p:cNvSpPr>
@@ -1866,12 +2020,19 @@
           <a:p>
             <a:fld id="{D6396F81-1074-6B40-A92F-A06CCD3B4178}" type="slidenum">
               <a:rPr lang="en-US" smtClean="0"/>
+              <a:pPr/>
+              <a:t>‹#›</a:t>
             </a:fld>
             <a:endParaRPr lang="en-US"/>
           </a:p>
         </p:txBody>
       </p:sp>
     </p:spTree>
+    <p:extLst>
+      <p:ext uri="{BB962C8B-B14F-4D97-AF65-F5344CB8AC3E}">
+        <p14:creationId xmlns:p14="http://schemas.microsoft.com/office/powerpoint/2010/main" xmlns="" val="2297192732"/>
+      </p:ext>
+    </p:extLst>
   </p:cSld>
   <p:clrMapOvr>
     <a:masterClrMapping/>
@@ -1898,7 +2059,13 @@
       </p:grpSpPr>
       <p:sp>
         <p:nvSpPr>
-          <p:cNvPr id="2" name="Title 1"/>
+          <p:cNvPr id="2" name="Title 1">
+            <a:extLst>
+              <a:ext uri="{FF2B5EF4-FFF2-40B4-BE49-F238E27FC236}">
+                <a16:creationId xmlns:a16="http://schemas.microsoft.com/office/drawing/2014/main" xmlns="" id="{2ED24CF5-AE66-5FEF-8EEC-A630C8B2901A}"/>
+              </a:ext>
+            </a:extLst>
+          </p:cNvPr>
           <p:cNvSpPr>
             <a:spLocks noGrp="1"/>
           </p:cNvSpPr>
@@ -1930,7 +2097,13 @@
       </p:sp>
       <p:sp>
         <p:nvSpPr>
-          <p:cNvPr id="3" name="Text Placeholder 2"/>
+          <p:cNvPr id="3" name="Text Placeholder 2">
+            <a:extLst>
+              <a:ext uri="{FF2B5EF4-FFF2-40B4-BE49-F238E27FC236}">
+                <a16:creationId xmlns:a16="http://schemas.microsoft.com/office/drawing/2014/main" xmlns="" id="{10528CE2-68D8-267B-C297-6117F0736AB6}"/>
+              </a:ext>
+            </a:extLst>
+          </p:cNvPr>
           <p:cNvSpPr>
             <a:spLocks noGrp="1"/>
           </p:cNvSpPr>
@@ -2044,13 +2217,18 @@
               <a:rPr lang="en-GB"/>
               <a:t>Click to edit Master text styles</a:t>
             </a:r>
-            <a:endParaRPr lang="en-GB"/>
-          </a:p>
-        </p:txBody>
-      </p:sp>
-      <p:sp>
-        <p:nvSpPr>
-          <p:cNvPr id="4" name="Date Placeholder 3"/>
+          </a:p>
+        </p:txBody>
+      </p:sp>
+      <p:sp>
+        <p:nvSpPr>
+          <p:cNvPr id="4" name="Date Placeholder 3">
+            <a:extLst>
+              <a:ext uri="{FF2B5EF4-FFF2-40B4-BE49-F238E27FC236}">
+                <a16:creationId xmlns:a16="http://schemas.microsoft.com/office/drawing/2014/main" xmlns="" id="{7525FFB0-0F78-AEB8-5AFB-EC779B961448}"/>
+              </a:ext>
+            </a:extLst>
+          </p:cNvPr>
           <p:cNvSpPr>
             <a:spLocks noGrp="1"/>
           </p:cNvSpPr>
@@ -2073,7 +2251,13 @@
       </p:sp>
       <p:sp>
         <p:nvSpPr>
-          <p:cNvPr id="5" name="Footer Placeholder 4"/>
+          <p:cNvPr id="5" name="Footer Placeholder 4">
+            <a:extLst>
+              <a:ext uri="{FF2B5EF4-FFF2-40B4-BE49-F238E27FC236}">
+                <a16:creationId xmlns:a16="http://schemas.microsoft.com/office/drawing/2014/main" xmlns="" id="{A4F3BE8E-E2EB-A8B6-21DD-9AB839A58AC4}"/>
+              </a:ext>
+            </a:extLst>
+          </p:cNvPr>
           <p:cNvSpPr>
             <a:spLocks noGrp="1"/>
           </p:cNvSpPr>
@@ -2096,7 +2280,13 @@
       </p:sp>
       <p:sp>
         <p:nvSpPr>
-          <p:cNvPr id="6" name="Slide Number Placeholder 5"/>
+          <p:cNvPr id="6" name="Slide Number Placeholder 5">
+            <a:extLst>
+              <a:ext uri="{FF2B5EF4-FFF2-40B4-BE49-F238E27FC236}">
+                <a16:creationId xmlns:a16="http://schemas.microsoft.com/office/drawing/2014/main" xmlns="" id="{714BE51E-49C9-6B3A-1C46-49212B576123}"/>
+              </a:ext>
+            </a:extLst>
+          </p:cNvPr>
           <p:cNvSpPr>
             <a:spLocks noGrp="1"/>
           </p:cNvSpPr>
@@ -2111,12 +2301,19 @@
           <a:p>
             <a:fld id="{D6396F81-1074-6B40-A92F-A06CCD3B4178}" type="slidenum">
               <a:rPr lang="en-US" smtClean="0"/>
+              <a:pPr/>
+              <a:t>‹#›</a:t>
             </a:fld>
             <a:endParaRPr lang="en-US"/>
           </a:p>
         </p:txBody>
       </p:sp>
     </p:spTree>
+    <p:extLst>
+      <p:ext uri="{BB962C8B-B14F-4D97-AF65-F5344CB8AC3E}">
+        <p14:creationId xmlns:p14="http://schemas.microsoft.com/office/powerpoint/2010/main" xmlns="" val="4040837610"/>
+      </p:ext>
+    </p:extLst>
   </p:cSld>
   <p:clrMapOvr>
     <a:masterClrMapping/>
@@ -2143,7 +2340,13 @@
       </p:grpSpPr>
       <p:sp>
         <p:nvSpPr>
-          <p:cNvPr id="2" name="Title 1"/>
+          <p:cNvPr id="2" name="Title 1">
+            <a:extLst>
+              <a:ext uri="{FF2B5EF4-FFF2-40B4-BE49-F238E27FC236}">
+                <a16:creationId xmlns:a16="http://schemas.microsoft.com/office/drawing/2014/main" xmlns="" id="{1753AF32-49A3-7BB1-C7E7-6C5D90D17A8C}"/>
+              </a:ext>
+            </a:extLst>
+          </p:cNvPr>
           <p:cNvSpPr>
             <a:spLocks noGrp="1"/>
           </p:cNvSpPr>
@@ -2166,7 +2369,13 @@
       </p:sp>
       <p:sp>
         <p:nvSpPr>
-          <p:cNvPr id="3" name="Content Placeholder 2"/>
+          <p:cNvPr id="3" name="Content Placeholder 2">
+            <a:extLst>
+              <a:ext uri="{FF2B5EF4-FFF2-40B4-BE49-F238E27FC236}">
+                <a16:creationId xmlns:a16="http://schemas.microsoft.com/office/drawing/2014/main" xmlns="" id="{A9C51BE1-060E-F420-83BA-C8AE9151CFB7}"/>
+              </a:ext>
+            </a:extLst>
+          </p:cNvPr>
           <p:cNvSpPr>
             <a:spLocks noGrp="1"/>
           </p:cNvSpPr>
@@ -2189,7 +2398,6 @@
               <a:rPr lang="en-GB"/>
               <a:t>Click to edit Master text styles</a:t>
             </a:r>
-            <a:endParaRPr lang="en-GB"/>
           </a:p>
           <a:p>
             <a:pPr lvl="1"/>
@@ -2197,7 +2405,6 @@
               <a:rPr lang="en-GB"/>
               <a:t>Second level</a:t>
             </a:r>
-            <a:endParaRPr lang="en-GB"/>
           </a:p>
           <a:p>
             <a:pPr lvl="2"/>
@@ -2205,7 +2412,6 @@
               <a:rPr lang="en-GB"/>
               <a:t>Third level</a:t>
             </a:r>
-            <a:endParaRPr lang="en-GB"/>
           </a:p>
           <a:p>
             <a:pPr lvl="3"/>
@@ -2213,7 +2419,6 @@
               <a:rPr lang="en-GB"/>
               <a:t>Fourth level</a:t>
             </a:r>
-            <a:endParaRPr lang="en-GB"/>
           </a:p>
           <a:p>
             <a:pPr lvl="4"/>
@@ -2227,7 +2432,13 @@
       </p:sp>
       <p:sp>
         <p:nvSpPr>
-          <p:cNvPr id="4" name="Content Placeholder 3"/>
+          <p:cNvPr id="4" name="Content Placeholder 3">
+            <a:extLst>
+              <a:ext uri="{FF2B5EF4-FFF2-40B4-BE49-F238E27FC236}">
+                <a16:creationId xmlns:a16="http://schemas.microsoft.com/office/drawing/2014/main" xmlns="" id="{3B5265B4-44BE-C9BD-56AD-24359969A5F6}"/>
+              </a:ext>
+            </a:extLst>
+          </p:cNvPr>
           <p:cNvSpPr>
             <a:spLocks noGrp="1"/>
           </p:cNvSpPr>
@@ -2250,7 +2461,6 @@
               <a:rPr lang="en-GB"/>
               <a:t>Click to edit Master text styles</a:t>
             </a:r>
-            <a:endParaRPr lang="en-GB"/>
           </a:p>
           <a:p>
             <a:pPr lvl="1"/>
@@ -2258,7 +2468,6 @@
               <a:rPr lang="en-GB"/>
               <a:t>Second level</a:t>
             </a:r>
-            <a:endParaRPr lang="en-GB"/>
           </a:p>
           <a:p>
             <a:pPr lvl="2"/>
@@ -2266,7 +2475,6 @@
               <a:rPr lang="en-GB"/>
               <a:t>Third level</a:t>
             </a:r>
-            <a:endParaRPr lang="en-GB"/>
           </a:p>
           <a:p>
             <a:pPr lvl="3"/>
@@ -2274,7 +2482,6 @@
               <a:rPr lang="en-GB"/>
               <a:t>Fourth level</a:t>
             </a:r>
-            <a:endParaRPr lang="en-GB"/>
           </a:p>
           <a:p>
             <a:pPr lvl="4"/>
@@ -2288,7 +2495,13 @@
       </p:sp>
       <p:sp>
         <p:nvSpPr>
-          <p:cNvPr id="5" name="Date Placeholder 4"/>
+          <p:cNvPr id="5" name="Date Placeholder 4">
+            <a:extLst>
+              <a:ext uri="{FF2B5EF4-FFF2-40B4-BE49-F238E27FC236}">
+                <a16:creationId xmlns:a16="http://schemas.microsoft.com/office/drawing/2014/main" xmlns="" id="{76262ECC-3BDB-BEA4-4B7F-1545B0DC3A73}"/>
+              </a:ext>
+            </a:extLst>
+          </p:cNvPr>
           <p:cNvSpPr>
             <a:spLocks noGrp="1"/>
           </p:cNvSpPr>
@@ -2311,7 +2524,13 @@
       </p:sp>
       <p:sp>
         <p:nvSpPr>
-          <p:cNvPr id="6" name="Footer Placeholder 5"/>
+          <p:cNvPr id="6" name="Footer Placeholder 5">
+            <a:extLst>
+              <a:ext uri="{FF2B5EF4-FFF2-40B4-BE49-F238E27FC236}">
+                <a16:creationId xmlns:a16="http://schemas.microsoft.com/office/drawing/2014/main" xmlns="" id="{CD899311-B569-3D99-B257-5CEB03A68767}"/>
+              </a:ext>
+            </a:extLst>
+          </p:cNvPr>
           <p:cNvSpPr>
             <a:spLocks noGrp="1"/>
           </p:cNvSpPr>
@@ -2334,7 +2553,13 @@
       </p:sp>
       <p:sp>
         <p:nvSpPr>
-          <p:cNvPr id="7" name="Slide Number Placeholder 6"/>
+          <p:cNvPr id="7" name="Slide Number Placeholder 6">
+            <a:extLst>
+              <a:ext uri="{FF2B5EF4-FFF2-40B4-BE49-F238E27FC236}">
+                <a16:creationId xmlns:a16="http://schemas.microsoft.com/office/drawing/2014/main" xmlns="" id="{2AE828AD-34AD-9A23-4FFC-4C32387C94EB}"/>
+              </a:ext>
+            </a:extLst>
+          </p:cNvPr>
           <p:cNvSpPr>
             <a:spLocks noGrp="1"/>
           </p:cNvSpPr>
@@ -2349,12 +2574,19 @@
           <a:p>
             <a:fld id="{D6396F81-1074-6B40-A92F-A06CCD3B4178}" type="slidenum">
               <a:rPr lang="en-US" smtClean="0"/>
+              <a:pPr/>
+              <a:t>‹#›</a:t>
             </a:fld>
             <a:endParaRPr lang="en-US"/>
           </a:p>
         </p:txBody>
       </p:sp>
     </p:spTree>
+    <p:extLst>
+      <p:ext uri="{BB962C8B-B14F-4D97-AF65-F5344CB8AC3E}">
+        <p14:creationId xmlns:p14="http://schemas.microsoft.com/office/powerpoint/2010/main" xmlns="" val="1101466135"/>
+      </p:ext>
+    </p:extLst>
   </p:cSld>
   <p:clrMapOvr>
     <a:masterClrMapping/>
@@ -2381,7 +2613,13 @@
       </p:grpSpPr>
       <p:sp>
         <p:nvSpPr>
-          <p:cNvPr id="2" name="Title 1"/>
+          <p:cNvPr id="2" name="Title 1">
+            <a:extLst>
+              <a:ext uri="{FF2B5EF4-FFF2-40B4-BE49-F238E27FC236}">
+                <a16:creationId xmlns:a16="http://schemas.microsoft.com/office/drawing/2014/main" xmlns="" id="{DDE56895-A3B7-F0FB-3CBE-59E564F229E8}"/>
+              </a:ext>
+            </a:extLst>
+          </p:cNvPr>
           <p:cNvSpPr>
             <a:spLocks noGrp="1"/>
           </p:cNvSpPr>
@@ -2409,7 +2647,13 @@
       </p:sp>
       <p:sp>
         <p:nvSpPr>
-          <p:cNvPr id="3" name="Text Placeholder 2"/>
+          <p:cNvPr id="3" name="Text Placeholder 2">
+            <a:extLst>
+              <a:ext uri="{FF2B5EF4-FFF2-40B4-BE49-F238E27FC236}">
+                <a16:creationId xmlns:a16="http://schemas.microsoft.com/office/drawing/2014/main" xmlns="" id="{B129C285-ECC0-3375-66EF-B240D726BE89}"/>
+              </a:ext>
+            </a:extLst>
+          </p:cNvPr>
           <p:cNvSpPr>
             <a:spLocks noGrp="1"/>
           </p:cNvSpPr>
@@ -2469,13 +2713,18 @@
               <a:rPr lang="en-GB"/>
               <a:t>Click to edit Master text styles</a:t>
             </a:r>
-            <a:endParaRPr lang="en-GB"/>
-          </a:p>
-        </p:txBody>
-      </p:sp>
-      <p:sp>
-        <p:nvSpPr>
-          <p:cNvPr id="4" name="Content Placeholder 3"/>
+          </a:p>
+        </p:txBody>
+      </p:sp>
+      <p:sp>
+        <p:nvSpPr>
+          <p:cNvPr id="4" name="Content Placeholder 3">
+            <a:extLst>
+              <a:ext uri="{FF2B5EF4-FFF2-40B4-BE49-F238E27FC236}">
+                <a16:creationId xmlns:a16="http://schemas.microsoft.com/office/drawing/2014/main" xmlns="" id="{12DB153A-9265-EAEC-A55D-2519057330C6}"/>
+              </a:ext>
+            </a:extLst>
+          </p:cNvPr>
           <p:cNvSpPr>
             <a:spLocks noGrp="1"/>
           </p:cNvSpPr>
@@ -2498,7 +2747,6 @@
               <a:rPr lang="en-GB"/>
               <a:t>Click to edit Master text styles</a:t>
             </a:r>
-            <a:endParaRPr lang="en-GB"/>
           </a:p>
           <a:p>
             <a:pPr lvl="1"/>
@@ -2506,7 +2754,6 @@
               <a:rPr lang="en-GB"/>
               <a:t>Second level</a:t>
             </a:r>
-            <a:endParaRPr lang="en-GB"/>
           </a:p>
           <a:p>
             <a:pPr lvl="2"/>
@@ -2514,7 +2761,6 @@
               <a:rPr lang="en-GB"/>
               <a:t>Third level</a:t>
             </a:r>
-            <a:endParaRPr lang="en-GB"/>
           </a:p>
           <a:p>
             <a:pPr lvl="3"/>
@@ -2522,7 +2768,6 @@
               <a:rPr lang="en-GB"/>
               <a:t>Fourth level</a:t>
             </a:r>
-            <a:endParaRPr lang="en-GB"/>
           </a:p>
           <a:p>
             <a:pPr lvl="4"/>
@@ -2536,7 +2781,13 @@
       </p:sp>
       <p:sp>
         <p:nvSpPr>
-          <p:cNvPr id="5" name="Text Placeholder 4"/>
+          <p:cNvPr id="5" name="Text Placeholder 4">
+            <a:extLst>
+              <a:ext uri="{FF2B5EF4-FFF2-40B4-BE49-F238E27FC236}">
+                <a16:creationId xmlns:a16="http://schemas.microsoft.com/office/drawing/2014/main" xmlns="" id="{D4E62BD6-069B-567C-13A2-AD51A312FB5E}"/>
+              </a:ext>
+            </a:extLst>
+          </p:cNvPr>
           <p:cNvSpPr>
             <a:spLocks noGrp="1"/>
           </p:cNvSpPr>
@@ -2596,13 +2847,18 @@
               <a:rPr lang="en-GB"/>
               <a:t>Click to edit Master text styles</a:t>
             </a:r>
-            <a:endParaRPr lang="en-GB"/>
-          </a:p>
-        </p:txBody>
-      </p:sp>
-      <p:sp>
-        <p:nvSpPr>
-          <p:cNvPr id="6" name="Content Placeholder 5"/>
+          </a:p>
+        </p:txBody>
+      </p:sp>
+      <p:sp>
+        <p:nvSpPr>
+          <p:cNvPr id="6" name="Content Placeholder 5">
+            <a:extLst>
+              <a:ext uri="{FF2B5EF4-FFF2-40B4-BE49-F238E27FC236}">
+                <a16:creationId xmlns:a16="http://schemas.microsoft.com/office/drawing/2014/main" xmlns="" id="{660CFDC1-AF24-C301-0A26-DA099D8FF3D8}"/>
+              </a:ext>
+            </a:extLst>
+          </p:cNvPr>
           <p:cNvSpPr>
             <a:spLocks noGrp="1"/>
           </p:cNvSpPr>
@@ -2625,7 +2881,6 @@
               <a:rPr lang="en-GB"/>
               <a:t>Click to edit Master text styles</a:t>
             </a:r>
-            <a:endParaRPr lang="en-GB"/>
           </a:p>
           <a:p>
             <a:pPr lvl="1"/>
@@ -2633,7 +2888,6 @@
               <a:rPr lang="en-GB"/>
               <a:t>Second level</a:t>
             </a:r>
-            <a:endParaRPr lang="en-GB"/>
           </a:p>
           <a:p>
             <a:pPr lvl="2"/>
@@ -2641,7 +2895,6 @@
               <a:rPr lang="en-GB"/>
               <a:t>Third level</a:t>
             </a:r>
-            <a:endParaRPr lang="en-GB"/>
           </a:p>
           <a:p>
             <a:pPr lvl="3"/>
@@ -2649,7 +2902,6 @@
               <a:rPr lang="en-GB"/>
               <a:t>Fourth level</a:t>
             </a:r>
-            <a:endParaRPr lang="en-GB"/>
           </a:p>
           <a:p>
             <a:pPr lvl="4"/>
@@ -2663,7 +2915,13 @@
       </p:sp>
       <p:sp>
         <p:nvSpPr>
-          <p:cNvPr id="7" name="Date Placeholder 6"/>
+          <p:cNvPr id="7" name="Date Placeholder 6">
+            <a:extLst>
+              <a:ext uri="{FF2B5EF4-FFF2-40B4-BE49-F238E27FC236}">
+                <a16:creationId xmlns:a16="http://schemas.microsoft.com/office/drawing/2014/main" xmlns="" id="{A22CB484-D858-5027-D2CF-125E103D2F43}"/>
+              </a:ext>
+            </a:extLst>
+          </p:cNvPr>
           <p:cNvSpPr>
             <a:spLocks noGrp="1"/>
           </p:cNvSpPr>
@@ -2686,7 +2944,13 @@
       </p:sp>
       <p:sp>
         <p:nvSpPr>
-          <p:cNvPr id="8" name="Footer Placeholder 7"/>
+          <p:cNvPr id="8" name="Footer Placeholder 7">
+            <a:extLst>
+              <a:ext uri="{FF2B5EF4-FFF2-40B4-BE49-F238E27FC236}">
+                <a16:creationId xmlns:a16="http://schemas.microsoft.com/office/drawing/2014/main" xmlns="" id="{68CD1DFD-AA21-1102-AD58-F0AB4361723D}"/>
+              </a:ext>
+            </a:extLst>
+          </p:cNvPr>
           <p:cNvSpPr>
             <a:spLocks noGrp="1"/>
           </p:cNvSpPr>
@@ -2709,7 +2973,13 @@
       </p:sp>
       <p:sp>
         <p:nvSpPr>
-          <p:cNvPr id="9" name="Slide Number Placeholder 8"/>
+          <p:cNvPr id="9" name="Slide Number Placeholder 8">
+            <a:extLst>
+              <a:ext uri="{FF2B5EF4-FFF2-40B4-BE49-F238E27FC236}">
+                <a16:creationId xmlns:a16="http://schemas.microsoft.com/office/drawing/2014/main" xmlns="" id="{6058466D-C960-00E9-B91E-E20525158DCC}"/>
+              </a:ext>
+            </a:extLst>
+          </p:cNvPr>
           <p:cNvSpPr>
             <a:spLocks noGrp="1"/>
           </p:cNvSpPr>
@@ -2724,12 +2994,19 @@
           <a:p>
             <a:fld id="{D6396F81-1074-6B40-A92F-A06CCD3B4178}" type="slidenum">
               <a:rPr lang="en-US" smtClean="0"/>
+              <a:pPr/>
+              <a:t>‹#›</a:t>
             </a:fld>
             <a:endParaRPr lang="en-US"/>
           </a:p>
         </p:txBody>
       </p:sp>
     </p:spTree>
+    <p:extLst>
+      <p:ext uri="{BB962C8B-B14F-4D97-AF65-F5344CB8AC3E}">
+        <p14:creationId xmlns:p14="http://schemas.microsoft.com/office/powerpoint/2010/main" xmlns="" val="495166604"/>
+      </p:ext>
+    </p:extLst>
   </p:cSld>
   <p:clrMapOvr>
     <a:masterClrMapping/>
@@ -2756,7 +3033,13 @@
       </p:grpSpPr>
       <p:sp>
         <p:nvSpPr>
-          <p:cNvPr id="2" name="Title 1"/>
+          <p:cNvPr id="2" name="Title 1">
+            <a:extLst>
+              <a:ext uri="{FF2B5EF4-FFF2-40B4-BE49-F238E27FC236}">
+                <a16:creationId xmlns:a16="http://schemas.microsoft.com/office/drawing/2014/main" xmlns="" id="{C14DA370-C77E-4354-33A4-1D2D9DDD6F4B}"/>
+              </a:ext>
+            </a:extLst>
+          </p:cNvPr>
           <p:cNvSpPr>
             <a:spLocks noGrp="1"/>
           </p:cNvSpPr>
@@ -2779,7 +3062,13 @@
       </p:sp>
       <p:sp>
         <p:nvSpPr>
-          <p:cNvPr id="3" name="Content Placeholder 2"/>
+          <p:cNvPr id="3" name="Content Placeholder 2">
+            <a:extLst>
+              <a:ext uri="{FF2B5EF4-FFF2-40B4-BE49-F238E27FC236}">
+                <a16:creationId xmlns:a16="http://schemas.microsoft.com/office/drawing/2014/main" xmlns="" id="{A43FE7F8-1A57-17F5-243A-454005CCDF16}"/>
+              </a:ext>
+            </a:extLst>
+          </p:cNvPr>
           <p:cNvSpPr>
             <a:spLocks noGrp="1"/>
           </p:cNvSpPr>
@@ -2797,7 +3086,6 @@
               <a:rPr lang="en-GB"/>
               <a:t>Click to edit Master text styles</a:t>
             </a:r>
-            <a:endParaRPr lang="en-GB"/>
           </a:p>
           <a:p>
             <a:pPr lvl="1"/>
@@ -2805,7 +3093,6 @@
               <a:rPr lang="en-GB"/>
               <a:t>Second level</a:t>
             </a:r>
-            <a:endParaRPr lang="en-GB"/>
           </a:p>
           <a:p>
             <a:pPr lvl="2"/>
@@ -2813,7 +3100,6 @@
               <a:rPr lang="en-GB"/>
               <a:t>Third level</a:t>
             </a:r>
-            <a:endParaRPr lang="en-GB"/>
           </a:p>
           <a:p>
             <a:pPr lvl="3"/>
@@ -2821,7 +3107,6 @@
               <a:rPr lang="en-GB"/>
               <a:t>Fourth level</a:t>
             </a:r>
-            <a:endParaRPr lang="en-GB"/>
           </a:p>
           <a:p>
             <a:pPr lvl="4"/>
@@ -2835,7 +3120,13 @@
       </p:sp>
       <p:sp>
         <p:nvSpPr>
-          <p:cNvPr id="4" name="Date Placeholder 3"/>
+          <p:cNvPr id="4" name="Date Placeholder 3">
+            <a:extLst>
+              <a:ext uri="{FF2B5EF4-FFF2-40B4-BE49-F238E27FC236}">
+                <a16:creationId xmlns:a16="http://schemas.microsoft.com/office/drawing/2014/main" xmlns="" id="{49EAE72D-6D76-FAB8-D597-99BF2087AA5B}"/>
+              </a:ext>
+            </a:extLst>
+          </p:cNvPr>
           <p:cNvSpPr>
             <a:spLocks noGrp="1"/>
           </p:cNvSpPr>
@@ -2858,7 +3149,13 @@
       </p:sp>
       <p:sp>
         <p:nvSpPr>
-          <p:cNvPr id="5" name="Footer Placeholder 4"/>
+          <p:cNvPr id="5" name="Footer Placeholder 4">
+            <a:extLst>
+              <a:ext uri="{FF2B5EF4-FFF2-40B4-BE49-F238E27FC236}">
+                <a16:creationId xmlns:a16="http://schemas.microsoft.com/office/drawing/2014/main" xmlns="" id="{91860C41-C703-1443-60E7-2BEF34D36208}"/>
+              </a:ext>
+            </a:extLst>
+          </p:cNvPr>
           <p:cNvSpPr>
             <a:spLocks noGrp="1"/>
           </p:cNvSpPr>
@@ -2881,7 +3178,13 @@
       </p:sp>
       <p:sp>
         <p:nvSpPr>
-          <p:cNvPr id="6" name="Slide Number Placeholder 5"/>
+          <p:cNvPr id="6" name="Slide Number Placeholder 5">
+            <a:extLst>
+              <a:ext uri="{FF2B5EF4-FFF2-40B4-BE49-F238E27FC236}">
+                <a16:creationId xmlns:a16="http://schemas.microsoft.com/office/drawing/2014/main" xmlns="" id="{B3BB3600-770E-6D67-2A66-D2FECF5D3BC6}"/>
+              </a:ext>
+            </a:extLst>
+          </p:cNvPr>
           <p:cNvSpPr>
             <a:spLocks noGrp="1"/>
           </p:cNvSpPr>
@@ -2896,6 +3199,8 @@
           <a:p>
             <a:fld id="{B961B71F-4B40-8942-BB88-E0F5C0B46E10}" type="slidenum">
               <a:rPr lang="en-US" smtClean="0"/>
+              <a:pPr/>
+              <a:t>‹#›</a:t>
             </a:fld>
             <a:endParaRPr lang="en-US"/>
           </a:p>
@@ -2903,7 +3208,13 @@
       </p:sp>
       <p:sp>
         <p:nvSpPr>
-          <p:cNvPr id="8" name="Rectangle 7"/>
+          <p:cNvPr id="8" name="Rectangle 7">
+            <a:extLst>
+              <a:ext uri="{FF2B5EF4-FFF2-40B4-BE49-F238E27FC236}">
+                <a16:creationId xmlns:a16="http://schemas.microsoft.com/office/drawing/2014/main" xmlns="" id="{8E776DCD-546C-A1AC-C961-3F3EEC504416}"/>
+              </a:ext>
+            </a:extLst>
+          </p:cNvPr>
           <p:cNvSpPr/>
           <p:nvPr userDrawn="1"/>
         </p:nvSpPr>
@@ -2954,6 +3265,11 @@
         </p:txBody>
       </p:sp>
     </p:spTree>
+    <p:extLst>
+      <p:ext uri="{BB962C8B-B14F-4D97-AF65-F5344CB8AC3E}">
+        <p14:creationId xmlns:p14="http://schemas.microsoft.com/office/powerpoint/2010/main" xmlns="" val="1210641709"/>
+      </p:ext>
+    </p:extLst>
   </p:cSld>
   <p:clrMapOvr>
     <a:masterClrMapping/>
@@ -2980,7 +3296,13 @@
       </p:grpSpPr>
       <p:sp>
         <p:nvSpPr>
-          <p:cNvPr id="2" name="Title 1"/>
+          <p:cNvPr id="2" name="Title 1">
+            <a:extLst>
+              <a:ext uri="{FF2B5EF4-FFF2-40B4-BE49-F238E27FC236}">
+                <a16:creationId xmlns:a16="http://schemas.microsoft.com/office/drawing/2014/main" xmlns="" id="{394A5DA9-698C-D133-BCF7-93A02E210C28}"/>
+              </a:ext>
+            </a:extLst>
+          </p:cNvPr>
           <p:cNvSpPr>
             <a:spLocks noGrp="1"/>
           </p:cNvSpPr>
@@ -3012,7 +3334,13 @@
       </p:sp>
       <p:sp>
         <p:nvSpPr>
-          <p:cNvPr id="3" name="Text Placeholder 2"/>
+          <p:cNvPr id="3" name="Text Placeholder 2">
+            <a:extLst>
+              <a:ext uri="{FF2B5EF4-FFF2-40B4-BE49-F238E27FC236}">
+                <a16:creationId xmlns:a16="http://schemas.microsoft.com/office/drawing/2014/main" xmlns="" id="{3FA85215-9C62-1486-DEC7-AF8E59725B1A}"/>
+              </a:ext>
+            </a:extLst>
+          </p:cNvPr>
           <p:cNvSpPr>
             <a:spLocks noGrp="1"/>
           </p:cNvSpPr>
@@ -3126,13 +3454,18 @@
               <a:rPr lang="en-GB"/>
               <a:t>Click to edit Master text styles</a:t>
             </a:r>
-            <a:endParaRPr lang="en-GB"/>
-          </a:p>
-        </p:txBody>
-      </p:sp>
-      <p:sp>
-        <p:nvSpPr>
-          <p:cNvPr id="4" name="Date Placeholder 3"/>
+          </a:p>
+        </p:txBody>
+      </p:sp>
+      <p:sp>
+        <p:nvSpPr>
+          <p:cNvPr id="4" name="Date Placeholder 3">
+            <a:extLst>
+              <a:ext uri="{FF2B5EF4-FFF2-40B4-BE49-F238E27FC236}">
+                <a16:creationId xmlns:a16="http://schemas.microsoft.com/office/drawing/2014/main" xmlns="" id="{0AD292FD-C465-3FCB-1CEB-331C31A973F6}"/>
+              </a:ext>
+            </a:extLst>
+          </p:cNvPr>
           <p:cNvSpPr>
             <a:spLocks noGrp="1"/>
           </p:cNvSpPr>
@@ -3155,7 +3488,13 @@
       </p:sp>
       <p:sp>
         <p:nvSpPr>
-          <p:cNvPr id="5" name="Footer Placeholder 4"/>
+          <p:cNvPr id="5" name="Footer Placeholder 4">
+            <a:extLst>
+              <a:ext uri="{FF2B5EF4-FFF2-40B4-BE49-F238E27FC236}">
+                <a16:creationId xmlns:a16="http://schemas.microsoft.com/office/drawing/2014/main" xmlns="" id="{03196C18-4538-A1F2-0B35-7684E5B30A32}"/>
+              </a:ext>
+            </a:extLst>
+          </p:cNvPr>
           <p:cNvSpPr>
             <a:spLocks noGrp="1"/>
           </p:cNvSpPr>
@@ -3178,7 +3517,13 @@
       </p:sp>
       <p:sp>
         <p:nvSpPr>
-          <p:cNvPr id="6" name="Slide Number Placeholder 5"/>
+          <p:cNvPr id="6" name="Slide Number Placeholder 5">
+            <a:extLst>
+              <a:ext uri="{FF2B5EF4-FFF2-40B4-BE49-F238E27FC236}">
+                <a16:creationId xmlns:a16="http://schemas.microsoft.com/office/drawing/2014/main" xmlns="" id="{8F05BEFA-16A3-B084-9011-B7E85C9C926E}"/>
+              </a:ext>
+            </a:extLst>
+          </p:cNvPr>
           <p:cNvSpPr>
             <a:spLocks noGrp="1"/>
           </p:cNvSpPr>
@@ -3193,12 +3538,19 @@
           <a:p>
             <a:fld id="{B961B71F-4B40-8942-BB88-E0F5C0B46E10}" type="slidenum">
               <a:rPr lang="en-US" smtClean="0"/>
+              <a:pPr/>
+              <a:t>‹#›</a:t>
             </a:fld>
             <a:endParaRPr lang="en-US"/>
           </a:p>
         </p:txBody>
       </p:sp>
     </p:spTree>
+    <p:extLst>
+      <p:ext uri="{BB962C8B-B14F-4D97-AF65-F5344CB8AC3E}">
+        <p14:creationId xmlns:p14="http://schemas.microsoft.com/office/powerpoint/2010/main" xmlns="" val="2244370396"/>
+      </p:ext>
+    </p:extLst>
   </p:cSld>
   <p:clrMapOvr>
     <a:masterClrMapping/>
@@ -3225,7 +3577,13 @@
       </p:grpSpPr>
       <p:sp>
         <p:nvSpPr>
-          <p:cNvPr id="2" name="Title 1"/>
+          <p:cNvPr id="2" name="Title 1">
+            <a:extLst>
+              <a:ext uri="{FF2B5EF4-FFF2-40B4-BE49-F238E27FC236}">
+                <a16:creationId xmlns:a16="http://schemas.microsoft.com/office/drawing/2014/main" xmlns="" id="{B5E3A91F-6631-AA20-E58B-064235B6DD1C}"/>
+              </a:ext>
+            </a:extLst>
+          </p:cNvPr>
           <p:cNvSpPr>
             <a:spLocks noGrp="1"/>
           </p:cNvSpPr>
@@ -3248,7 +3606,13 @@
       </p:sp>
       <p:sp>
         <p:nvSpPr>
-          <p:cNvPr id="3" name="Content Placeholder 2"/>
+          <p:cNvPr id="3" name="Content Placeholder 2">
+            <a:extLst>
+              <a:ext uri="{FF2B5EF4-FFF2-40B4-BE49-F238E27FC236}">
+                <a16:creationId xmlns:a16="http://schemas.microsoft.com/office/drawing/2014/main" xmlns="" id="{B40029CD-C8C6-CEFE-D059-40BEA299756E}"/>
+              </a:ext>
+            </a:extLst>
+          </p:cNvPr>
           <p:cNvSpPr>
             <a:spLocks noGrp="1"/>
           </p:cNvSpPr>
@@ -3271,7 +3635,6 @@
               <a:rPr lang="en-GB"/>
               <a:t>Click to edit Master text styles</a:t>
             </a:r>
-            <a:endParaRPr lang="en-GB"/>
           </a:p>
           <a:p>
             <a:pPr lvl="1"/>
@@ -3279,7 +3642,6 @@
               <a:rPr lang="en-GB"/>
               <a:t>Second level</a:t>
             </a:r>
-            <a:endParaRPr lang="en-GB"/>
           </a:p>
           <a:p>
             <a:pPr lvl="2"/>
@@ -3287,7 +3649,6 @@
               <a:rPr lang="en-GB"/>
               <a:t>Third level</a:t>
             </a:r>
-            <a:endParaRPr lang="en-GB"/>
           </a:p>
           <a:p>
             <a:pPr lvl="3"/>
@@ -3295,7 +3656,6 @@
               <a:rPr lang="en-GB"/>
               <a:t>Fourth level</a:t>
             </a:r>
-            <a:endParaRPr lang="en-GB"/>
           </a:p>
           <a:p>
             <a:pPr lvl="4"/>
@@ -3309,7 +3669,13 @@
       </p:sp>
       <p:sp>
         <p:nvSpPr>
-          <p:cNvPr id="4" name="Content Placeholder 3"/>
+          <p:cNvPr id="4" name="Content Placeholder 3">
+            <a:extLst>
+              <a:ext uri="{FF2B5EF4-FFF2-40B4-BE49-F238E27FC236}">
+                <a16:creationId xmlns:a16="http://schemas.microsoft.com/office/drawing/2014/main" xmlns="" id="{B175D9AB-9E5E-59E2-9DA3-6C54D45EAC41}"/>
+              </a:ext>
+            </a:extLst>
+          </p:cNvPr>
           <p:cNvSpPr>
             <a:spLocks noGrp="1"/>
           </p:cNvSpPr>
@@ -3332,7 +3698,6 @@
               <a:rPr lang="en-GB"/>
               <a:t>Click to edit Master text styles</a:t>
             </a:r>
-            <a:endParaRPr lang="en-GB"/>
           </a:p>
           <a:p>
             <a:pPr lvl="1"/>
@@ -3340,7 +3705,6 @@
               <a:rPr lang="en-GB"/>
               <a:t>Second level</a:t>
             </a:r>
-            <a:endParaRPr lang="en-GB"/>
           </a:p>
           <a:p>
             <a:pPr lvl="2"/>
@@ -3348,7 +3712,6 @@
               <a:rPr lang="en-GB"/>
               <a:t>Third level</a:t>
             </a:r>
-            <a:endParaRPr lang="en-GB"/>
           </a:p>
           <a:p>
             <a:pPr lvl="3"/>
@@ -3356,7 +3719,6 @@
               <a:rPr lang="en-GB"/>
               <a:t>Fourth level</a:t>
             </a:r>
-            <a:endParaRPr lang="en-GB"/>
           </a:p>
           <a:p>
             <a:pPr lvl="4"/>
@@ -3370,7 +3732,13 @@
       </p:sp>
       <p:sp>
         <p:nvSpPr>
-          <p:cNvPr id="5" name="Date Placeholder 4"/>
+          <p:cNvPr id="5" name="Date Placeholder 4">
+            <a:extLst>
+              <a:ext uri="{FF2B5EF4-FFF2-40B4-BE49-F238E27FC236}">
+                <a16:creationId xmlns:a16="http://schemas.microsoft.com/office/drawing/2014/main" xmlns="" id="{2A3C372B-55E2-4467-1C5C-88EAE728396A}"/>
+              </a:ext>
+            </a:extLst>
+          </p:cNvPr>
           <p:cNvSpPr>
             <a:spLocks noGrp="1"/>
           </p:cNvSpPr>
@@ -3393,7 +3761,13 @@
       </p:sp>
       <p:sp>
         <p:nvSpPr>
-          <p:cNvPr id="6" name="Footer Placeholder 5"/>
+          <p:cNvPr id="6" name="Footer Placeholder 5">
+            <a:extLst>
+              <a:ext uri="{FF2B5EF4-FFF2-40B4-BE49-F238E27FC236}">
+                <a16:creationId xmlns:a16="http://schemas.microsoft.com/office/drawing/2014/main" xmlns="" id="{CC0897BD-CB93-AC5A-9B15-FD7F4D952953}"/>
+              </a:ext>
+            </a:extLst>
+          </p:cNvPr>
           <p:cNvSpPr>
             <a:spLocks noGrp="1"/>
           </p:cNvSpPr>
@@ -3416,7 +3790,13 @@
       </p:sp>
       <p:sp>
         <p:nvSpPr>
-          <p:cNvPr id="7" name="Slide Number Placeholder 6"/>
+          <p:cNvPr id="7" name="Slide Number Placeholder 6">
+            <a:extLst>
+              <a:ext uri="{FF2B5EF4-FFF2-40B4-BE49-F238E27FC236}">
+                <a16:creationId xmlns:a16="http://schemas.microsoft.com/office/drawing/2014/main" xmlns="" id="{8D5540F5-8BB9-4C4C-626E-5D45C97E3728}"/>
+              </a:ext>
+            </a:extLst>
+          </p:cNvPr>
           <p:cNvSpPr>
             <a:spLocks noGrp="1"/>
           </p:cNvSpPr>
@@ -3431,12 +3811,19 @@
           <a:p>
             <a:fld id="{B961B71F-4B40-8942-BB88-E0F5C0B46E10}" type="slidenum">
               <a:rPr lang="en-US" smtClean="0"/>
+              <a:pPr/>
+              <a:t>‹#›</a:t>
             </a:fld>
             <a:endParaRPr lang="en-US"/>
           </a:p>
         </p:txBody>
       </p:sp>
     </p:spTree>
+    <p:extLst>
+      <p:ext uri="{BB962C8B-B14F-4D97-AF65-F5344CB8AC3E}">
+        <p14:creationId xmlns:p14="http://schemas.microsoft.com/office/powerpoint/2010/main" xmlns="" val="1308253053"/>
+      </p:ext>
+    </p:extLst>
   </p:cSld>
   <p:clrMapOvr>
     <a:masterClrMapping/>
@@ -3463,7 +3850,13 @@
       </p:grpSpPr>
       <p:sp>
         <p:nvSpPr>
-          <p:cNvPr id="2" name="Title 1"/>
+          <p:cNvPr id="2" name="Title 1">
+            <a:extLst>
+              <a:ext uri="{FF2B5EF4-FFF2-40B4-BE49-F238E27FC236}">
+                <a16:creationId xmlns:a16="http://schemas.microsoft.com/office/drawing/2014/main" xmlns="" id="{1CD68A3B-B4EE-2816-3ADC-1938541424A2}"/>
+              </a:ext>
+            </a:extLst>
+          </p:cNvPr>
           <p:cNvSpPr>
             <a:spLocks noGrp="1"/>
           </p:cNvSpPr>
@@ -3491,7 +3884,13 @@
       </p:sp>
       <p:sp>
         <p:nvSpPr>
-          <p:cNvPr id="3" name="Text Placeholder 2"/>
+          <p:cNvPr id="3" name="Text Placeholder 2">
+            <a:extLst>
+              <a:ext uri="{FF2B5EF4-FFF2-40B4-BE49-F238E27FC236}">
+                <a16:creationId xmlns:a16="http://schemas.microsoft.com/office/drawing/2014/main" xmlns="" id="{261AF86E-35F8-453B-F58E-48D8C4903AEE}"/>
+              </a:ext>
+            </a:extLst>
+          </p:cNvPr>
           <p:cNvSpPr>
             <a:spLocks noGrp="1"/>
           </p:cNvSpPr>
@@ -3551,13 +3950,18 @@
               <a:rPr lang="en-GB"/>
               <a:t>Click to edit Master text styles</a:t>
             </a:r>
-            <a:endParaRPr lang="en-GB"/>
-          </a:p>
-        </p:txBody>
-      </p:sp>
-      <p:sp>
-        <p:nvSpPr>
-          <p:cNvPr id="4" name="Content Placeholder 3"/>
+          </a:p>
+        </p:txBody>
+      </p:sp>
+      <p:sp>
+        <p:nvSpPr>
+          <p:cNvPr id="4" name="Content Placeholder 3">
+            <a:extLst>
+              <a:ext uri="{FF2B5EF4-FFF2-40B4-BE49-F238E27FC236}">
+                <a16:creationId xmlns:a16="http://schemas.microsoft.com/office/drawing/2014/main" xmlns="" id="{D63D8923-FBC0-8866-8350-696FB3D22BF6}"/>
+              </a:ext>
+            </a:extLst>
+          </p:cNvPr>
           <p:cNvSpPr>
             <a:spLocks noGrp="1"/>
           </p:cNvSpPr>
@@ -3580,7 +3984,6 @@
               <a:rPr lang="en-GB"/>
               <a:t>Click to edit Master text styles</a:t>
             </a:r>
-            <a:endParaRPr lang="en-GB"/>
           </a:p>
           <a:p>
             <a:pPr lvl="1"/>
@@ -3588,7 +3991,6 @@
               <a:rPr lang="en-GB"/>
               <a:t>Second level</a:t>
             </a:r>
-            <a:endParaRPr lang="en-GB"/>
           </a:p>
           <a:p>
             <a:pPr lvl="2"/>
@@ -3596,7 +3998,6 @@
               <a:rPr lang="en-GB"/>
               <a:t>Third level</a:t>
             </a:r>
-            <a:endParaRPr lang="en-GB"/>
           </a:p>
           <a:p>
             <a:pPr lvl="3"/>
@@ -3604,7 +4005,6 @@
               <a:rPr lang="en-GB"/>
               <a:t>Fourth level</a:t>
             </a:r>
-            <a:endParaRPr lang="en-GB"/>
           </a:p>
           <a:p>
             <a:pPr lvl="4"/>
@@ -3618,7 +4018,13 @@
       </p:sp>
       <p:sp>
         <p:nvSpPr>
-          <p:cNvPr id="5" name="Text Placeholder 4"/>
+          <p:cNvPr id="5" name="Text Placeholder 4">
+            <a:extLst>
+              <a:ext uri="{FF2B5EF4-FFF2-40B4-BE49-F238E27FC236}">
+                <a16:creationId xmlns:a16="http://schemas.microsoft.com/office/drawing/2014/main" xmlns="" id="{E6545281-3CB5-361A-7D56-C6E37E290D3C}"/>
+              </a:ext>
+            </a:extLst>
+          </p:cNvPr>
           <p:cNvSpPr>
             <a:spLocks noGrp="1"/>
           </p:cNvSpPr>
@@ -3678,13 +4084,18 @@
               <a:rPr lang="en-GB"/>
               <a:t>Click to edit Master text styles</a:t>
             </a:r>
-            <a:endParaRPr lang="en-GB"/>
-          </a:p>
-        </p:txBody>
-      </p:sp>
-      <p:sp>
-        <p:nvSpPr>
-          <p:cNvPr id="6" name="Content Placeholder 5"/>
+          </a:p>
+        </p:txBody>
+      </p:sp>
+      <p:sp>
+        <p:nvSpPr>
+          <p:cNvPr id="6" name="Content Placeholder 5">
+            <a:extLst>
+              <a:ext uri="{FF2B5EF4-FFF2-40B4-BE49-F238E27FC236}">
+                <a16:creationId xmlns:a16="http://schemas.microsoft.com/office/drawing/2014/main" xmlns="" id="{F9F62343-9DB8-07DC-AD19-22AE6A7E5D6D}"/>
+              </a:ext>
+            </a:extLst>
+          </p:cNvPr>
           <p:cNvSpPr>
             <a:spLocks noGrp="1"/>
           </p:cNvSpPr>
@@ -3707,7 +4118,6 @@
               <a:rPr lang="en-GB"/>
               <a:t>Click to edit Master text styles</a:t>
             </a:r>
-            <a:endParaRPr lang="en-GB"/>
           </a:p>
           <a:p>
             <a:pPr lvl="1"/>
@@ -3715,7 +4125,6 @@
               <a:rPr lang="en-GB"/>
               <a:t>Second level</a:t>
             </a:r>
-            <a:endParaRPr lang="en-GB"/>
           </a:p>
           <a:p>
             <a:pPr lvl="2"/>
@@ -3723,7 +4132,6 @@
               <a:rPr lang="en-GB"/>
               <a:t>Third level</a:t>
             </a:r>
-            <a:endParaRPr lang="en-GB"/>
           </a:p>
           <a:p>
             <a:pPr lvl="3"/>
@@ -3731,7 +4139,6 @@
               <a:rPr lang="en-GB"/>
               <a:t>Fourth level</a:t>
             </a:r>
-            <a:endParaRPr lang="en-GB"/>
           </a:p>
           <a:p>
             <a:pPr lvl="4"/>
@@ -3745,7 +4152,13 @@
       </p:sp>
       <p:sp>
         <p:nvSpPr>
-          <p:cNvPr id="7" name="Date Placeholder 6"/>
+          <p:cNvPr id="7" name="Date Placeholder 6">
+            <a:extLst>
+              <a:ext uri="{FF2B5EF4-FFF2-40B4-BE49-F238E27FC236}">
+                <a16:creationId xmlns:a16="http://schemas.microsoft.com/office/drawing/2014/main" xmlns="" id="{3FEB0191-CD7B-6170-8655-A3CD1009BEA8}"/>
+              </a:ext>
+            </a:extLst>
+          </p:cNvPr>
           <p:cNvSpPr>
             <a:spLocks noGrp="1"/>
           </p:cNvSpPr>
@@ -3768,7 +4181,13 @@
       </p:sp>
       <p:sp>
         <p:nvSpPr>
-          <p:cNvPr id="8" name="Footer Placeholder 7"/>
+          <p:cNvPr id="8" name="Footer Placeholder 7">
+            <a:extLst>
+              <a:ext uri="{FF2B5EF4-FFF2-40B4-BE49-F238E27FC236}">
+                <a16:creationId xmlns:a16="http://schemas.microsoft.com/office/drawing/2014/main" xmlns="" id="{CD680C4C-B6E8-81B1-E2F5-D6264E3F6A44}"/>
+              </a:ext>
+            </a:extLst>
+          </p:cNvPr>
           <p:cNvSpPr>
             <a:spLocks noGrp="1"/>
           </p:cNvSpPr>
@@ -3791,7 +4210,13 @@
       </p:sp>
       <p:sp>
         <p:nvSpPr>
-          <p:cNvPr id="9" name="Slide Number Placeholder 8"/>
+          <p:cNvPr id="9" name="Slide Number Placeholder 8">
+            <a:extLst>
+              <a:ext uri="{FF2B5EF4-FFF2-40B4-BE49-F238E27FC236}">
+                <a16:creationId xmlns:a16="http://schemas.microsoft.com/office/drawing/2014/main" xmlns="" id="{10C8B11F-5860-03B4-E71F-3467444F9A21}"/>
+              </a:ext>
+            </a:extLst>
+          </p:cNvPr>
           <p:cNvSpPr>
             <a:spLocks noGrp="1"/>
           </p:cNvSpPr>
@@ -3806,12 +4231,19 @@
           <a:p>
             <a:fld id="{B961B71F-4B40-8942-BB88-E0F5C0B46E10}" type="slidenum">
               <a:rPr lang="en-US" smtClean="0"/>
+              <a:pPr/>
+              <a:t>‹#›</a:t>
             </a:fld>
             <a:endParaRPr lang="en-US"/>
           </a:p>
         </p:txBody>
       </p:sp>
     </p:spTree>
+    <p:extLst>
+      <p:ext uri="{BB962C8B-B14F-4D97-AF65-F5344CB8AC3E}">
+        <p14:creationId xmlns:p14="http://schemas.microsoft.com/office/powerpoint/2010/main" xmlns="" val="2828005524"/>
+      </p:ext>
+    </p:extLst>
   </p:cSld>
   <p:clrMapOvr>
     <a:masterClrMapping/>
@@ -3838,7 +4270,13 @@
       </p:grpSpPr>
       <p:sp>
         <p:nvSpPr>
-          <p:cNvPr id="2" name="Title 1"/>
+          <p:cNvPr id="2" name="Title 1">
+            <a:extLst>
+              <a:ext uri="{FF2B5EF4-FFF2-40B4-BE49-F238E27FC236}">
+                <a16:creationId xmlns:a16="http://schemas.microsoft.com/office/drawing/2014/main" xmlns="" id="{C4D7A6C5-1A49-C01E-B839-45967150D976}"/>
+              </a:ext>
+            </a:extLst>
+          </p:cNvPr>
           <p:cNvSpPr>
             <a:spLocks noGrp="1"/>
           </p:cNvSpPr>
@@ -3861,7 +4299,13 @@
       </p:sp>
       <p:sp>
         <p:nvSpPr>
-          <p:cNvPr id="3" name="Date Placeholder 2"/>
+          <p:cNvPr id="3" name="Date Placeholder 2">
+            <a:extLst>
+              <a:ext uri="{FF2B5EF4-FFF2-40B4-BE49-F238E27FC236}">
+                <a16:creationId xmlns:a16="http://schemas.microsoft.com/office/drawing/2014/main" xmlns="" id="{06C47471-9D6F-27AE-9B05-71D6BF96E327}"/>
+              </a:ext>
+            </a:extLst>
+          </p:cNvPr>
           <p:cNvSpPr>
             <a:spLocks noGrp="1"/>
           </p:cNvSpPr>
@@ -3884,7 +4328,13 @@
       </p:sp>
       <p:sp>
         <p:nvSpPr>
-          <p:cNvPr id="4" name="Footer Placeholder 3"/>
+          <p:cNvPr id="4" name="Footer Placeholder 3">
+            <a:extLst>
+              <a:ext uri="{FF2B5EF4-FFF2-40B4-BE49-F238E27FC236}">
+                <a16:creationId xmlns:a16="http://schemas.microsoft.com/office/drawing/2014/main" xmlns="" id="{775AFD67-19CE-C1CD-207C-EF612C5A6F54}"/>
+              </a:ext>
+            </a:extLst>
+          </p:cNvPr>
           <p:cNvSpPr>
             <a:spLocks noGrp="1"/>
           </p:cNvSpPr>
@@ -3907,7 +4357,13 @@
       </p:sp>
       <p:sp>
         <p:nvSpPr>
-          <p:cNvPr id="5" name="Slide Number Placeholder 4"/>
+          <p:cNvPr id="5" name="Slide Number Placeholder 4">
+            <a:extLst>
+              <a:ext uri="{FF2B5EF4-FFF2-40B4-BE49-F238E27FC236}">
+                <a16:creationId xmlns:a16="http://schemas.microsoft.com/office/drawing/2014/main" xmlns="" id="{C80D7506-CEE9-31E5-7D10-A0BD1B2B03AF}"/>
+              </a:ext>
+            </a:extLst>
+          </p:cNvPr>
           <p:cNvSpPr>
             <a:spLocks noGrp="1"/>
           </p:cNvSpPr>
@@ -3922,12 +4378,19 @@
           <a:p>
             <a:fld id="{B961B71F-4B40-8942-BB88-E0F5C0B46E10}" type="slidenum">
               <a:rPr lang="en-US" smtClean="0"/>
+              <a:pPr/>
+              <a:t>‹#›</a:t>
             </a:fld>
             <a:endParaRPr lang="en-US"/>
           </a:p>
         </p:txBody>
       </p:sp>
     </p:spTree>
+    <p:extLst>
+      <p:ext uri="{BB962C8B-B14F-4D97-AF65-F5344CB8AC3E}">
+        <p14:creationId xmlns:p14="http://schemas.microsoft.com/office/powerpoint/2010/main" xmlns="" val="2235880525"/>
+      </p:ext>
+    </p:extLst>
   </p:cSld>
   <p:clrMapOvr>
     <a:masterClrMapping/>
@@ -3954,7 +4417,13 @@
       </p:grpSpPr>
       <p:sp>
         <p:nvSpPr>
-          <p:cNvPr id="2" name="Date Placeholder 1"/>
+          <p:cNvPr id="2" name="Date Placeholder 1">
+            <a:extLst>
+              <a:ext uri="{FF2B5EF4-FFF2-40B4-BE49-F238E27FC236}">
+                <a16:creationId xmlns:a16="http://schemas.microsoft.com/office/drawing/2014/main" xmlns="" id="{A12BBBBF-B095-FC7E-61BE-572DFB7B12F6}"/>
+              </a:ext>
+            </a:extLst>
+          </p:cNvPr>
           <p:cNvSpPr>
             <a:spLocks noGrp="1"/>
           </p:cNvSpPr>
@@ -3977,7 +4446,13 @@
       </p:sp>
       <p:sp>
         <p:nvSpPr>
-          <p:cNvPr id="3" name="Footer Placeholder 2"/>
+          <p:cNvPr id="3" name="Footer Placeholder 2">
+            <a:extLst>
+              <a:ext uri="{FF2B5EF4-FFF2-40B4-BE49-F238E27FC236}">
+                <a16:creationId xmlns:a16="http://schemas.microsoft.com/office/drawing/2014/main" xmlns="" id="{247555D4-8ECB-AFFE-0E72-A206E4098EE1}"/>
+              </a:ext>
+            </a:extLst>
+          </p:cNvPr>
           <p:cNvSpPr>
             <a:spLocks noGrp="1"/>
           </p:cNvSpPr>
@@ -4000,7 +4475,13 @@
       </p:sp>
       <p:sp>
         <p:nvSpPr>
-          <p:cNvPr id="4" name="Slide Number Placeholder 3"/>
+          <p:cNvPr id="4" name="Slide Number Placeholder 3">
+            <a:extLst>
+              <a:ext uri="{FF2B5EF4-FFF2-40B4-BE49-F238E27FC236}">
+                <a16:creationId xmlns:a16="http://schemas.microsoft.com/office/drawing/2014/main" xmlns="" id="{B2E9EB7F-0F36-6AF2-5A6E-D350360EFF58}"/>
+              </a:ext>
+            </a:extLst>
+          </p:cNvPr>
           <p:cNvSpPr>
             <a:spLocks noGrp="1"/>
           </p:cNvSpPr>
@@ -4015,12 +4496,19 @@
           <a:p>
             <a:fld id="{B961B71F-4B40-8942-BB88-E0F5C0B46E10}" type="slidenum">
               <a:rPr lang="en-US" smtClean="0"/>
+              <a:pPr/>
+              <a:t>‹#›</a:t>
             </a:fld>
             <a:endParaRPr lang="en-US"/>
           </a:p>
         </p:txBody>
       </p:sp>
     </p:spTree>
+    <p:extLst>
+      <p:ext uri="{BB962C8B-B14F-4D97-AF65-F5344CB8AC3E}">
+        <p14:creationId xmlns:p14="http://schemas.microsoft.com/office/powerpoint/2010/main" xmlns="" val="1543975459"/>
+      </p:ext>
+    </p:extLst>
   </p:cSld>
   <p:clrMapOvr>
     <a:masterClrMapping/>
@@ -4047,7 +4535,13 @@
       </p:grpSpPr>
       <p:sp>
         <p:nvSpPr>
-          <p:cNvPr id="2" name="Title 1"/>
+          <p:cNvPr id="2" name="Title 1">
+            <a:extLst>
+              <a:ext uri="{FF2B5EF4-FFF2-40B4-BE49-F238E27FC236}">
+                <a16:creationId xmlns:a16="http://schemas.microsoft.com/office/drawing/2014/main" xmlns="" id="{2CAF3453-54A8-457E-0F66-9BE958D9157D}"/>
+              </a:ext>
+            </a:extLst>
+          </p:cNvPr>
           <p:cNvSpPr>
             <a:spLocks noGrp="1"/>
           </p:cNvSpPr>
@@ -4079,7 +4573,13 @@
       </p:sp>
       <p:sp>
         <p:nvSpPr>
-          <p:cNvPr id="3" name="Content Placeholder 2"/>
+          <p:cNvPr id="3" name="Content Placeholder 2">
+            <a:extLst>
+              <a:ext uri="{FF2B5EF4-FFF2-40B4-BE49-F238E27FC236}">
+                <a16:creationId xmlns:a16="http://schemas.microsoft.com/office/drawing/2014/main" xmlns="" id="{80CE50AE-B8BE-E1FF-F3BA-8093082215DA}"/>
+              </a:ext>
+            </a:extLst>
+          </p:cNvPr>
           <p:cNvSpPr>
             <a:spLocks noGrp="1"/>
           </p:cNvSpPr>
@@ -4130,7 +4630,6 @@
               <a:rPr lang="en-GB"/>
               <a:t>Click to edit Master text styles</a:t>
             </a:r>
-            <a:endParaRPr lang="en-GB"/>
           </a:p>
           <a:p>
             <a:pPr lvl="1"/>
@@ -4138,7 +4637,6 @@
               <a:rPr lang="en-GB"/>
               <a:t>Second level</a:t>
             </a:r>
-            <a:endParaRPr lang="en-GB"/>
           </a:p>
           <a:p>
             <a:pPr lvl="2"/>
@@ -4146,7 +4644,6 @@
               <a:rPr lang="en-GB"/>
               <a:t>Third level</a:t>
             </a:r>
-            <a:endParaRPr lang="en-GB"/>
           </a:p>
           <a:p>
             <a:pPr lvl="3"/>
@@ -4154,7 +4651,6 @@
               <a:rPr lang="en-GB"/>
               <a:t>Fourth level</a:t>
             </a:r>
-            <a:endParaRPr lang="en-GB"/>
           </a:p>
           <a:p>
             <a:pPr lvl="4"/>
@@ -4168,7 +4664,13 @@
       </p:sp>
       <p:sp>
         <p:nvSpPr>
-          <p:cNvPr id="4" name="Text Placeholder 3"/>
+          <p:cNvPr id="4" name="Text Placeholder 3">
+            <a:extLst>
+              <a:ext uri="{FF2B5EF4-FFF2-40B4-BE49-F238E27FC236}">
+                <a16:creationId xmlns:a16="http://schemas.microsoft.com/office/drawing/2014/main" xmlns="" id="{D1DA6038-C8B1-F7F2-5CA8-15CFE38CBD30}"/>
+              </a:ext>
+            </a:extLst>
+          </p:cNvPr>
           <p:cNvSpPr>
             <a:spLocks noGrp="1"/>
           </p:cNvSpPr>
@@ -4228,13 +4730,18 @@
               <a:rPr lang="en-GB"/>
               <a:t>Click to edit Master text styles</a:t>
             </a:r>
-            <a:endParaRPr lang="en-GB"/>
-          </a:p>
-        </p:txBody>
-      </p:sp>
-      <p:sp>
-        <p:nvSpPr>
-          <p:cNvPr id="5" name="Date Placeholder 4"/>
+          </a:p>
+        </p:txBody>
+      </p:sp>
+      <p:sp>
+        <p:nvSpPr>
+          <p:cNvPr id="5" name="Date Placeholder 4">
+            <a:extLst>
+              <a:ext uri="{FF2B5EF4-FFF2-40B4-BE49-F238E27FC236}">
+                <a16:creationId xmlns:a16="http://schemas.microsoft.com/office/drawing/2014/main" xmlns="" id="{85097CAE-AF61-8AFD-5350-97D8044E1275}"/>
+              </a:ext>
+            </a:extLst>
+          </p:cNvPr>
           <p:cNvSpPr>
             <a:spLocks noGrp="1"/>
           </p:cNvSpPr>
@@ -4257,7 +4764,13 @@
       </p:sp>
       <p:sp>
         <p:nvSpPr>
-          <p:cNvPr id="6" name="Footer Placeholder 5"/>
+          <p:cNvPr id="6" name="Footer Placeholder 5">
+            <a:extLst>
+              <a:ext uri="{FF2B5EF4-FFF2-40B4-BE49-F238E27FC236}">
+                <a16:creationId xmlns:a16="http://schemas.microsoft.com/office/drawing/2014/main" xmlns="" id="{9A9E989E-AF43-DFDB-D9DD-E85DED3C09B0}"/>
+              </a:ext>
+            </a:extLst>
+          </p:cNvPr>
           <p:cNvSpPr>
             <a:spLocks noGrp="1"/>
           </p:cNvSpPr>
@@ -4280,7 +4793,13 @@
       </p:sp>
       <p:sp>
         <p:nvSpPr>
-          <p:cNvPr id="7" name="Slide Number Placeholder 6"/>
+          <p:cNvPr id="7" name="Slide Number Placeholder 6">
+            <a:extLst>
+              <a:ext uri="{FF2B5EF4-FFF2-40B4-BE49-F238E27FC236}">
+                <a16:creationId xmlns:a16="http://schemas.microsoft.com/office/drawing/2014/main" xmlns="" id="{60FBCAA9-93EB-8A4D-BB9C-2479D593509A}"/>
+              </a:ext>
+            </a:extLst>
+          </p:cNvPr>
           <p:cNvSpPr>
             <a:spLocks noGrp="1"/>
           </p:cNvSpPr>
@@ -4295,12 +4814,19 @@
           <a:p>
             <a:fld id="{B961B71F-4B40-8942-BB88-E0F5C0B46E10}" type="slidenum">
               <a:rPr lang="en-US" smtClean="0"/>
+              <a:pPr/>
+              <a:t>‹#›</a:t>
             </a:fld>
             <a:endParaRPr lang="en-US"/>
           </a:p>
         </p:txBody>
       </p:sp>
     </p:spTree>
+    <p:extLst>
+      <p:ext uri="{BB962C8B-B14F-4D97-AF65-F5344CB8AC3E}">
+        <p14:creationId xmlns:p14="http://schemas.microsoft.com/office/powerpoint/2010/main" xmlns="" val="1690423406"/>
+      </p:ext>
+    </p:extLst>
   </p:cSld>
   <p:clrMapOvr>
     <a:masterClrMapping/>
@@ -4327,7 +4853,13 @@
       </p:grpSpPr>
       <p:sp>
         <p:nvSpPr>
-          <p:cNvPr id="2" name="Title 1"/>
+          <p:cNvPr id="2" name="Title 1">
+            <a:extLst>
+              <a:ext uri="{FF2B5EF4-FFF2-40B4-BE49-F238E27FC236}">
+                <a16:creationId xmlns:a16="http://schemas.microsoft.com/office/drawing/2014/main" xmlns="" id="{23BCE57A-1FB8-E230-296B-702500A0D499}"/>
+              </a:ext>
+            </a:extLst>
+          </p:cNvPr>
           <p:cNvSpPr>
             <a:spLocks noGrp="1"/>
           </p:cNvSpPr>
@@ -4359,7 +4891,13 @@
       </p:sp>
       <p:sp>
         <p:nvSpPr>
-          <p:cNvPr id="3" name="Picture Placeholder 2"/>
+          <p:cNvPr id="3" name="Picture Placeholder 2">
+            <a:extLst>
+              <a:ext uri="{FF2B5EF4-FFF2-40B4-BE49-F238E27FC236}">
+                <a16:creationId xmlns:a16="http://schemas.microsoft.com/office/drawing/2014/main" xmlns="" id="{3C470CF4-1245-8E91-196B-2297C07C97E4}"/>
+              </a:ext>
+            </a:extLst>
+          </p:cNvPr>
           <p:cNvSpPr>
             <a:spLocks noGrp="1"/>
           </p:cNvSpPr>
@@ -4420,7 +4958,13 @@
       </p:sp>
       <p:sp>
         <p:nvSpPr>
-          <p:cNvPr id="4" name="Text Placeholder 3"/>
+          <p:cNvPr id="4" name="Text Placeholder 3">
+            <a:extLst>
+              <a:ext uri="{FF2B5EF4-FFF2-40B4-BE49-F238E27FC236}">
+                <a16:creationId xmlns:a16="http://schemas.microsoft.com/office/drawing/2014/main" xmlns="" id="{FFC54EA7-CAD7-C04A-6487-F7D1660330A8}"/>
+              </a:ext>
+            </a:extLst>
+          </p:cNvPr>
           <p:cNvSpPr>
             <a:spLocks noGrp="1"/>
           </p:cNvSpPr>
@@ -4480,13 +5024,18 @@
               <a:rPr lang="en-GB"/>
               <a:t>Click to edit Master text styles</a:t>
             </a:r>
-            <a:endParaRPr lang="en-GB"/>
-          </a:p>
-        </p:txBody>
-      </p:sp>
-      <p:sp>
-        <p:nvSpPr>
-          <p:cNvPr id="5" name="Date Placeholder 4"/>
+          </a:p>
+        </p:txBody>
+      </p:sp>
+      <p:sp>
+        <p:nvSpPr>
+          <p:cNvPr id="5" name="Date Placeholder 4">
+            <a:extLst>
+              <a:ext uri="{FF2B5EF4-FFF2-40B4-BE49-F238E27FC236}">
+                <a16:creationId xmlns:a16="http://schemas.microsoft.com/office/drawing/2014/main" xmlns="" id="{F3F31731-B315-1CCB-7EEF-B7C7EC9254AA}"/>
+              </a:ext>
+            </a:extLst>
+          </p:cNvPr>
           <p:cNvSpPr>
             <a:spLocks noGrp="1"/>
           </p:cNvSpPr>
@@ -4509,7 +5058,13 @@
       </p:sp>
       <p:sp>
         <p:nvSpPr>
-          <p:cNvPr id="6" name="Footer Placeholder 5"/>
+          <p:cNvPr id="6" name="Footer Placeholder 5">
+            <a:extLst>
+              <a:ext uri="{FF2B5EF4-FFF2-40B4-BE49-F238E27FC236}">
+                <a16:creationId xmlns:a16="http://schemas.microsoft.com/office/drawing/2014/main" xmlns="" id="{C34DE31E-F8C7-4C00-C40D-FE2821B70626}"/>
+              </a:ext>
+            </a:extLst>
+          </p:cNvPr>
           <p:cNvSpPr>
             <a:spLocks noGrp="1"/>
           </p:cNvSpPr>
@@ -4532,7 +5087,13 @@
       </p:sp>
       <p:sp>
         <p:nvSpPr>
-          <p:cNvPr id="7" name="Slide Number Placeholder 6"/>
+          <p:cNvPr id="7" name="Slide Number Placeholder 6">
+            <a:extLst>
+              <a:ext uri="{FF2B5EF4-FFF2-40B4-BE49-F238E27FC236}">
+                <a16:creationId xmlns:a16="http://schemas.microsoft.com/office/drawing/2014/main" xmlns="" id="{3D7C9369-3918-E39E-9B60-A57179D0499E}"/>
+              </a:ext>
+            </a:extLst>
+          </p:cNvPr>
           <p:cNvSpPr>
             <a:spLocks noGrp="1"/>
           </p:cNvSpPr>
@@ -4547,12 +5108,19 @@
           <a:p>
             <a:fld id="{B961B71F-4B40-8942-BB88-E0F5C0B46E10}" type="slidenum">
               <a:rPr lang="en-US" smtClean="0"/>
+              <a:pPr/>
+              <a:t>‹#›</a:t>
             </a:fld>
             <a:endParaRPr lang="en-US"/>
           </a:p>
         </p:txBody>
       </p:sp>
     </p:spTree>
+    <p:extLst>
+      <p:ext uri="{BB962C8B-B14F-4D97-AF65-F5344CB8AC3E}">
+        <p14:creationId xmlns:p14="http://schemas.microsoft.com/office/powerpoint/2010/main" xmlns="" val="3300463203"/>
+      </p:ext>
+    </p:extLst>
   </p:cSld>
   <p:clrMapOvr>
     <a:masterClrMapping/>
@@ -4584,7 +5152,13 @@
       </p:grpSpPr>
       <p:sp>
         <p:nvSpPr>
-          <p:cNvPr id="2" name="Title Placeholder 1"/>
+          <p:cNvPr id="2" name="Title Placeholder 1">
+            <a:extLst>
+              <a:ext uri="{FF2B5EF4-FFF2-40B4-BE49-F238E27FC236}">
+                <a16:creationId xmlns:a16="http://schemas.microsoft.com/office/drawing/2014/main" xmlns="" id="{1C5EEF4A-08C3-1725-4505-63B90332E45E}"/>
+              </a:ext>
+            </a:extLst>
+          </p:cNvPr>
           <p:cNvSpPr>
             <a:spLocks noGrp="1"/>
           </p:cNvSpPr>
@@ -4617,7 +5191,13 @@
       </p:sp>
       <p:sp>
         <p:nvSpPr>
-          <p:cNvPr id="3" name="Text Placeholder 2"/>
+          <p:cNvPr id="3" name="Text Placeholder 2">
+            <a:extLst>
+              <a:ext uri="{FF2B5EF4-FFF2-40B4-BE49-F238E27FC236}">
+                <a16:creationId xmlns:a16="http://schemas.microsoft.com/office/drawing/2014/main" xmlns="" id="{590D38A5-B84E-8DCB-3CEA-900D45C8584A}"/>
+              </a:ext>
+            </a:extLst>
+          </p:cNvPr>
           <p:cNvSpPr>
             <a:spLocks noGrp="1"/>
           </p:cNvSpPr>
@@ -4645,7 +5225,6 @@
               <a:rPr lang="en-GB"/>
               <a:t>Click to edit Master text styles</a:t>
             </a:r>
-            <a:endParaRPr lang="en-GB"/>
           </a:p>
           <a:p>
             <a:pPr lvl="1"/>
@@ -4653,7 +5232,6 @@
               <a:rPr lang="en-GB"/>
               <a:t>Second level</a:t>
             </a:r>
-            <a:endParaRPr lang="en-GB"/>
           </a:p>
           <a:p>
             <a:pPr lvl="2"/>
@@ -4661,7 +5239,6 @@
               <a:rPr lang="en-GB"/>
               <a:t>Third level</a:t>
             </a:r>
-            <a:endParaRPr lang="en-GB"/>
           </a:p>
           <a:p>
             <a:pPr lvl="3"/>
@@ -4669,7 +5246,6 @@
               <a:rPr lang="en-GB"/>
               <a:t>Fourth level</a:t>
             </a:r>
-            <a:endParaRPr lang="en-GB"/>
           </a:p>
           <a:p>
             <a:pPr lvl="4"/>
@@ -4683,7 +5259,13 @@
       </p:sp>
       <p:sp>
         <p:nvSpPr>
-          <p:cNvPr id="4" name="Date Placeholder 3"/>
+          <p:cNvPr id="4" name="Date Placeholder 3">
+            <a:extLst>
+              <a:ext uri="{FF2B5EF4-FFF2-40B4-BE49-F238E27FC236}">
+                <a16:creationId xmlns:a16="http://schemas.microsoft.com/office/drawing/2014/main" xmlns="" id="{A16F078D-01B0-9071-5546-6BFF4A071C68}"/>
+              </a:ext>
+            </a:extLst>
+          </p:cNvPr>
           <p:cNvSpPr>
             <a:spLocks noGrp="1"/>
           </p:cNvSpPr>
@@ -4724,7 +5306,13 @@
       </p:sp>
       <p:sp>
         <p:nvSpPr>
-          <p:cNvPr id="5" name="Footer Placeholder 4"/>
+          <p:cNvPr id="5" name="Footer Placeholder 4">
+            <a:extLst>
+              <a:ext uri="{FF2B5EF4-FFF2-40B4-BE49-F238E27FC236}">
+                <a16:creationId xmlns:a16="http://schemas.microsoft.com/office/drawing/2014/main" xmlns="" id="{3E063510-A0D8-83AF-2345-E0A8B79D5D6F}"/>
+              </a:ext>
+            </a:extLst>
+          </p:cNvPr>
           <p:cNvSpPr>
             <a:spLocks noGrp="1"/>
           </p:cNvSpPr>
@@ -4765,7 +5353,13 @@
       </p:sp>
       <p:sp>
         <p:nvSpPr>
-          <p:cNvPr id="6" name="Slide Number Placeholder 5"/>
+          <p:cNvPr id="6" name="Slide Number Placeholder 5">
+            <a:extLst>
+              <a:ext uri="{FF2B5EF4-FFF2-40B4-BE49-F238E27FC236}">
+                <a16:creationId xmlns:a16="http://schemas.microsoft.com/office/drawing/2014/main" xmlns="" id="{73B51A12-6174-66E3-0415-DA607E50CD49}"/>
+              </a:ext>
+            </a:extLst>
+          </p:cNvPr>
           <p:cNvSpPr>
             <a:spLocks noGrp="1"/>
           </p:cNvSpPr>
@@ -4798,12 +5392,19 @@
           <a:p>
             <a:fld id="{B961B71F-4B40-8942-BB88-E0F5C0B46E10}" type="slidenum">
               <a:rPr lang="en-US" smtClean="0"/>
+              <a:pPr/>
+              <a:t>‹#›</a:t>
             </a:fld>
             <a:endParaRPr lang="en-US"/>
           </a:p>
         </p:txBody>
       </p:sp>
     </p:spTree>
+    <p:extLst>
+      <p:ext uri="{BB962C8B-B14F-4D97-AF65-F5344CB8AC3E}">
+        <p14:creationId xmlns:p14="http://schemas.microsoft.com/office/powerpoint/2010/main" xmlns="" val="2480827829"/>
+      </p:ext>
+    </p:extLst>
   </p:cSld>
   <p:clrMap bg1="lt1" tx1="dk1" bg2="lt2" tx2="dk2" accent1="accent1" accent2="accent2" accent3="accent3" accent4="accent4" accent5="accent5" accent6="accent6" hlink="hlink" folHlink="folHlink"/>
   <p:sldLayoutIdLst>
@@ -5127,7 +5728,13 @@
       </p:grpSpPr>
       <p:sp>
         <p:nvSpPr>
-          <p:cNvPr id="2" name="Title Placeholder 1"/>
+          <p:cNvPr id="2" name="Title Placeholder 1">
+            <a:extLst>
+              <a:ext uri="{FF2B5EF4-FFF2-40B4-BE49-F238E27FC236}">
+                <a16:creationId xmlns:a16="http://schemas.microsoft.com/office/drawing/2014/main" xmlns="" id="{F8B26EC2-0EF8-2F89-DF64-2685FD6393C1}"/>
+              </a:ext>
+            </a:extLst>
+          </p:cNvPr>
           <p:cNvSpPr>
             <a:spLocks noGrp="1"/>
           </p:cNvSpPr>
@@ -5160,7 +5767,13 @@
       </p:sp>
       <p:sp>
         <p:nvSpPr>
-          <p:cNvPr id="3" name="Text Placeholder 2"/>
+          <p:cNvPr id="3" name="Text Placeholder 2">
+            <a:extLst>
+              <a:ext uri="{FF2B5EF4-FFF2-40B4-BE49-F238E27FC236}">
+                <a16:creationId xmlns:a16="http://schemas.microsoft.com/office/drawing/2014/main" xmlns="" id="{B1E29FC3-B99D-0056-3798-159705D11348}"/>
+              </a:ext>
+            </a:extLst>
+          </p:cNvPr>
           <p:cNvSpPr>
             <a:spLocks noGrp="1"/>
           </p:cNvSpPr>
@@ -5188,7 +5801,6 @@
               <a:rPr lang="en-GB"/>
               <a:t>Click to edit Master text styles</a:t>
             </a:r>
-            <a:endParaRPr lang="en-GB"/>
           </a:p>
           <a:p>
             <a:pPr lvl="1"/>
@@ -5196,7 +5808,6 @@
               <a:rPr lang="en-GB"/>
               <a:t>Second level</a:t>
             </a:r>
-            <a:endParaRPr lang="en-GB"/>
           </a:p>
           <a:p>
             <a:pPr lvl="2"/>
@@ -5204,7 +5815,6 @@
               <a:rPr lang="en-GB"/>
               <a:t>Third level</a:t>
             </a:r>
-            <a:endParaRPr lang="en-GB"/>
           </a:p>
           <a:p>
             <a:pPr lvl="3"/>
@@ -5212,7 +5822,6 @@
               <a:rPr lang="en-GB"/>
               <a:t>Fourth level</a:t>
             </a:r>
-            <a:endParaRPr lang="en-GB"/>
           </a:p>
           <a:p>
             <a:pPr lvl="4"/>
@@ -5226,7 +5835,13 @@
       </p:sp>
       <p:sp>
         <p:nvSpPr>
-          <p:cNvPr id="4" name="Date Placeholder 3"/>
+          <p:cNvPr id="4" name="Date Placeholder 3">
+            <a:extLst>
+              <a:ext uri="{FF2B5EF4-FFF2-40B4-BE49-F238E27FC236}">
+                <a16:creationId xmlns:a16="http://schemas.microsoft.com/office/drawing/2014/main" xmlns="" id="{5A79F1E1-99D3-E959-A91B-BD6DF2599B4F}"/>
+              </a:ext>
+            </a:extLst>
+          </p:cNvPr>
           <p:cNvSpPr>
             <a:spLocks noGrp="1"/>
           </p:cNvSpPr>
@@ -5267,7 +5882,13 @@
       </p:sp>
       <p:sp>
         <p:nvSpPr>
-          <p:cNvPr id="5" name="Footer Placeholder 4"/>
+          <p:cNvPr id="5" name="Footer Placeholder 4">
+            <a:extLst>
+              <a:ext uri="{FF2B5EF4-FFF2-40B4-BE49-F238E27FC236}">
+                <a16:creationId xmlns:a16="http://schemas.microsoft.com/office/drawing/2014/main" xmlns="" id="{44EC7260-A9B7-9847-6D81-8C797C4D5AA0}"/>
+              </a:ext>
+            </a:extLst>
+          </p:cNvPr>
           <p:cNvSpPr>
             <a:spLocks noGrp="1"/>
           </p:cNvSpPr>
@@ -5308,7 +5929,13 @@
       </p:sp>
       <p:sp>
         <p:nvSpPr>
-          <p:cNvPr id="6" name="Slide Number Placeholder 5"/>
+          <p:cNvPr id="6" name="Slide Number Placeholder 5">
+            <a:extLst>
+              <a:ext uri="{FF2B5EF4-FFF2-40B4-BE49-F238E27FC236}">
+                <a16:creationId xmlns:a16="http://schemas.microsoft.com/office/drawing/2014/main" xmlns="" id="{AD527894-99B0-6303-77B2-C1C210EE22F1}"/>
+              </a:ext>
+            </a:extLst>
+          </p:cNvPr>
           <p:cNvSpPr>
             <a:spLocks noGrp="1"/>
           </p:cNvSpPr>
@@ -5341,12 +5968,19 @@
           <a:p>
             <a:fld id="{D6396F81-1074-6B40-A92F-A06CCD3B4178}" type="slidenum">
               <a:rPr lang="en-US" smtClean="0"/>
+              <a:pPr/>
+              <a:t>‹#›</a:t>
             </a:fld>
             <a:endParaRPr lang="en-US"/>
           </a:p>
         </p:txBody>
       </p:sp>
     </p:spTree>
+    <p:extLst>
+      <p:ext uri="{BB962C8B-B14F-4D97-AF65-F5344CB8AC3E}">
+        <p14:creationId xmlns:p14="http://schemas.microsoft.com/office/powerpoint/2010/main" xmlns="" val="2218484365"/>
+      </p:ext>
+    </p:extLst>
   </p:cSld>
   <p:clrMap bg1="lt1" tx1="dk1" bg2="lt2" tx2="dk2" accent1="accent1" accent2="accent2" accent3="accent3" accent4="accent4" accent5="accent5" accent6="accent6" hlink="hlink" folHlink="folHlink"/>
   <p:sldLayoutIdLst>
@@ -5659,7 +6293,13 @@
       </p:grpSpPr>
       <p:sp>
         <p:nvSpPr>
-          <p:cNvPr id="6" name="Date Placeholder 5"/>
+          <p:cNvPr id="6" name="Date Placeholder 5">
+            <a:extLst>
+              <a:ext uri="{FF2B5EF4-FFF2-40B4-BE49-F238E27FC236}">
+                <a16:creationId xmlns:a16="http://schemas.microsoft.com/office/drawing/2014/main" xmlns="" id="{024CF11E-4EBB-004C-8FD7-152B8D16D8B6}"/>
+              </a:ext>
+            </a:extLst>
+          </p:cNvPr>
           <p:cNvSpPr>
             <a:spLocks noGrp="1"/>
           </p:cNvSpPr>
@@ -5677,7 +6317,7 @@
                 <a:solidFill>
                   <a:srgbClr val="808080"/>
                 </a:solidFill>
-                <a:latin typeface="Calibri" panose="020F0502020204030204"/>
+                <a:latin typeface="Calibri"/>
               </a:rPr>
               <a:t>23-09-2026</a:t>
             </a:r>
@@ -5687,7 +6327,13 @@
       </p:sp>
       <p:sp>
         <p:nvSpPr>
-          <p:cNvPr id="4" name="Footer Placeholder 3"/>
+          <p:cNvPr id="4" name="Footer Placeholder 3">
+            <a:extLst>
+              <a:ext uri="{FF2B5EF4-FFF2-40B4-BE49-F238E27FC236}">
+                <a16:creationId xmlns:a16="http://schemas.microsoft.com/office/drawing/2014/main" xmlns="" id="{CD9864F2-F4A5-DC53-C4B3-F9C0A49E4A32}"/>
+              </a:ext>
+            </a:extLst>
+          </p:cNvPr>
           <p:cNvSpPr>
             <a:spLocks noGrp="1"/>
           </p:cNvSpPr>
@@ -5705,7 +6351,7 @@
                 <a:solidFill>
                   <a:srgbClr val="808080"/>
                 </a:solidFill>
-                <a:latin typeface="Calibri" panose="020F0502020204030204"/>
+                <a:latin typeface="Calibri"/>
               </a:rPr>
               <a:t>Review-II                                                        Department of CSE-2</a:t>
             </a:r>
@@ -5719,7 +6365,13 @@
       </p:sp>
       <p:sp>
         <p:nvSpPr>
-          <p:cNvPr id="5" name="Slide Number Placeholder 4"/>
+          <p:cNvPr id="5" name="Slide Number Placeholder 4">
+            <a:extLst>
+              <a:ext uri="{FF2B5EF4-FFF2-40B4-BE49-F238E27FC236}">
+                <a16:creationId xmlns:a16="http://schemas.microsoft.com/office/drawing/2014/main" xmlns="" id="{913C41FE-7D1F-E7DF-F0EB-DE18D39555E3}"/>
+              </a:ext>
+            </a:extLst>
+          </p:cNvPr>
           <p:cNvSpPr>
             <a:spLocks noGrp="1"/>
           </p:cNvSpPr>
@@ -5737,7 +6389,7 @@
                 <a:solidFill>
                   <a:srgbClr val="808080"/>
                 </a:solidFill>
-                <a:latin typeface="Calibri" panose="020F0502020204030204"/>
+                <a:latin typeface="Calibri"/>
               </a:rPr>
               <a:t>1</a:t>
             </a:r>
@@ -5777,16 +6429,10 @@
                 <a:solidFill>
                   <a:srgbClr val="000000"/>
                 </a:solidFill>
-                <a:latin typeface="Calibri" panose="020F0502020204030204"/>
+                <a:latin typeface="Calibri"/>
               </a:rPr>
               <a:t>REVIEW-II</a:t>
             </a:r>
-            <a:endParaRPr sz="2600" b="1">
-              <a:solidFill>
-                <a:srgbClr val="000000"/>
-              </a:solidFill>
-              <a:latin typeface="Calibri" panose="020F0502020204030204"/>
-            </a:endParaRPr>
           </a:p>
         </p:txBody>
       </p:sp>
@@ -5822,16 +6468,10 @@
                 <a:solidFill>
                   <a:srgbClr val="0070C0"/>
                 </a:solidFill>
-                <a:latin typeface="Calibri" panose="020F0502020204030204"/>
+                <a:latin typeface="Calibri"/>
               </a:rPr>
               <a:t>NestedTune Guard: Deadlock-Aware Distributed Hyperparameter Tuning for Nested Trainers</a:t>
             </a:r>
-            <a:endParaRPr sz="2800" b="1">
-              <a:solidFill>
-                <a:srgbClr val="0070C0"/>
-              </a:solidFill>
-              <a:latin typeface="Calibri" panose="020F0502020204030204"/>
-            </a:endParaRPr>
           </a:p>
         </p:txBody>
       </p:sp>
@@ -5867,16 +6507,10 @@
                 <a:solidFill>
                   <a:srgbClr val="000000"/>
                 </a:solidFill>
-                <a:latin typeface="Calibri" panose="020F0502020204030204"/>
-              </a:rPr>
-              <a:t>Project ID: CINT-11  |  Batch: [Batch]</a:t>
-            </a:r>
-            <a:endParaRPr sz="2200" b="0">
-              <a:solidFill>
-                <a:srgbClr val="000000"/>
-              </a:solidFill>
-              <a:latin typeface="Calibri" panose="020F0502020204030204"/>
-            </a:endParaRPr>
+                <a:latin typeface="Calibri"/>
+              </a:rPr>
+              <a:t>Project ID: CINT-11  |  Batch: CSE-2</a:t>
+            </a:r>
           </a:p>
         </p:txBody>
       </p:sp>
@@ -5912,16 +6546,10 @@
                 <a:solidFill>
                   <a:srgbClr val="C00000"/>
                 </a:solidFill>
-                <a:latin typeface="Calibri" panose="020F0502020204030204"/>
+                <a:latin typeface="Calibri"/>
               </a:rPr>
               <a:t>KONERU LAKSHMAIAH EDUCATION FOUNDATION</a:t>
             </a:r>
-            <a:endParaRPr sz="2000" b="1">
-              <a:solidFill>
-                <a:srgbClr val="C00000"/>
-              </a:solidFill>
-              <a:latin typeface="Calibri" panose="020F0502020204030204"/>
-            </a:endParaRPr>
           </a:p>
         </p:txBody>
       </p:sp>
@@ -5933,7 +6561,7 @@
         </p:nvSpPr>
         <p:spPr>
           <a:xfrm>
-            <a:off x="765175" y="3090672"/>
+            <a:off x="868680" y="2816352"/>
             <a:ext cx="6537960" cy="1938528"/>
           </a:xfrm>
           <a:prstGeom prst="roundRect">
@@ -5978,7 +6606,7 @@
         </p:nvSpPr>
         <p:spPr>
           <a:xfrm>
-            <a:off x="941705" y="3090672"/>
+            <a:off x="868680" y="2816352"/>
             <a:ext cx="64008" cy="1938528"/>
           </a:xfrm>
           <a:prstGeom prst="rect">
@@ -6021,7 +6649,7 @@
         </p:nvSpPr>
         <p:spPr>
           <a:xfrm>
-            <a:off x="1005713" y="2751963"/>
+            <a:off x="1069848" y="2944368"/>
             <a:ext cx="6172200" cy="320040"/>
           </a:xfrm>
           <a:prstGeom prst="rect">
@@ -6030,7 +6658,7 @@
           <a:noFill/>
         </p:spPr>
         <p:txBody>
-          <a:bodyPr wrap="square" lIns="73152" tIns="27432" rIns="73152" bIns="27432">
+          <a:bodyPr wrap="square" lIns="73152" rIns="73152" tIns="27432" bIns="27432">
             <a:spAutoFit/>
           </a:bodyPr>
           <a:lstStyle/>
@@ -6041,16 +6669,10 @@
                 <a:solidFill>
                   <a:srgbClr val="0070C0"/>
                 </a:solidFill>
-                <a:latin typeface="Calibri" panose="020F0502020204030204"/>
+                <a:latin typeface="Calibri"/>
               </a:rPr>
               <a:t>TEAM MEMBERS</a:t>
             </a:r>
-            <a:endParaRPr sz="1900" b="1">
-              <a:solidFill>
-                <a:srgbClr val="0070C0"/>
-              </a:solidFill>
-              <a:latin typeface="Calibri" panose="020F0502020204030204"/>
-            </a:endParaRPr>
           </a:p>
         </p:txBody>
       </p:sp>
@@ -6062,7 +6684,7 @@
         </p:nvSpPr>
         <p:spPr>
           <a:xfrm>
-            <a:off x="1042797" y="3273552"/>
+            <a:off x="1078992" y="3273552"/>
             <a:ext cx="1389888" cy="274320"/>
           </a:xfrm>
           <a:prstGeom prst="rect">
@@ -6071,7 +6693,7 @@
           <a:noFill/>
         </p:spPr>
         <p:txBody>
-          <a:bodyPr wrap="square" lIns="73152" tIns="27432" rIns="73152" bIns="27432">
+          <a:bodyPr wrap="square" lIns="73152" rIns="73152" tIns="27432" bIns="27432">
             <a:spAutoFit/>
           </a:bodyPr>
           <a:lstStyle/>
@@ -6082,16 +6704,10 @@
                 <a:solidFill>
                   <a:srgbClr val="0070C0"/>
                 </a:solidFill>
-                <a:latin typeface="Calibri" panose="020F0502020204030204"/>
+                <a:latin typeface="Calibri"/>
               </a:rPr>
               <a:t>2300030455</a:t>
             </a:r>
-            <a:endParaRPr sz="1600" b="1">
-              <a:solidFill>
-                <a:srgbClr val="0070C0"/>
-              </a:solidFill>
-              <a:latin typeface="Calibri" panose="020F0502020204030204"/>
-            </a:endParaRPr>
           </a:p>
         </p:txBody>
       </p:sp>
@@ -6112,7 +6728,7 @@
           <a:noFill/>
         </p:spPr>
         <p:txBody>
-          <a:bodyPr wrap="square" lIns="73152" tIns="27432" rIns="73152" bIns="27432">
+          <a:bodyPr wrap="square" lIns="73152" rIns="73152" tIns="27432" bIns="27432">
             <a:spAutoFit/>
           </a:bodyPr>
           <a:lstStyle/>
@@ -6123,16 +6739,10 @@
                 <a:solidFill>
                   <a:srgbClr val="000000"/>
                 </a:solidFill>
-                <a:latin typeface="Calibri" panose="020F0502020204030204"/>
+                <a:latin typeface="Calibri"/>
               </a:rPr>
               <a:t>NEKKANTI SAI VIGHNESH</a:t>
             </a:r>
-            <a:endParaRPr sz="1700" b="1">
-              <a:solidFill>
-                <a:srgbClr val="000000"/>
-              </a:solidFill>
-              <a:latin typeface="Calibri" panose="020F0502020204030204"/>
-            </a:endParaRPr>
           </a:p>
         </p:txBody>
       </p:sp>
@@ -6153,7 +6763,7 @@
           <a:noFill/>
         </p:spPr>
         <p:txBody>
-          <a:bodyPr wrap="square" lIns="73152" tIns="27432" rIns="73152" bIns="27432">
+          <a:bodyPr wrap="square" lIns="73152" rIns="73152" tIns="27432" bIns="27432">
             <a:spAutoFit/>
           </a:bodyPr>
           <a:lstStyle/>
@@ -6164,16 +6774,10 @@
                 <a:solidFill>
                   <a:srgbClr val="00B050"/>
                 </a:solidFill>
-                <a:latin typeface="Calibri" panose="020F0502020204030204"/>
+                <a:latin typeface="Calibri"/>
               </a:rPr>
               <a:t>Member</a:t>
             </a:r>
-            <a:endParaRPr sz="1400" b="1">
-              <a:solidFill>
-                <a:srgbClr val="00B050"/>
-              </a:solidFill>
-              <a:latin typeface="Calibri" panose="020F0502020204030204"/>
-            </a:endParaRPr>
           </a:p>
         </p:txBody>
       </p:sp>
@@ -6194,7 +6798,7 @@
           <a:noFill/>
         </p:spPr>
         <p:txBody>
-          <a:bodyPr wrap="square" lIns="73152" tIns="27432" rIns="73152" bIns="27432">
+          <a:bodyPr wrap="square" lIns="73152" rIns="73152" tIns="27432" bIns="27432">
             <a:spAutoFit/>
           </a:bodyPr>
           <a:lstStyle/>
@@ -6205,16 +6809,10 @@
                 <a:solidFill>
                   <a:srgbClr val="0070C0"/>
                 </a:solidFill>
-                <a:latin typeface="Calibri" panose="020F0502020204030204"/>
+                <a:latin typeface="Calibri"/>
               </a:rPr>
               <a:t>2300030062</a:t>
             </a:r>
-            <a:endParaRPr sz="1600" b="1">
-              <a:solidFill>
-                <a:srgbClr val="0070C0"/>
-              </a:solidFill>
-              <a:latin typeface="Calibri" panose="020F0502020204030204"/>
-            </a:endParaRPr>
           </a:p>
         </p:txBody>
       </p:sp>
@@ -6235,7 +6833,7 @@
           <a:noFill/>
         </p:spPr>
         <p:txBody>
-          <a:bodyPr wrap="square" lIns="73152" tIns="27432" rIns="73152" bIns="27432">
+          <a:bodyPr wrap="square" lIns="73152" rIns="73152" tIns="27432" bIns="27432">
             <a:spAutoFit/>
           </a:bodyPr>
           <a:lstStyle/>
@@ -6246,16 +6844,10 @@
                 <a:solidFill>
                   <a:srgbClr val="000000"/>
                 </a:solidFill>
-                <a:latin typeface="Calibri" panose="020F0502020204030204"/>
+                <a:latin typeface="Calibri"/>
               </a:rPr>
               <a:t>BAGADI PAVAN KUMAR</a:t>
             </a:r>
-            <a:endParaRPr sz="1700" b="1">
-              <a:solidFill>
-                <a:srgbClr val="000000"/>
-              </a:solidFill>
-              <a:latin typeface="Calibri" panose="020F0502020204030204"/>
-            </a:endParaRPr>
           </a:p>
         </p:txBody>
       </p:sp>
@@ -6276,7 +6868,7 @@
           <a:noFill/>
         </p:spPr>
         <p:txBody>
-          <a:bodyPr wrap="square" lIns="73152" tIns="27432" rIns="73152" bIns="27432">
+          <a:bodyPr wrap="square" lIns="73152" rIns="73152" tIns="27432" bIns="27432">
             <a:spAutoFit/>
           </a:bodyPr>
           <a:lstStyle/>
@@ -6287,16 +6879,10 @@
                 <a:solidFill>
                   <a:srgbClr val="0070C0"/>
                 </a:solidFill>
-                <a:latin typeface="Calibri" panose="020F0502020204030204"/>
+                <a:latin typeface="Calibri"/>
               </a:rPr>
               <a:t>2300030983</a:t>
             </a:r>
-            <a:endParaRPr sz="1600" b="1">
-              <a:solidFill>
-                <a:srgbClr val="0070C0"/>
-              </a:solidFill>
-              <a:latin typeface="Calibri" panose="020F0502020204030204"/>
-            </a:endParaRPr>
           </a:p>
         </p:txBody>
       </p:sp>
@@ -6317,7 +6903,7 @@
           <a:noFill/>
         </p:spPr>
         <p:txBody>
-          <a:bodyPr wrap="square" lIns="73152" tIns="27432" rIns="73152" bIns="27432">
+          <a:bodyPr wrap="square" lIns="73152" rIns="73152" tIns="27432" bIns="27432">
             <a:spAutoFit/>
           </a:bodyPr>
           <a:lstStyle/>
@@ -6328,16 +6914,10 @@
                 <a:solidFill>
                   <a:srgbClr val="000000"/>
                 </a:solidFill>
-                <a:latin typeface="Calibri" panose="020F0502020204030204"/>
+                <a:latin typeface="Calibri"/>
               </a:rPr>
               <a:t>BHIMISETTY MAHESH ADITHYA</a:t>
             </a:r>
-            <a:endParaRPr sz="1700" b="1">
-              <a:solidFill>
-                <a:srgbClr val="000000"/>
-              </a:solidFill>
-              <a:latin typeface="Calibri" panose="020F0502020204030204"/>
-            </a:endParaRPr>
           </a:p>
         </p:txBody>
       </p:sp>
@@ -6394,7 +6974,7 @@
         </p:nvSpPr>
         <p:spPr>
           <a:xfrm>
-            <a:off x="7836662" y="2816352"/>
+            <a:off x="7662672" y="2816352"/>
             <a:ext cx="64008" cy="1938528"/>
           </a:xfrm>
           <a:prstGeom prst="rect">
@@ -6446,7 +7026,7 @@
           <a:noFill/>
         </p:spPr>
         <p:txBody>
-          <a:bodyPr wrap="square" lIns="73152" tIns="27432" rIns="73152" bIns="27432">
+          <a:bodyPr wrap="square" lIns="73152" rIns="73152" tIns="27432" bIns="27432">
             <a:spAutoFit/>
           </a:bodyPr>
           <a:lstStyle/>
@@ -6457,16 +7037,10 @@
                 <a:solidFill>
                   <a:srgbClr val="00B050"/>
                 </a:solidFill>
-                <a:latin typeface="Calibri" panose="020F0502020204030204"/>
+                <a:latin typeface="Calibri"/>
               </a:rPr>
               <a:t>PROJECT GUIDE</a:t>
             </a:r>
-            <a:endParaRPr sz="1900" b="1">
-              <a:solidFill>
-                <a:srgbClr val="00B050"/>
-              </a:solidFill>
-              <a:latin typeface="Calibri" panose="020F0502020204030204"/>
-            </a:endParaRPr>
           </a:p>
         </p:txBody>
       </p:sp>
@@ -6487,7 +7061,7 @@
           <a:noFill/>
         </p:spPr>
         <p:txBody>
-          <a:bodyPr wrap="square" lIns="73152" tIns="27432" rIns="73152" bIns="27432">
+          <a:bodyPr wrap="square" lIns="73152" rIns="73152" tIns="27432" bIns="27432">
             <a:spAutoFit/>
           </a:bodyPr>
           <a:lstStyle/>
@@ -6498,16 +7072,10 @@
                 <a:solidFill>
                   <a:srgbClr val="5F5F5F"/>
                 </a:solidFill>
-                <a:latin typeface="Calibri" panose="020F0502020204030204"/>
+                <a:latin typeface="Calibri"/>
               </a:rPr>
               <a:t>Guide ID</a:t>
             </a:r>
-            <a:endParaRPr sz="1500" b="1">
-              <a:solidFill>
-                <a:srgbClr val="5F5F5F"/>
-              </a:solidFill>
-              <a:latin typeface="Calibri" panose="020F0502020204030204"/>
-            </a:endParaRPr>
           </a:p>
         </p:txBody>
       </p:sp>
@@ -6520,7 +7088,7 @@
         <p:spPr>
           <a:xfrm>
             <a:off x="8842248" y="3346704"/>
-            <a:ext cx="1938528" cy="315595"/>
+            <a:ext cx="1938528" cy="274320"/>
           </a:xfrm>
           <a:prstGeom prst="rect">
             <a:avLst/>
@@ -6528,27 +7096,21 @@
           <a:noFill/>
         </p:spPr>
         <p:txBody>
-          <a:bodyPr wrap="square" lIns="73152" tIns="27432" rIns="73152" bIns="27432">
+          <a:bodyPr wrap="square" lIns="73152" rIns="73152" tIns="27432" bIns="27432">
             <a:spAutoFit/>
           </a:bodyPr>
           <a:lstStyle/>
           <a:p>
             <a:pPr algn="l"/>
             <a:r>
-              <a:rPr lang="en-IN" sz="1700" b="1">
+              <a:rPr sz="1700" b="1">
                 <a:solidFill>
                   <a:srgbClr val="000000"/>
                 </a:solidFill>
-                <a:latin typeface="Calibri" panose="020F0502020204030204"/>
+                <a:latin typeface="Calibri"/>
               </a:rPr>
               <a:t>8199</a:t>
             </a:r>
-            <a:endParaRPr lang="en-IN" sz="1700" b="1">
-              <a:solidFill>
-                <a:srgbClr val="000000"/>
-              </a:solidFill>
-              <a:latin typeface="Calibri" panose="020F0502020204030204"/>
-            </a:endParaRPr>
           </a:p>
         </p:txBody>
       </p:sp>
@@ -6569,7 +7131,7 @@
           <a:noFill/>
         </p:spPr>
         <p:txBody>
-          <a:bodyPr wrap="square" lIns="73152" tIns="27432" rIns="73152" bIns="27432">
+          <a:bodyPr wrap="square" lIns="73152" rIns="73152" tIns="27432" bIns="27432">
             <a:spAutoFit/>
           </a:bodyPr>
           <a:lstStyle/>
@@ -6580,16 +7142,10 @@
                 <a:solidFill>
                   <a:srgbClr val="5F5F5F"/>
                 </a:solidFill>
-                <a:latin typeface="Calibri" panose="020F0502020204030204"/>
+                <a:latin typeface="Calibri"/>
               </a:rPr>
               <a:t>Guide</a:t>
             </a:r>
-            <a:endParaRPr sz="1500" b="1">
-              <a:solidFill>
-                <a:srgbClr val="5F5F5F"/>
-              </a:solidFill>
-              <a:latin typeface="Calibri" panose="020F0502020204030204"/>
-            </a:endParaRPr>
           </a:p>
         </p:txBody>
       </p:sp>
@@ -6602,7 +7158,7 @@
         <p:spPr>
           <a:xfrm>
             <a:off x="8842248" y="3730752"/>
-            <a:ext cx="2139696" cy="577215"/>
+            <a:ext cx="2139696" cy="658368"/>
           </a:xfrm>
           <a:prstGeom prst="rect">
             <a:avLst/>
@@ -6610,7 +7166,7 @@
           <a:noFill/>
         </p:spPr>
         <p:txBody>
-          <a:bodyPr wrap="square" lIns="73152" tIns="27432" rIns="73152" bIns="27432">
+          <a:bodyPr wrap="square" lIns="73152" rIns="73152" tIns="27432" bIns="27432">
             <a:spAutoFit/>
           </a:bodyPr>
           <a:lstStyle/>
@@ -6621,16 +7177,10 @@
                 <a:solidFill>
                   <a:srgbClr val="000000"/>
                 </a:solidFill>
-                <a:latin typeface="Calibri" panose="020F0502020204030204"/>
+                <a:latin typeface="Calibri"/>
               </a:rPr>
               <a:t>Mr.Rambabu Kalathoti</a:t>
             </a:r>
-            <a:endParaRPr sz="1700" b="1">
-              <a:solidFill>
-                <a:srgbClr val="000000"/>
-              </a:solidFill>
-              <a:latin typeface="Calibri" panose="020F0502020204030204"/>
-            </a:endParaRPr>
           </a:p>
         </p:txBody>
       </p:sp>
@@ -6651,7 +7201,7 @@
           <a:noFill/>
         </p:spPr>
         <p:txBody>
-          <a:bodyPr wrap="square" lIns="73152" tIns="27432" rIns="73152" bIns="27432">
+          <a:bodyPr wrap="square" lIns="73152" rIns="73152" tIns="27432" bIns="27432">
             <a:spAutoFit/>
           </a:bodyPr>
           <a:lstStyle/>
@@ -6662,16 +7212,10 @@
                 <a:solidFill>
                   <a:srgbClr val="00B050"/>
                 </a:solidFill>
-                <a:latin typeface="Calibri" panose="020F0502020204030204"/>
+                <a:latin typeface="Calibri"/>
               </a:rPr>
               <a:t>Member</a:t>
             </a:r>
-            <a:endParaRPr sz="1400" b="1">
-              <a:solidFill>
-                <a:srgbClr val="00B050"/>
-              </a:solidFill>
-              <a:latin typeface="Calibri" panose="020F0502020204030204"/>
-            </a:endParaRPr>
           </a:p>
         </p:txBody>
       </p:sp>
@@ -6692,7 +7236,7 @@
           <a:noFill/>
         </p:spPr>
         <p:txBody>
-          <a:bodyPr wrap="square" lIns="73152" tIns="27432" rIns="73152" bIns="27432">
+          <a:bodyPr wrap="square" lIns="73152" rIns="73152" tIns="27432" bIns="27432">
             <a:spAutoFit/>
           </a:bodyPr>
           <a:lstStyle/>
@@ -6703,16 +7247,10 @@
                 <a:solidFill>
                   <a:srgbClr val="00B050"/>
                 </a:solidFill>
-                <a:latin typeface="Calibri" panose="020F0502020204030204"/>
+                <a:latin typeface="Calibri"/>
               </a:rPr>
               <a:t>Member</a:t>
             </a:r>
-            <a:endParaRPr sz="1400" b="1">
-              <a:solidFill>
-                <a:srgbClr val="00B050"/>
-              </a:solidFill>
-              <a:latin typeface="Calibri" panose="020F0502020204030204"/>
-            </a:endParaRPr>
           </a:p>
         </p:txBody>
       </p:sp>
@@ -6733,7 +7271,7 @@
           <a:noFill/>
         </p:spPr>
         <p:txBody>
-          <a:bodyPr wrap="square" lIns="73152" tIns="27432" rIns="73152" bIns="27432">
+          <a:bodyPr wrap="square" lIns="73152" rIns="73152" tIns="27432" bIns="27432">
             <a:spAutoFit/>
           </a:bodyPr>
           <a:lstStyle/>
@@ -6744,16 +7282,10 @@
                 <a:solidFill>
                   <a:srgbClr val="0070C0"/>
                 </a:solidFill>
-                <a:latin typeface="Calibri" panose="020F0502020204030204"/>
+                <a:latin typeface="Calibri"/>
               </a:rPr>
               <a:t>2300031256</a:t>
             </a:r>
-            <a:endParaRPr sz="1600" b="1">
-              <a:solidFill>
-                <a:srgbClr val="0070C0"/>
-              </a:solidFill>
-              <a:latin typeface="Calibri" panose="020F0502020204030204"/>
-            </a:endParaRPr>
           </a:p>
         </p:txBody>
       </p:sp>
@@ -6774,7 +7306,7 @@
           <a:noFill/>
         </p:spPr>
         <p:txBody>
-          <a:bodyPr wrap="square" lIns="73152" tIns="27432" rIns="73152" bIns="27432">
+          <a:bodyPr wrap="square" lIns="73152" rIns="73152" tIns="27432" bIns="27432">
             <a:spAutoFit/>
           </a:bodyPr>
           <a:lstStyle/>
@@ -6785,16 +7317,10 @@
                 <a:solidFill>
                   <a:srgbClr val="000000"/>
                 </a:solidFill>
-                <a:latin typeface="Calibri" panose="020F0502020204030204"/>
+                <a:latin typeface="Calibri"/>
               </a:rPr>
               <a:t>CHOPPARAPU JESWANTH VARUN</a:t>
             </a:r>
-            <a:endParaRPr sz="1700" b="1">
-              <a:solidFill>
-                <a:srgbClr val="000000"/>
-              </a:solidFill>
-              <a:latin typeface="Calibri" panose="020F0502020204030204"/>
-            </a:endParaRPr>
           </a:p>
         </p:txBody>
       </p:sp>
@@ -6815,7 +7341,7 @@
           <a:noFill/>
         </p:spPr>
         <p:txBody>
-          <a:bodyPr wrap="square" lIns="73152" tIns="27432" rIns="73152" bIns="27432">
+          <a:bodyPr wrap="square" lIns="73152" rIns="73152" tIns="27432" bIns="27432">
             <a:spAutoFit/>
           </a:bodyPr>
           <a:lstStyle/>
@@ -6826,20 +7352,19 @@
                 <a:solidFill>
                   <a:srgbClr val="00B050"/>
                 </a:solidFill>
-                <a:latin typeface="Calibri" panose="020F0502020204030204"/>
+                <a:latin typeface="Calibri"/>
               </a:rPr>
               <a:t>Member</a:t>
             </a:r>
-            <a:endParaRPr sz="1400" b="1">
-              <a:solidFill>
-                <a:srgbClr val="00B050"/>
-              </a:solidFill>
-              <a:latin typeface="Calibri" panose="020F0502020204030204"/>
-            </a:endParaRPr>
           </a:p>
         </p:txBody>
       </p:sp>
     </p:spTree>
+    <p:extLst>
+      <p:ext uri="{BB962C8B-B14F-4D97-AF65-F5344CB8AC3E}">
+        <p14:creationId xmlns:p14="http://schemas.microsoft.com/office/powerpoint/2010/main" xmlns="" val="3362554174"/>
+      </p:ext>
+    </p:extLst>
   </p:cSld>
   <p:clrMapOvr>
     <a:masterClrMapping/>
@@ -6881,11 +7406,11 @@
           <a:p>
             <a:pPr algn="ctr"/>
             <a:r>
-              <a:rPr lang="en-US" sz="3000" b="1" dirty="0" smtClean="0">
+              <a:rPr lang="en-US" b="1" dirty="0" smtClean="0" sz="3000">
                 <a:solidFill>
                   <a:srgbClr val="000000"/>
                 </a:solidFill>
-                <a:latin typeface="Calibri" panose="020F0502020204030204"/>
+                <a:latin typeface="Calibri"/>
               </a:rPr>
               <a:t>TESTING&amp; RESULTS </a:t>
             </a:r>
@@ -6916,7 +7441,7 @@
                 <a:solidFill>
                   <a:srgbClr val="808080"/>
                 </a:solidFill>
-                <a:latin typeface="Calibri" panose="020F0502020204030204"/>
+                <a:latin typeface="Calibri"/>
               </a:rPr>
               <a:t>23-09-2026</a:t>
             </a:r>
@@ -6944,7 +7469,7 @@
                 <a:solidFill>
                   <a:srgbClr val="808080"/>
                 </a:solidFill>
-                <a:latin typeface="Calibri" panose="020F0502020204030204"/>
+                <a:latin typeface="Calibri"/>
               </a:rPr>
               <a:t>Review-II                                                        Department of CSE-2</a:t>
             </a:r>
@@ -6972,7 +7497,7 @@
                 <a:solidFill>
                   <a:srgbClr val="808080"/>
                 </a:solidFill>
-                <a:latin typeface="Calibri" panose="020F0502020204030204"/>
+                <a:latin typeface="Calibri"/>
               </a:rPr>
               <a:t>10</a:t>
             </a:r>
@@ -7012,16 +7537,10 @@
                 <a:solidFill>
                   <a:srgbClr val="0070C0"/>
                 </a:solidFill>
-                <a:latin typeface="Calibri" panose="020F0502020204030204"/>
+                <a:latin typeface="Calibri"/>
               </a:rPr>
               <a:t>5/12</a:t>
             </a:r>
-            <a:endParaRPr sz="2800" b="1">
-              <a:solidFill>
-                <a:srgbClr val="0070C0"/>
-              </a:solidFill>
-              <a:latin typeface="Calibri" panose="020F0502020204030204"/>
-            </a:endParaRPr>
           </a:p>
         </p:txBody>
       </p:sp>
@@ -7057,16 +7576,10 @@
                 <a:solidFill>
                   <a:srgbClr val="000000"/>
                 </a:solidFill>
-                <a:latin typeface="Calibri" panose="020F0502020204030204"/>
+                <a:latin typeface="Calibri"/>
               </a:rPr>
               <a:t>FIFO baseline</a:t>
             </a:r>
-            <a:endParaRPr sz="1800" b="1">
-              <a:solidFill>
-                <a:srgbClr val="000000"/>
-              </a:solidFill>
-              <a:latin typeface="Calibri" panose="020F0502020204030204"/>
-            </a:endParaRPr>
           </a:p>
         </p:txBody>
       </p:sp>
@@ -7102,16 +7615,10 @@
                 <a:solidFill>
                   <a:srgbClr val="666666"/>
                 </a:solidFill>
-                <a:latin typeface="Calibri" panose="020F0502020204030204"/>
+                <a:latin typeface="Calibri"/>
               </a:rPr>
               <a:t>7 unresolved</a:t>
             </a:r>
-            <a:endParaRPr sz="1500" b="0">
-              <a:solidFill>
-                <a:srgbClr val="666666"/>
-              </a:solidFill>
-              <a:latin typeface="Calibri" panose="020F0502020204030204"/>
-            </a:endParaRPr>
           </a:p>
         </p:txBody>
       </p:sp>
@@ -7147,16 +7654,10 @@
                 <a:solidFill>
                   <a:srgbClr val="0070C0"/>
                 </a:solidFill>
-                <a:latin typeface="Calibri" panose="020F0502020204030204"/>
+                <a:latin typeface="Calibri"/>
               </a:rPr>
               <a:t>7/12</a:t>
             </a:r>
-            <a:endParaRPr sz="2800" b="1">
-              <a:solidFill>
-                <a:srgbClr val="0070C0"/>
-              </a:solidFill>
-              <a:latin typeface="Calibri" panose="020F0502020204030204"/>
-            </a:endParaRPr>
           </a:p>
         </p:txBody>
       </p:sp>
@@ -7192,16 +7693,10 @@
                 <a:solidFill>
                   <a:srgbClr val="000000"/>
                 </a:solidFill>
-                <a:latin typeface="Calibri" panose="020F0502020204030204"/>
+                <a:latin typeface="Calibri"/>
               </a:rPr>
               <a:t>Greedy baseline</a:t>
             </a:r>
-            <a:endParaRPr sz="1800" b="1">
-              <a:solidFill>
-                <a:srgbClr val="000000"/>
-              </a:solidFill>
-              <a:latin typeface="Calibri" panose="020F0502020204030204"/>
-            </a:endParaRPr>
           </a:p>
         </p:txBody>
       </p:sp>
@@ -7237,16 +7732,10 @@
                 <a:solidFill>
                   <a:srgbClr val="666666"/>
                 </a:solidFill>
-                <a:latin typeface="Calibri" panose="020F0502020204030204"/>
+                <a:latin typeface="Calibri"/>
               </a:rPr>
               <a:t>5 unresolved</a:t>
             </a:r>
-            <a:endParaRPr sz="1500" b="0">
-              <a:solidFill>
-                <a:srgbClr val="666666"/>
-              </a:solidFill>
-              <a:latin typeface="Calibri" panose="020F0502020204030204"/>
-            </a:endParaRPr>
           </a:p>
         </p:txBody>
       </p:sp>
@@ -7282,16 +7771,10 @@
                 <a:solidFill>
                   <a:srgbClr val="0070C0"/>
                 </a:solidFill>
-                <a:latin typeface="Calibri" panose="020F0502020204030204"/>
+                <a:latin typeface="Calibri"/>
               </a:rPr>
               <a:t>7/12</a:t>
             </a:r>
-            <a:endParaRPr sz="2800" b="1">
-              <a:solidFill>
-                <a:srgbClr val="0070C0"/>
-              </a:solidFill>
-              <a:latin typeface="Calibri" panose="020F0502020204030204"/>
-            </a:endParaRPr>
           </a:p>
         </p:txBody>
       </p:sp>
@@ -7327,16 +7810,10 @@
                 <a:solidFill>
                   <a:srgbClr val="000000"/>
                 </a:solidFill>
-                <a:latin typeface="Calibri" panose="020F0502020204030204"/>
+                <a:latin typeface="Calibri"/>
               </a:rPr>
               <a:t>CP-2 completed</a:t>
             </a:r>
-            <a:endParaRPr sz="1800" b="1">
-              <a:solidFill>
-                <a:srgbClr val="000000"/>
-              </a:solidFill>
-              <a:latin typeface="Calibri" panose="020F0502020204030204"/>
-            </a:endParaRPr>
           </a:p>
         </p:txBody>
       </p:sp>
@@ -7372,16 +7849,10 @@
                 <a:solidFill>
                   <a:srgbClr val="666666"/>
                 </a:solidFill>
-                <a:latin typeface="Calibri" panose="020F0502020204030204"/>
+                <a:latin typeface="Calibri"/>
               </a:rPr>
               <a:t>0 unresolved</a:t>
             </a:r>
-            <a:endParaRPr sz="1500" b="0">
-              <a:solidFill>
-                <a:srgbClr val="666666"/>
-              </a:solidFill>
-              <a:latin typeface="Calibri" panose="020F0502020204030204"/>
-            </a:endParaRPr>
           </a:p>
         </p:txBody>
       </p:sp>
@@ -7417,16 +7888,10 @@
                 <a:solidFill>
                   <a:srgbClr val="00B050"/>
                 </a:solidFill>
-                <a:latin typeface="Calibri" panose="020F0502020204030204"/>
+                <a:latin typeface="Calibri"/>
               </a:rPr>
               <a:t>70/70</a:t>
             </a:r>
-            <a:endParaRPr sz="2800" b="1">
-              <a:solidFill>
-                <a:srgbClr val="00B050"/>
-              </a:solidFill>
-              <a:latin typeface="Calibri" panose="020F0502020204030204"/>
-            </a:endParaRPr>
           </a:p>
         </p:txBody>
       </p:sp>
@@ -7462,16 +7927,10 @@
                 <a:solidFill>
                   <a:srgbClr val="000000"/>
                 </a:solidFill>
-                <a:latin typeface="Calibri" panose="020F0502020204030204"/>
+                <a:latin typeface="Calibri"/>
               </a:rPr>
               <a:t>pytest</a:t>
             </a:r>
-            <a:endParaRPr sz="1800" b="1">
-              <a:solidFill>
-                <a:srgbClr val="000000"/>
-              </a:solidFill>
-              <a:latin typeface="Calibri" panose="020F0502020204030204"/>
-            </a:endParaRPr>
           </a:p>
         </p:txBody>
       </p:sp>
@@ -7507,16 +7966,10 @@
                 <a:solidFill>
                   <a:srgbClr val="666666"/>
                 </a:solidFill>
-                <a:latin typeface="Calibri" panose="020F0502020204030204"/>
+                <a:latin typeface="Calibri"/>
               </a:rPr>
               <a:t>14/14 oracle + gate</a:t>
             </a:r>
-            <a:endParaRPr sz="1500" b="0">
-              <a:solidFill>
-                <a:srgbClr val="666666"/>
-              </a:solidFill>
-              <a:latin typeface="Calibri" panose="020F0502020204030204"/>
-            </a:endParaRPr>
           </a:p>
         </p:txBody>
       </p:sp>
@@ -7534,7 +7987,7 @@
         </p:xfrm>
         <a:graphic>
           <a:graphicData uri="http://schemas.openxmlformats.org/drawingml/2006/chart">
-            <c:chart xmlns:c="http://schemas.openxmlformats.org/drawingml/2006/chart" xmlns:r="http://schemas.openxmlformats.org/officeDocument/2006/relationships" r:id="rId1"/>
+            <c:chart xmlns:c="http://schemas.openxmlformats.org/drawingml/2006/chart" r:id="rId2"/>
           </a:graphicData>
         </a:graphic>
       </p:graphicFrame>
@@ -7570,16 +8023,10 @@
                 <a:solidFill>
                   <a:srgbClr val="666666"/>
                 </a:solidFill>
-                <a:latin typeface="Calibri" panose="020F0502020204030204"/>
+                <a:latin typeface="Calibri"/>
               </a:rPr>
               <a:t>CP-2 policy comparison (counts across 12 trials)</a:t>
             </a:r>
-            <a:endParaRPr sz="1400" b="0">
-              <a:solidFill>
-                <a:srgbClr val="666666"/>
-              </a:solidFill>
-              <a:latin typeface="Calibri" panose="020F0502020204030204"/>
-            </a:endParaRPr>
           </a:p>
         </p:txBody>
       </p:sp>
@@ -7703,16 +8150,10 @@
                 <a:solidFill>
                   <a:srgbClr val="00B050"/>
                 </a:solidFill>
-                <a:latin typeface="Calibri" panose="020F0502020204030204"/>
+                <a:latin typeface="Calibri"/>
               </a:rPr>
               <a:t>REAL-RAY EVIDENCE</a:t>
             </a:r>
-            <a:endParaRPr sz="1900" b="1">
-              <a:solidFill>
-                <a:srgbClr val="00B050"/>
-              </a:solidFill>
-              <a:latin typeface="Calibri" panose="020F0502020204030204"/>
-            </a:endParaRPr>
           </a:p>
         </p:txBody>
       </p:sp>
@@ -7733,35 +8174,29 @@
           <a:noFill/>
         </p:spPr>
         <p:txBody>
-          <a:bodyPr wrap="square" lIns="73152" tIns="27432" rIns="27432" bIns="0">
+          <a:bodyPr wrap="square" lIns="73152" rIns="27432" tIns="27432" bIns="0">
             <a:spAutoFit/>
           </a:bodyPr>
           <a:lstStyle/>
           <a:p>
             <a:pPr>
+              <a:buChar char="•"/>
               <a:lnSpc>
                 <a:spcPct val="100000"/>
               </a:lnSpc>
               <a:spcAft>
                 <a:spcPts val="500"/>
               </a:spcAft>
-              <a:buChar char="•"/>
             </a:pPr>
             <a:r>
               <a:rPr sz="1600" b="0">
                 <a:solidFill>
                   <a:srgbClr val="000000"/>
                 </a:solidFill>
-                <a:latin typeface="Calibri" panose="020F0502020204030204"/>
+                <a:latin typeface="Calibri"/>
               </a:rPr>
               <a:t>Ray 2.10.0: child PG PENDING for 91.8s | 4 total / 4 reserved / 1 useful / 3 stranded</a:t>
             </a:r>
-            <a:endParaRPr sz="1600" b="0">
-              <a:solidFill>
-                <a:srgbClr val="000000"/>
-              </a:solidFill>
-              <a:latin typeface="Calibri" panose="020F0502020204030204"/>
-            </a:endParaRPr>
           </a:p>
         </p:txBody>
       </p:sp>
@@ -7807,11 +8242,11 @@
           <a:p>
             <a:pPr algn="ctr"/>
             <a:r>
-              <a:rPr lang="en-US" sz="3000" b="1" dirty="0" smtClean="0">
+              <a:rPr lang="en-US" b="1" dirty="0" smtClean="0" sz="3000">
                 <a:solidFill>
                   <a:srgbClr val="000000"/>
                 </a:solidFill>
-                <a:latin typeface="Calibri" panose="020F0502020204030204"/>
+                <a:latin typeface="Calibri"/>
               </a:rPr>
               <a:t>CONCLUSION&amp; FUTURE SCOPE</a:t>
             </a:r>
@@ -7842,7 +8277,7 @@
                 <a:solidFill>
                   <a:srgbClr val="808080"/>
                 </a:solidFill>
-                <a:latin typeface="Calibri" panose="020F0502020204030204"/>
+                <a:latin typeface="Calibri"/>
               </a:rPr>
               <a:t>23-09-2026</a:t>
             </a:r>
@@ -7870,7 +8305,7 @@
                 <a:solidFill>
                   <a:srgbClr val="808080"/>
                 </a:solidFill>
-                <a:latin typeface="Calibri" panose="020F0502020204030204"/>
+                <a:latin typeface="Calibri"/>
               </a:rPr>
               <a:t>Review-II                                                        Department of CSE-2</a:t>
             </a:r>
@@ -7898,7 +8333,7 @@
                 <a:solidFill>
                   <a:srgbClr val="808080"/>
                 </a:solidFill>
-                <a:latin typeface="Calibri" panose="020F0502020204030204"/>
+                <a:latin typeface="Calibri"/>
               </a:rPr>
               <a:t>11</a:t>
             </a:r>
@@ -7938,16 +8373,10 @@
                 <a:solidFill>
                   <a:srgbClr val="0070C0"/>
                 </a:solidFill>
-                <a:latin typeface="Calibri" panose="020F0502020204030204"/>
+                <a:latin typeface="Calibri"/>
               </a:rPr>
               <a:t>CONCLUSION</a:t>
             </a:r>
-            <a:endParaRPr sz="2200" b="1">
-              <a:solidFill>
-                <a:srgbClr val="0070C0"/>
-              </a:solidFill>
-              <a:latin typeface="Calibri" panose="020F0502020204030204"/>
-            </a:endParaRPr>
           </a:p>
         </p:txBody>
       </p:sp>
@@ -7968,38 +8397,32 @@
           <a:noFill/>
         </p:spPr>
         <p:txBody>
-          <a:bodyPr wrap="square" lIns="73152" tIns="27432" rIns="27432" bIns="0">
+          <a:bodyPr wrap="square" lIns="73152" rIns="27432" tIns="27432" bIns="0">
             <a:spAutoFit/>
           </a:bodyPr>
           <a:lstStyle/>
           <a:p>
             <a:pPr>
+              <a:buChar char="•"/>
               <a:lnSpc>
                 <a:spcPct val="100000"/>
               </a:lnSpc>
               <a:spcAft>
                 <a:spcPts val="800"/>
               </a:spcAft>
-              <a:buChar char="•"/>
             </a:pPr>
             <a:r>
               <a:rPr sz="2000" b="0">
                 <a:solidFill>
                   <a:srgbClr val="000000"/>
                 </a:solidFill>
-                <a:latin typeface="Calibri" panose="020F0502020204030204"/>
+                <a:latin typeface="Calibri"/>
               </a:rPr>
               <a:t>CP-1 establishes FIFO and Greedy baselines.
 CP-2 checks parent + child before admission.
 Unresolved cases become explicit rejections: 7/5 → 0 unresolved.
 Validated by simulator evidence and a Ray 2.10.0 reproduction.</a:t>
             </a:r>
-            <a:endParaRPr sz="2000" b="0">
-              <a:solidFill>
-                <a:srgbClr val="000000"/>
-              </a:solidFill>
-              <a:latin typeface="Calibri" panose="020F0502020204030204"/>
-            </a:endParaRPr>
           </a:p>
         </p:txBody>
       </p:sp>
@@ -8035,16 +8458,10 @@
                 <a:solidFill>
                   <a:srgbClr val="00B050"/>
                 </a:solidFill>
-                <a:latin typeface="Calibri" panose="020F0502020204030204"/>
+                <a:latin typeface="Calibri"/>
               </a:rPr>
               <a:t>FUTURE SCOPE / COMPLETION PLAN</a:t>
             </a:r>
-            <a:endParaRPr sz="2200" b="1">
-              <a:solidFill>
-                <a:srgbClr val="00B050"/>
-              </a:solidFill>
-              <a:latin typeface="Calibri" panose="020F0502020204030204"/>
-            </a:endParaRPr>
           </a:p>
         </p:txBody>
       </p:sp>
@@ -8080,16 +8497,10 @@
                 <a:solidFill>
                   <a:srgbClr val="00B050"/>
                 </a:solidFill>
-                <a:latin typeface="Calibri" panose="020F0502020204030204"/>
+                <a:latin typeface="Calibri"/>
               </a:rPr>
               <a:t>W1</a:t>
             </a:r>
-            <a:endParaRPr sz="1800" b="1">
-              <a:solidFill>
-                <a:srgbClr val="00B050"/>
-              </a:solidFill>
-              <a:latin typeface="Calibri" panose="020F0502020204030204"/>
-            </a:endParaRPr>
           </a:p>
         </p:txBody>
       </p:sp>
@@ -8125,16 +8536,10 @@
                 <a:solidFill>
                   <a:srgbClr val="000000"/>
                 </a:solidFill>
-                <a:latin typeface="Calibri" panose="020F0502020204030204"/>
+                <a:latin typeface="Calibri"/>
               </a:rPr>
               <a:t>Read papers + literature review</a:t>
             </a:r>
-            <a:endParaRPr sz="1900" b="0">
-              <a:solidFill>
-                <a:srgbClr val="000000"/>
-              </a:solidFill>
-              <a:latin typeface="Calibri" panose="020F0502020204030204"/>
-            </a:endParaRPr>
           </a:p>
         </p:txBody>
       </p:sp>
@@ -8205,16 +8610,10 @@
                 <a:solidFill>
                   <a:srgbClr val="00B050"/>
                 </a:solidFill>
-                <a:latin typeface="Calibri" panose="020F0502020204030204"/>
+                <a:latin typeface="Calibri"/>
               </a:rPr>
               <a:t>W2</a:t>
             </a:r>
-            <a:endParaRPr sz="1800" b="1">
-              <a:solidFill>
-                <a:srgbClr val="00B050"/>
-              </a:solidFill>
-              <a:latin typeface="Calibri" panose="020F0502020204030204"/>
-            </a:endParaRPr>
           </a:p>
         </p:txBody>
       </p:sp>
@@ -8250,16 +8649,10 @@
                 <a:solidFill>
                   <a:srgbClr val="000000"/>
                 </a:solidFill>
-                <a:latin typeface="Calibri" panose="020F0502020204030204"/>
+                <a:latin typeface="Calibri"/>
               </a:rPr>
               <a:t>Fill team/guide + rehearse demo</a:t>
             </a:r>
-            <a:endParaRPr sz="1900" b="0">
-              <a:solidFill>
-                <a:srgbClr val="000000"/>
-              </a:solidFill>
-              <a:latin typeface="Calibri" panose="020F0502020204030204"/>
-            </a:endParaRPr>
           </a:p>
         </p:txBody>
       </p:sp>
@@ -8330,16 +8723,10 @@
                 <a:solidFill>
                   <a:srgbClr val="00B050"/>
                 </a:solidFill>
-                <a:latin typeface="Calibri" panose="020F0502020204030204"/>
+                <a:latin typeface="Calibri"/>
               </a:rPr>
               <a:t>W3</a:t>
             </a:r>
-            <a:endParaRPr sz="1800" b="1">
-              <a:solidFill>
-                <a:srgbClr val="00B050"/>
-              </a:solidFill>
-              <a:latin typeface="Calibri" panose="020F0502020204030204"/>
-            </a:endParaRPr>
           </a:p>
         </p:txBody>
       </p:sp>
@@ -8375,16 +8762,10 @@
                 <a:solidFill>
                   <a:srgbClr val="000000"/>
                 </a:solidFill>
-                <a:latin typeface="Calibri" panose="020F0502020204030204"/>
+                <a:latin typeface="Calibri"/>
               </a:rPr>
               <a:t>Test newer Ray / multi-node</a:t>
             </a:r>
-            <a:endParaRPr sz="1900" b="0">
-              <a:solidFill>
-                <a:srgbClr val="000000"/>
-              </a:solidFill>
-              <a:latin typeface="Calibri" panose="020F0502020204030204"/>
-            </a:endParaRPr>
           </a:p>
         </p:txBody>
       </p:sp>
@@ -8455,16 +8836,10 @@
                 <a:solidFill>
                   <a:srgbClr val="00B050"/>
                 </a:solidFill>
-                <a:latin typeface="Calibri" panose="020F0502020204030204"/>
+                <a:latin typeface="Calibri"/>
               </a:rPr>
               <a:t>W4</a:t>
             </a:r>
-            <a:endParaRPr sz="1800" b="1">
-              <a:solidFill>
-                <a:srgbClr val="00B050"/>
-              </a:solidFill>
-              <a:latin typeface="Calibri" panose="020F0502020204030204"/>
-            </a:endParaRPr>
           </a:p>
         </p:txBody>
       </p:sp>
@@ -8500,16 +8875,10 @@
                 <a:solidFill>
                   <a:srgbClr val="000000"/>
                 </a:solidFill>
-                <a:latin typeface="Calibri" panose="020F0502020204030204"/>
+                <a:latin typeface="Calibri"/>
               </a:rPr>
               <a:t>Add traces and workload diversity</a:t>
             </a:r>
-            <a:endParaRPr sz="1900" b="0">
-              <a:solidFill>
-                <a:srgbClr val="000000"/>
-              </a:solidFill>
-              <a:latin typeface="Calibri" panose="020F0502020204030204"/>
-            </a:endParaRPr>
           </a:p>
         </p:txBody>
       </p:sp>
@@ -8580,16 +8949,10 @@
                 <a:solidFill>
                   <a:srgbClr val="00B050"/>
                 </a:solidFill>
-                <a:latin typeface="Calibri" panose="020F0502020204030204"/>
+                <a:latin typeface="Calibri"/>
               </a:rPr>
               <a:t>W5</a:t>
             </a:r>
-            <a:endParaRPr sz="1800" b="1">
-              <a:solidFill>
-                <a:srgbClr val="00B050"/>
-              </a:solidFill>
-              <a:latin typeface="Calibri" panose="020F0502020204030204"/>
-            </a:endParaRPr>
           </a:p>
         </p:txBody>
       </p:sp>
@@ -8625,16 +8988,10 @@
                 <a:solidFill>
                   <a:srgbClr val="000000"/>
                 </a:solidFill>
-                <a:latin typeface="Calibri" panose="020F0502020204030204"/>
+                <a:latin typeface="Calibri"/>
               </a:rPr>
               <a:t>Submit preprint or workshop paper</a:t>
             </a:r>
-            <a:endParaRPr sz="1900" b="0">
-              <a:solidFill>
-                <a:srgbClr val="000000"/>
-              </a:solidFill>
-              <a:latin typeface="Calibri" panose="020F0502020204030204"/>
-            </a:endParaRPr>
           </a:p>
         </p:txBody>
       </p:sp>
@@ -8715,16 +9072,10 @@
                 <a:solidFill>
                   <a:srgbClr val="0070C0"/>
                 </a:solidFill>
-                <a:latin typeface="Calibri" panose="020F0502020204030204"/>
+                <a:latin typeface="Calibri"/>
               </a:rPr>
               <a:t>Limitation: the simulator is deterministic and atomic; real multi-node production behavior remains future work.</a:t>
             </a:r>
-            <a:endParaRPr sz="1700" b="1">
-              <a:solidFill>
-                <a:srgbClr val="0070C0"/>
-              </a:solidFill>
-              <a:latin typeface="Calibri" panose="020F0502020204030204"/>
-            </a:endParaRPr>
           </a:p>
         </p:txBody>
       </p:sp>
@@ -8755,7 +9106,13 @@
       </p:grpSpPr>
       <p:sp>
         <p:nvSpPr>
-          <p:cNvPr id="5" name="Date Placeholder 4"/>
+          <p:cNvPr id="5" name="Date Placeholder 4">
+            <a:extLst>
+              <a:ext uri="{FF2B5EF4-FFF2-40B4-BE49-F238E27FC236}">
+                <a16:creationId xmlns:a16="http://schemas.microsoft.com/office/drawing/2014/main" xmlns="" id="{BD5C2420-26C9-65B4-41BA-D5CA69721C05}"/>
+              </a:ext>
+            </a:extLst>
+          </p:cNvPr>
           <p:cNvSpPr>
             <a:spLocks noGrp="1"/>
           </p:cNvSpPr>
@@ -8773,7 +9130,7 @@
                 <a:solidFill>
                   <a:srgbClr val="808080"/>
                 </a:solidFill>
-                <a:latin typeface="Calibri" panose="020F0502020204030204"/>
+                <a:latin typeface="Calibri"/>
               </a:rPr>
               <a:t>23-09-2026</a:t>
             </a:r>
@@ -8783,7 +9140,13 @@
       </p:sp>
       <p:sp>
         <p:nvSpPr>
-          <p:cNvPr id="6" name="Footer Placeholder 5"/>
+          <p:cNvPr id="6" name="Footer Placeholder 5">
+            <a:extLst>
+              <a:ext uri="{FF2B5EF4-FFF2-40B4-BE49-F238E27FC236}">
+                <a16:creationId xmlns:a16="http://schemas.microsoft.com/office/drawing/2014/main" xmlns="" id="{AE9B4454-96E6-70D8-1440-2142487397DF}"/>
+              </a:ext>
+            </a:extLst>
+          </p:cNvPr>
           <p:cNvSpPr>
             <a:spLocks noGrp="1"/>
           </p:cNvSpPr>
@@ -8801,7 +9164,7 @@
                 <a:solidFill>
                   <a:srgbClr val="808080"/>
                 </a:solidFill>
-                <a:latin typeface="Calibri" panose="020F0502020204030204"/>
+                <a:latin typeface="Calibri"/>
               </a:rPr>
               <a:t>Review-II                                                        Department of CSE-2</a:t>
             </a:r>
@@ -8811,7 +9174,13 @@
       </p:sp>
       <p:sp>
         <p:nvSpPr>
-          <p:cNvPr id="7" name="Slide Number Placeholder 6"/>
+          <p:cNvPr id="7" name="Slide Number Placeholder 6">
+            <a:extLst>
+              <a:ext uri="{FF2B5EF4-FFF2-40B4-BE49-F238E27FC236}">
+                <a16:creationId xmlns:a16="http://schemas.microsoft.com/office/drawing/2014/main" xmlns="" id="{5F827BAA-7E22-F268-D9DC-5E17D9155237}"/>
+              </a:ext>
+            </a:extLst>
+          </p:cNvPr>
           <p:cNvSpPr>
             <a:spLocks noGrp="1"/>
           </p:cNvSpPr>
@@ -8829,7 +9198,7 @@
                 <a:solidFill>
                   <a:srgbClr val="808080"/>
                 </a:solidFill>
-                <a:latin typeface="Calibri" panose="020F0502020204030204"/>
+                <a:latin typeface="Calibri"/>
               </a:rPr>
               <a:t>12</a:t>
             </a:r>
@@ -8869,16 +9238,10 @@
                 <a:solidFill>
                   <a:srgbClr val="000000"/>
                 </a:solidFill>
-                <a:latin typeface="Calibri" panose="020F0502020204030204"/>
+                <a:latin typeface="Calibri"/>
               </a:rPr>
               <a:t>THANK YOU</a:t>
             </a:r>
-            <a:endParaRPr sz="3400" b="1">
-              <a:solidFill>
-                <a:srgbClr val="000000"/>
-              </a:solidFill>
-              <a:latin typeface="Calibri" panose="020F0502020204030204"/>
-            </a:endParaRPr>
           </a:p>
         </p:txBody>
       </p:sp>
@@ -8914,16 +9277,10 @@
                 <a:solidFill>
                   <a:srgbClr val="0070C0"/>
                 </a:solidFill>
-                <a:latin typeface="Calibri" panose="020F0502020204030204"/>
+                <a:latin typeface="Calibri"/>
               </a:rPr>
               <a:t>NestedTune Guard</a:t>
             </a:r>
-            <a:endParaRPr sz="2800" b="1">
-              <a:solidFill>
-                <a:srgbClr val="0070C0"/>
-              </a:solidFill>
-              <a:latin typeface="Calibri" panose="020F0502020204030204"/>
-            </a:endParaRPr>
           </a:p>
         </p:txBody>
       </p:sp>
@@ -8959,16 +9316,10 @@
                 <a:solidFill>
                   <a:srgbClr val="00B050"/>
                 </a:solidFill>
-                <a:latin typeface="Calibri" panose="020F0502020204030204"/>
+                <a:latin typeface="Calibri"/>
               </a:rPr>
               <a:t>Questions &amp; Discussion</a:t>
             </a:r>
-            <a:endParaRPr sz="2400" b="1">
-              <a:solidFill>
-                <a:srgbClr val="00B050"/>
-              </a:solidFill>
-              <a:latin typeface="Calibri" panose="020F0502020204030204"/>
-            </a:endParaRPr>
           </a:p>
         </p:txBody>
       </p:sp>
@@ -9004,20 +9355,19 @@
                 <a:solidFill>
                   <a:srgbClr val="666666"/>
                 </a:solidFill>
-                <a:latin typeface="Calibri" panose="020F0502020204030204"/>
-              </a:rPr>
-              <a:t>Project ID CINT-11  |  Batch: [Batch]</a:t>
-            </a:r>
-            <a:endParaRPr sz="1900" b="0">
-              <a:solidFill>
-                <a:srgbClr val="666666"/>
-              </a:solidFill>
-              <a:latin typeface="Calibri" panose="020F0502020204030204"/>
-            </a:endParaRPr>
+                <a:latin typeface="Calibri"/>
+              </a:rPr>
+              <a:t>Project ID CINT-11  |  Batch: CSE-2</a:t>
+            </a:r>
           </a:p>
         </p:txBody>
       </p:sp>
     </p:spTree>
+    <p:extLst>
+      <p:ext uri="{BB962C8B-B14F-4D97-AF65-F5344CB8AC3E}">
+        <p14:creationId xmlns:p14="http://schemas.microsoft.com/office/powerpoint/2010/main" xmlns="" val="4213958207"/>
+      </p:ext>
+    </p:extLst>
   </p:cSld>
   <p:clrMapOvr>
     <a:masterClrMapping/>
@@ -9044,7 +9394,13 @@
       </p:grpSpPr>
       <p:sp>
         <p:nvSpPr>
-          <p:cNvPr id="8" name="Title 7"/>
+          <p:cNvPr id="8" name="Title 7">
+            <a:extLst>
+              <a:ext uri="{FF2B5EF4-FFF2-40B4-BE49-F238E27FC236}">
+                <a16:creationId xmlns:a16="http://schemas.microsoft.com/office/drawing/2014/main" xmlns="" id="{D45DB3B1-7702-A34D-B15A-E964B95D6FB5}"/>
+              </a:ext>
+            </a:extLst>
+          </p:cNvPr>
           <p:cNvSpPr>
             <a:spLocks noGrp="1"/>
           </p:cNvSpPr>
@@ -9064,26 +9420,26 @@
           <a:p>
             <a:pPr algn="ctr"/>
             <a:r>
-              <a:rPr lang="en-US" sz="3000" b="1" dirty="0">
+              <a:rPr lang="en-US" b="1" dirty="0" sz="3000">
                 <a:solidFill>
                   <a:srgbClr val="000000"/>
                 </a:solidFill>
-                <a:latin typeface="Calibri" panose="020F0502020204030204"/>
+                <a:latin typeface="Calibri"/>
               </a:rPr>
               <a:t>OUTLINE</a:t>
             </a:r>
-            <a:endParaRPr lang="en-US" sz="3000" b="1" dirty="0">
-              <a:solidFill>
-                <a:srgbClr val="000000"/>
-              </a:solidFill>
-              <a:latin typeface="Calibri" panose="020F0502020204030204"/>
-            </a:endParaRPr>
-          </a:p>
-        </p:txBody>
-      </p:sp>
-      <p:sp>
-        <p:nvSpPr>
-          <p:cNvPr id="5" name="Date Placeholder 4"/>
+          </a:p>
+        </p:txBody>
+      </p:sp>
+      <p:sp>
+        <p:nvSpPr>
+          <p:cNvPr id="5" name="Date Placeholder 4">
+            <a:extLst>
+              <a:ext uri="{FF2B5EF4-FFF2-40B4-BE49-F238E27FC236}">
+                <a16:creationId xmlns:a16="http://schemas.microsoft.com/office/drawing/2014/main" xmlns="" id="{BD5C2420-26C9-65B4-41BA-D5CA69721C05}"/>
+              </a:ext>
+            </a:extLst>
+          </p:cNvPr>
           <p:cNvSpPr>
             <a:spLocks noGrp="1"/>
           </p:cNvSpPr>
@@ -9101,7 +9457,7 @@
                 <a:solidFill>
                   <a:srgbClr val="808080"/>
                 </a:solidFill>
-                <a:latin typeface="Calibri" panose="020F0502020204030204"/>
+                <a:latin typeface="Calibri"/>
               </a:rPr>
               <a:t>23-09-2026</a:t>
             </a:r>
@@ -9111,7 +9467,13 @@
       </p:sp>
       <p:sp>
         <p:nvSpPr>
-          <p:cNvPr id="6" name="Footer Placeholder 5"/>
+          <p:cNvPr id="6" name="Footer Placeholder 5">
+            <a:extLst>
+              <a:ext uri="{FF2B5EF4-FFF2-40B4-BE49-F238E27FC236}">
+                <a16:creationId xmlns:a16="http://schemas.microsoft.com/office/drawing/2014/main" xmlns="" id="{AE9B4454-96E6-70D8-1440-2142487397DF}"/>
+              </a:ext>
+            </a:extLst>
+          </p:cNvPr>
           <p:cNvSpPr>
             <a:spLocks noGrp="1"/>
           </p:cNvSpPr>
@@ -9129,7 +9491,7 @@
                 <a:solidFill>
                   <a:srgbClr val="808080"/>
                 </a:solidFill>
-                <a:latin typeface="Calibri" panose="020F0502020204030204"/>
+                <a:latin typeface="Calibri"/>
               </a:rPr>
               <a:t>Review-II                                                        Department of CSE-2</a:t>
             </a:r>
@@ -9139,7 +9501,13 @@
       </p:sp>
       <p:sp>
         <p:nvSpPr>
-          <p:cNvPr id="7" name="Slide Number Placeholder 6"/>
+          <p:cNvPr id="7" name="Slide Number Placeholder 6">
+            <a:extLst>
+              <a:ext uri="{FF2B5EF4-FFF2-40B4-BE49-F238E27FC236}">
+                <a16:creationId xmlns:a16="http://schemas.microsoft.com/office/drawing/2014/main" xmlns="" id="{5F827BAA-7E22-F268-D9DC-5E17D9155237}"/>
+              </a:ext>
+            </a:extLst>
+          </p:cNvPr>
           <p:cNvSpPr>
             <a:spLocks noGrp="1"/>
           </p:cNvSpPr>
@@ -9157,7 +9525,7 @@
                 <a:solidFill>
                   <a:srgbClr val="808080"/>
                 </a:solidFill>
-                <a:latin typeface="Calibri" panose="020F0502020204030204"/>
+                <a:latin typeface="Calibri"/>
               </a:rPr>
               <a:t>2</a:t>
             </a:r>
@@ -9197,16 +9565,10 @@
                 <a:solidFill>
                   <a:srgbClr val="0070C0"/>
                 </a:solidFill>
-                <a:latin typeface="Calibri" panose="020F0502020204030204"/>
+                <a:latin typeface="Calibri"/>
               </a:rPr>
               <a:t>01</a:t>
             </a:r>
-            <a:endParaRPr sz="2000" b="1">
-              <a:solidFill>
-                <a:srgbClr val="0070C0"/>
-              </a:solidFill>
-              <a:latin typeface="Calibri" panose="020F0502020204030204"/>
-            </a:endParaRPr>
           </a:p>
         </p:txBody>
       </p:sp>
@@ -9242,16 +9604,10 @@
                 <a:solidFill>
                   <a:srgbClr val="000000"/>
                 </a:solidFill>
-                <a:latin typeface="Calibri" panose="020F0502020204030204"/>
+                <a:latin typeface="Calibri"/>
               </a:rPr>
               <a:t>Introduction</a:t>
             </a:r>
-            <a:endParaRPr sz="2200" b="0">
-              <a:solidFill>
-                <a:srgbClr val="000000"/>
-              </a:solidFill>
-              <a:latin typeface="Calibri" panose="020F0502020204030204"/>
-            </a:endParaRPr>
           </a:p>
         </p:txBody>
       </p:sp>
@@ -9322,16 +9678,10 @@
                 <a:solidFill>
                   <a:srgbClr val="0070C0"/>
                 </a:solidFill>
-                <a:latin typeface="Calibri" panose="020F0502020204030204"/>
+                <a:latin typeface="Calibri"/>
               </a:rPr>
               <a:t>02</a:t>
             </a:r>
-            <a:endParaRPr sz="2000" b="1">
-              <a:solidFill>
-                <a:srgbClr val="0070C0"/>
-              </a:solidFill>
-              <a:latin typeface="Calibri" panose="020F0502020204030204"/>
-            </a:endParaRPr>
           </a:p>
         </p:txBody>
       </p:sp>
@@ -9367,16 +9717,10 @@
                 <a:solidFill>
                   <a:srgbClr val="000000"/>
                 </a:solidFill>
-                <a:latin typeface="Calibri" panose="020F0502020204030204"/>
+                <a:latin typeface="Calibri"/>
               </a:rPr>
               <a:t>Problem Statement &amp; Objectives</a:t>
             </a:r>
-            <a:endParaRPr sz="2200" b="0">
-              <a:solidFill>
-                <a:srgbClr val="000000"/>
-              </a:solidFill>
-              <a:latin typeface="Calibri" panose="020F0502020204030204"/>
-            </a:endParaRPr>
           </a:p>
         </p:txBody>
       </p:sp>
@@ -9447,16 +9791,10 @@
                 <a:solidFill>
                   <a:srgbClr val="0070C0"/>
                 </a:solidFill>
-                <a:latin typeface="Calibri" panose="020F0502020204030204"/>
+                <a:latin typeface="Calibri"/>
               </a:rPr>
               <a:t>03</a:t>
             </a:r>
-            <a:endParaRPr sz="2000" b="1">
-              <a:solidFill>
-                <a:srgbClr val="0070C0"/>
-              </a:solidFill>
-              <a:latin typeface="Calibri" panose="020F0502020204030204"/>
-            </a:endParaRPr>
           </a:p>
         </p:txBody>
       </p:sp>
@@ -9492,16 +9830,10 @@
                 <a:solidFill>
                   <a:srgbClr val="000000"/>
                 </a:solidFill>
-                <a:latin typeface="Calibri" panose="020F0502020204030204"/>
+                <a:latin typeface="Calibri"/>
               </a:rPr>
               <a:t>Requirements &amp; Acceptance Criteria</a:t>
             </a:r>
-            <a:endParaRPr sz="2200" b="0">
-              <a:solidFill>
-                <a:srgbClr val="000000"/>
-              </a:solidFill>
-              <a:latin typeface="Calibri" panose="020F0502020204030204"/>
-            </a:endParaRPr>
           </a:p>
         </p:txBody>
       </p:sp>
@@ -9572,16 +9904,10 @@
                 <a:solidFill>
                   <a:srgbClr val="0070C0"/>
                 </a:solidFill>
-                <a:latin typeface="Calibri" panose="020F0502020204030204"/>
+                <a:latin typeface="Calibri"/>
               </a:rPr>
               <a:t>04</a:t>
             </a:r>
-            <a:endParaRPr sz="2000" b="1">
-              <a:solidFill>
-                <a:srgbClr val="0070C0"/>
-              </a:solidFill>
-              <a:latin typeface="Calibri" panose="020F0502020204030204"/>
-            </a:endParaRPr>
           </a:p>
         </p:txBody>
       </p:sp>
@@ -9617,16 +9943,10 @@
                 <a:solidFill>
                   <a:srgbClr val="000000"/>
                 </a:solidFill>
-                <a:latin typeface="Calibri" panose="020F0502020204030204"/>
+                <a:latin typeface="Calibri"/>
               </a:rPr>
               <a:t>Alternative Solutions &amp; Trade-off Analysis</a:t>
             </a:r>
-            <a:endParaRPr sz="2200" b="0">
-              <a:solidFill>
-                <a:srgbClr val="000000"/>
-              </a:solidFill>
-              <a:latin typeface="Calibri" panose="020F0502020204030204"/>
-            </a:endParaRPr>
           </a:p>
         </p:txBody>
       </p:sp>
@@ -9697,16 +10017,10 @@
                 <a:solidFill>
                   <a:srgbClr val="0070C0"/>
                 </a:solidFill>
-                <a:latin typeface="Calibri" panose="020F0502020204030204"/>
+                <a:latin typeface="Calibri"/>
               </a:rPr>
               <a:t>05</a:t>
             </a:r>
-            <a:endParaRPr sz="2000" b="1">
-              <a:solidFill>
-                <a:srgbClr val="0070C0"/>
-              </a:solidFill>
-              <a:latin typeface="Calibri" panose="020F0502020204030204"/>
-            </a:endParaRPr>
           </a:p>
         </p:txBody>
       </p:sp>
@@ -9742,16 +10056,10 @@
                 <a:solidFill>
                   <a:srgbClr val="000000"/>
                 </a:solidFill>
-                <a:latin typeface="Calibri" panose="020F0502020204030204"/>
+                <a:latin typeface="Calibri"/>
               </a:rPr>
               <a:t>Complete System Architecture</a:t>
             </a:r>
-            <a:endParaRPr sz="2200" b="0">
-              <a:solidFill>
-                <a:srgbClr val="000000"/>
-              </a:solidFill>
-              <a:latin typeface="Calibri" panose="020F0502020204030204"/>
-            </a:endParaRPr>
           </a:p>
         </p:txBody>
       </p:sp>
@@ -9822,16 +10130,10 @@
                 <a:solidFill>
                   <a:srgbClr val="0070C0"/>
                 </a:solidFill>
-                <a:latin typeface="Calibri" panose="020F0502020204030204"/>
+                <a:latin typeface="Calibri"/>
               </a:rPr>
               <a:t>06</a:t>
             </a:r>
-            <a:endParaRPr sz="2000" b="1">
-              <a:solidFill>
-                <a:srgbClr val="0070C0"/>
-              </a:solidFill>
-              <a:latin typeface="Calibri" panose="020F0502020204030204"/>
-            </a:endParaRPr>
           </a:p>
         </p:txBody>
       </p:sp>
@@ -9867,16 +10169,10 @@
                 <a:solidFill>
                   <a:srgbClr val="000000"/>
                 </a:solidFill>
-                <a:latin typeface="Calibri" panose="020F0502020204030204"/>
+                <a:latin typeface="Calibri"/>
               </a:rPr>
               <a:t>Detailed Design &amp; Data Flow</a:t>
             </a:r>
-            <a:endParaRPr sz="2200" b="0">
-              <a:solidFill>
-                <a:srgbClr val="000000"/>
-              </a:solidFill>
-              <a:latin typeface="Calibri" panose="020F0502020204030204"/>
-            </a:endParaRPr>
           </a:p>
         </p:txBody>
       </p:sp>
@@ -9947,16 +10243,10 @@
                 <a:solidFill>
                   <a:srgbClr val="0070C0"/>
                 </a:solidFill>
-                <a:latin typeface="Calibri" panose="020F0502020204030204"/>
+                <a:latin typeface="Calibri"/>
               </a:rPr>
               <a:t>07</a:t>
             </a:r>
-            <a:endParaRPr sz="2000" b="1">
-              <a:solidFill>
-                <a:srgbClr val="0070C0"/>
-              </a:solidFill>
-              <a:latin typeface="Calibri" panose="020F0502020204030204"/>
-            </a:endParaRPr>
           </a:p>
         </p:txBody>
       </p:sp>
@@ -9992,16 +10282,10 @@
                 <a:solidFill>
                   <a:srgbClr val="000000"/>
                 </a:solidFill>
-                <a:latin typeface="Calibri" panose="020F0502020204030204"/>
+                <a:latin typeface="Calibri"/>
               </a:rPr>
               <a:t>Implementation &amp; Unit-Level Progress</a:t>
             </a:r>
-            <a:endParaRPr sz="2200" b="0">
-              <a:solidFill>
-                <a:srgbClr val="000000"/>
-              </a:solidFill>
-              <a:latin typeface="Calibri" panose="020F0502020204030204"/>
-            </a:endParaRPr>
           </a:p>
         </p:txBody>
       </p:sp>
@@ -10072,16 +10356,10 @@
                 <a:solidFill>
                   <a:srgbClr val="0070C0"/>
                 </a:solidFill>
-                <a:latin typeface="Calibri" panose="020F0502020204030204"/>
+                <a:latin typeface="Calibri"/>
               </a:rPr>
               <a:t>08</a:t>
             </a:r>
-            <a:endParaRPr sz="2000" b="1">
-              <a:solidFill>
-                <a:srgbClr val="0070C0"/>
-              </a:solidFill>
-              <a:latin typeface="Calibri" panose="020F0502020204030204"/>
-            </a:endParaRPr>
           </a:p>
         </p:txBody>
       </p:sp>
@@ -10117,16 +10395,10 @@
                 <a:solidFill>
                   <a:srgbClr val="000000"/>
                 </a:solidFill>
-                <a:latin typeface="Calibri" panose="020F0502020204030204"/>
+                <a:latin typeface="Calibri"/>
               </a:rPr>
               <a:t>Testing &amp; Results</a:t>
             </a:r>
-            <a:endParaRPr sz="2200" b="0">
-              <a:solidFill>
-                <a:srgbClr val="000000"/>
-              </a:solidFill>
-              <a:latin typeface="Calibri" panose="020F0502020204030204"/>
-            </a:endParaRPr>
           </a:p>
         </p:txBody>
       </p:sp>
@@ -10197,16 +10469,10 @@
                 <a:solidFill>
                   <a:srgbClr val="0070C0"/>
                 </a:solidFill>
-                <a:latin typeface="Calibri" panose="020F0502020204030204"/>
+                <a:latin typeface="Calibri"/>
               </a:rPr>
               <a:t>09</a:t>
             </a:r>
-            <a:endParaRPr sz="2000" b="1">
-              <a:solidFill>
-                <a:srgbClr val="0070C0"/>
-              </a:solidFill>
-              <a:latin typeface="Calibri" panose="020F0502020204030204"/>
-            </a:endParaRPr>
           </a:p>
         </p:txBody>
       </p:sp>
@@ -10242,16 +10508,10 @@
                 <a:solidFill>
                   <a:srgbClr val="000000"/>
                 </a:solidFill>
-                <a:latin typeface="Calibri" panose="020F0502020204030204"/>
+                <a:latin typeface="Calibri"/>
               </a:rPr>
               <a:t>Conclusion &amp; Future Scope</a:t>
             </a:r>
-            <a:endParaRPr sz="2200" b="0">
-              <a:solidFill>
-                <a:srgbClr val="000000"/>
-              </a:solidFill>
-              <a:latin typeface="Calibri" panose="020F0502020204030204"/>
-            </a:endParaRPr>
           </a:p>
         </p:txBody>
       </p:sp>
@@ -10291,6 +10551,11 @@
         </p:style>
       </p:cxnSp>
     </p:spTree>
+    <p:extLst>
+      <p:ext uri="{BB962C8B-B14F-4D97-AF65-F5344CB8AC3E}">
+        <p14:creationId xmlns:p14="http://schemas.microsoft.com/office/powerpoint/2010/main" xmlns="" val="326239331"/>
+      </p:ext>
+    </p:extLst>
   </p:cSld>
   <p:clrMapOvr>
     <a:masterClrMapping/>
@@ -10317,7 +10582,13 @@
       </p:grpSpPr>
       <p:sp>
         <p:nvSpPr>
-          <p:cNvPr id="8" name="Title 7"/>
+          <p:cNvPr id="8" name="Title 7">
+            <a:extLst>
+              <a:ext uri="{FF2B5EF4-FFF2-40B4-BE49-F238E27FC236}">
+                <a16:creationId xmlns:a16="http://schemas.microsoft.com/office/drawing/2014/main" xmlns="" id="{D45DB3B1-7702-A34D-B15A-E964B95D6FB5}"/>
+              </a:ext>
+            </a:extLst>
+          </p:cNvPr>
           <p:cNvSpPr>
             <a:spLocks noGrp="1"/>
           </p:cNvSpPr>
@@ -10337,26 +10608,26 @@
           <a:p>
             <a:pPr algn="ctr"/>
             <a:r>
-              <a:rPr lang="en-US" sz="3000" b="1" dirty="0">
+              <a:rPr lang="en-US" b="1" dirty="0" sz="3000">
                 <a:solidFill>
                   <a:srgbClr val="000000"/>
                 </a:solidFill>
-                <a:latin typeface="Calibri" panose="020F0502020204030204"/>
+                <a:latin typeface="Calibri"/>
               </a:rPr>
               <a:t>INTRODUCTION</a:t>
             </a:r>
-            <a:endParaRPr lang="en-US" sz="3000" b="1" dirty="0">
-              <a:solidFill>
-                <a:srgbClr val="000000"/>
-              </a:solidFill>
-              <a:latin typeface="Calibri" panose="020F0502020204030204"/>
-            </a:endParaRPr>
-          </a:p>
-        </p:txBody>
-      </p:sp>
-      <p:sp>
-        <p:nvSpPr>
-          <p:cNvPr id="5" name="Date Placeholder 4"/>
+          </a:p>
+        </p:txBody>
+      </p:sp>
+      <p:sp>
+        <p:nvSpPr>
+          <p:cNvPr id="5" name="Date Placeholder 4">
+            <a:extLst>
+              <a:ext uri="{FF2B5EF4-FFF2-40B4-BE49-F238E27FC236}">
+                <a16:creationId xmlns:a16="http://schemas.microsoft.com/office/drawing/2014/main" xmlns="" id="{BD5C2420-26C9-65B4-41BA-D5CA69721C05}"/>
+              </a:ext>
+            </a:extLst>
+          </p:cNvPr>
           <p:cNvSpPr>
             <a:spLocks noGrp="1"/>
           </p:cNvSpPr>
@@ -10374,7 +10645,7 @@
                 <a:solidFill>
                   <a:srgbClr val="808080"/>
                 </a:solidFill>
-                <a:latin typeface="Calibri" panose="020F0502020204030204"/>
+                <a:latin typeface="Calibri"/>
               </a:rPr>
               <a:t>23-09-2026</a:t>
             </a:r>
@@ -10384,7 +10655,13 @@
       </p:sp>
       <p:sp>
         <p:nvSpPr>
-          <p:cNvPr id="6" name="Footer Placeholder 5"/>
+          <p:cNvPr id="6" name="Footer Placeholder 5">
+            <a:extLst>
+              <a:ext uri="{FF2B5EF4-FFF2-40B4-BE49-F238E27FC236}">
+                <a16:creationId xmlns:a16="http://schemas.microsoft.com/office/drawing/2014/main" xmlns="" id="{AE9B4454-96E6-70D8-1440-2142487397DF}"/>
+              </a:ext>
+            </a:extLst>
+          </p:cNvPr>
           <p:cNvSpPr>
             <a:spLocks noGrp="1"/>
           </p:cNvSpPr>
@@ -10402,7 +10679,7 @@
                 <a:solidFill>
                   <a:srgbClr val="808080"/>
                 </a:solidFill>
-                <a:latin typeface="Calibri" panose="020F0502020204030204"/>
+                <a:latin typeface="Calibri"/>
               </a:rPr>
               <a:t>Review-II                                                        Department of CSE-2</a:t>
             </a:r>
@@ -10412,7 +10689,13 @@
       </p:sp>
       <p:sp>
         <p:nvSpPr>
-          <p:cNvPr id="7" name="Slide Number Placeholder 6"/>
+          <p:cNvPr id="7" name="Slide Number Placeholder 6">
+            <a:extLst>
+              <a:ext uri="{FF2B5EF4-FFF2-40B4-BE49-F238E27FC236}">
+                <a16:creationId xmlns:a16="http://schemas.microsoft.com/office/drawing/2014/main" xmlns="" id="{5F827BAA-7E22-F268-D9DC-5E17D9155237}"/>
+              </a:ext>
+            </a:extLst>
+          </p:cNvPr>
           <p:cNvSpPr>
             <a:spLocks noGrp="1"/>
           </p:cNvSpPr>
@@ -10430,7 +10713,7 @@
                 <a:solidFill>
                   <a:srgbClr val="808080"/>
                 </a:solidFill>
-                <a:latin typeface="Calibri" panose="020F0502020204030204"/>
+                <a:latin typeface="Calibri"/>
               </a:rPr>
               <a:t>3</a:t>
             </a:r>
@@ -10558,16 +10841,10 @@
                 <a:solidFill>
                   <a:srgbClr val="0070C0"/>
                 </a:solidFill>
-                <a:latin typeface="Calibri" panose="020F0502020204030204"/>
+                <a:latin typeface="Calibri"/>
               </a:rPr>
               <a:t>WHY NESTED TUNING?</a:t>
             </a:r>
-            <a:endParaRPr sz="2200" b="1">
-              <a:solidFill>
-                <a:srgbClr val="0070C0"/>
-              </a:solidFill>
-              <a:latin typeface="Calibri" panose="020F0502020204030204"/>
-            </a:endParaRPr>
           </a:p>
         </p:txBody>
       </p:sp>
@@ -10588,37 +10865,31 @@
           <a:noFill/>
         </p:spPr>
         <p:txBody>
-          <a:bodyPr wrap="square" lIns="73152" tIns="27432" rIns="27432" bIns="0">
+          <a:bodyPr wrap="square" lIns="73152" rIns="27432" tIns="27432" bIns="0">
             <a:spAutoFit/>
           </a:bodyPr>
           <a:lstStyle/>
           <a:p>
             <a:pPr>
+              <a:buChar char="•"/>
               <a:lnSpc>
                 <a:spcPct val="100000"/>
               </a:lnSpc>
               <a:spcAft>
                 <a:spcPts val="500"/>
               </a:spcAft>
-              <a:buChar char="•"/>
             </a:pPr>
             <a:r>
               <a:rPr sz="1700" b="0">
                 <a:solidFill>
                   <a:srgbClr val="000000"/>
                 </a:solidFill>
-                <a:latin typeface="Calibri" panose="020F0502020204030204"/>
+                <a:latin typeface="Calibri"/>
               </a:rPr>
               <a:t>Outer trial owns parent PG
 Inner training requests child PG
 Parent can hold resources child needs</a:t>
             </a:r>
-            <a:endParaRPr sz="1700" b="0">
-              <a:solidFill>
-                <a:srgbClr val="000000"/>
-              </a:solidFill>
-              <a:latin typeface="Calibri" panose="020F0502020204030204"/>
-            </a:endParaRPr>
           </a:p>
         </p:txBody>
       </p:sp>
@@ -10742,16 +11013,10 @@
                 <a:solidFill>
                   <a:srgbClr val="00B050"/>
                 </a:solidFill>
-                <a:latin typeface="Calibri" panose="020F0502020204030204"/>
+                <a:latin typeface="Calibri"/>
               </a:rPr>
               <a:t>PROJECT RESPONSE</a:t>
             </a:r>
-            <a:endParaRPr sz="2200" b="1">
-              <a:solidFill>
-                <a:srgbClr val="00B050"/>
-              </a:solidFill>
-              <a:latin typeface="Calibri" panose="020F0502020204030204"/>
-            </a:endParaRPr>
           </a:p>
         </p:txBody>
       </p:sp>
@@ -10772,38 +11037,32 @@
           <a:noFill/>
         </p:spPr>
         <p:txBody>
-          <a:bodyPr wrap="square" lIns="73152" tIns="27432" rIns="27432" bIns="0">
+          <a:bodyPr wrap="square" lIns="73152" rIns="27432" tIns="27432" bIns="0">
             <a:spAutoFit/>
           </a:bodyPr>
           <a:lstStyle/>
           <a:p>
             <a:pPr>
+              <a:buChar char="•"/>
               <a:lnSpc>
                 <a:spcPct val="100000"/>
               </a:lnSpc>
               <a:spcAft>
                 <a:spcPts val="500"/>
               </a:spcAft>
-              <a:buChar char="•"/>
             </a:pPr>
             <a:r>
               <a:rPr sz="1700" b="0">
                 <a:solidFill>
                   <a:srgbClr val="000000"/>
                 </a:solidFill>
-                <a:latin typeface="Calibri" panose="020F0502020204030204"/>
+                <a:latin typeface="Calibri"/>
               </a:rPr>
               <a:t>Model nested resource demand
 Compare FIFO, Greedy, Deadlock-aware
 Measure cycles and unresolved trials
 Reproduce on Ray 2.10.0</a:t>
             </a:r>
-            <a:endParaRPr sz="1700" b="0">
-              <a:solidFill>
-                <a:srgbClr val="000000"/>
-              </a:solidFill>
-              <a:latin typeface="Calibri" panose="020F0502020204030204"/>
-            </a:endParaRPr>
           </a:p>
         </p:txBody>
       </p:sp>
@@ -10839,16 +11098,10 @@
                 <a:solidFill>
                   <a:srgbClr val="000000"/>
                 </a:solidFill>
-                <a:latin typeface="Calibri" panose="020F0502020204030204"/>
+                <a:latin typeface="Calibri"/>
               </a:rPr>
               <a:t>THE RESULT IS MEASURABLE</a:t>
             </a:r>
-            <a:endParaRPr sz="2400" b="1">
-              <a:solidFill>
-                <a:srgbClr val="000000"/>
-              </a:solidFill>
-              <a:latin typeface="Calibri" panose="020F0502020204030204"/>
-            </a:endParaRPr>
           </a:p>
         </p:txBody>
       </p:sp>
@@ -10884,16 +11137,10 @@
                 <a:solidFill>
                   <a:srgbClr val="C00000"/>
                 </a:solidFill>
-                <a:latin typeface="Calibri" panose="020F0502020204030204"/>
+                <a:latin typeface="Calibri"/>
               </a:rPr>
               <a:t>4/4/1/3</a:t>
             </a:r>
-            <a:endParaRPr sz="2800" b="1">
-              <a:solidFill>
-                <a:srgbClr val="C00000"/>
-              </a:solidFill>
-              <a:latin typeface="Calibri" panose="020F0502020204030204"/>
-            </a:endParaRPr>
           </a:p>
         </p:txBody>
       </p:sp>
@@ -10929,16 +11176,10 @@
                 <a:solidFill>
                   <a:srgbClr val="000000"/>
                 </a:solidFill>
-                <a:latin typeface="Calibri" panose="020F0502020204030204"/>
+                <a:latin typeface="Calibri"/>
               </a:rPr>
               <a:t>real-Ray resource accounting</a:t>
             </a:r>
-            <a:endParaRPr sz="2000" b="0">
-              <a:solidFill>
-                <a:srgbClr val="000000"/>
-              </a:solidFill>
-              <a:latin typeface="Calibri" panose="020F0502020204030204"/>
-            </a:endParaRPr>
           </a:p>
         </p:txBody>
       </p:sp>
@@ -10974,16 +11215,10 @@
                 <a:solidFill>
                   <a:srgbClr val="ED7D31"/>
                 </a:solidFill>
-                <a:latin typeface="Calibri" panose="020F0502020204030204"/>
+                <a:latin typeface="Calibri"/>
               </a:rPr>
               <a:t>70</a:t>
             </a:r>
-            <a:endParaRPr sz="2800" b="1">
-              <a:solidFill>
-                <a:srgbClr val="ED7D31"/>
-              </a:solidFill>
-              <a:latin typeface="Calibri" panose="020F0502020204030204"/>
-            </a:endParaRPr>
           </a:p>
         </p:txBody>
       </p:sp>
@@ -11019,16 +11254,10 @@
                 <a:solidFill>
                   <a:srgbClr val="000000"/>
                 </a:solidFill>
-                <a:latin typeface="Calibri" panose="020F0502020204030204"/>
+                <a:latin typeface="Calibri"/>
               </a:rPr>
               <a:t>automated tests passed</a:t>
             </a:r>
-            <a:endParaRPr sz="2000" b="0">
-              <a:solidFill>
-                <a:srgbClr val="000000"/>
-              </a:solidFill>
-              <a:latin typeface="Calibri" panose="020F0502020204030204"/>
-            </a:endParaRPr>
           </a:p>
         </p:txBody>
       </p:sp>
@@ -11064,16 +11293,10 @@
                 <a:solidFill>
                   <a:srgbClr val="0070C0"/>
                 </a:solidFill>
-                <a:latin typeface="Calibri" panose="020F0502020204030204"/>
+                <a:latin typeface="Calibri"/>
               </a:rPr>
               <a:t>0</a:t>
             </a:r>
-            <a:endParaRPr sz="2800" b="1">
-              <a:solidFill>
-                <a:srgbClr val="0070C0"/>
-              </a:solidFill>
-              <a:latin typeface="Calibri" panose="020F0502020204030204"/>
-            </a:endParaRPr>
           </a:p>
         </p:txBody>
       </p:sp>
@@ -11109,20 +11332,19 @@
                 <a:solidFill>
                   <a:srgbClr val="000000"/>
                 </a:solidFill>
-                <a:latin typeface="Calibri" panose="020F0502020204030204"/>
+                <a:latin typeface="Calibri"/>
               </a:rPr>
               <a:t>unresolved CP-2 deadlocks</a:t>
             </a:r>
-            <a:endParaRPr sz="2000" b="0">
-              <a:solidFill>
-                <a:srgbClr val="000000"/>
-              </a:solidFill>
-              <a:latin typeface="Calibri" panose="020F0502020204030204"/>
-            </a:endParaRPr>
           </a:p>
         </p:txBody>
       </p:sp>
     </p:spTree>
+    <p:extLst>
+      <p:ext uri="{BB962C8B-B14F-4D97-AF65-F5344CB8AC3E}">
+        <p14:creationId xmlns:p14="http://schemas.microsoft.com/office/powerpoint/2010/main" xmlns="" val="2715783799"/>
+      </p:ext>
+    </p:extLst>
   </p:cSld>
   <p:clrMapOvr>
     <a:masterClrMapping/>
@@ -11149,7 +11371,13 @@
       </p:grpSpPr>
       <p:sp>
         <p:nvSpPr>
-          <p:cNvPr id="8" name="Title 7"/>
+          <p:cNvPr id="8" name="Title 7">
+            <a:extLst>
+              <a:ext uri="{FF2B5EF4-FFF2-40B4-BE49-F238E27FC236}">
+                <a16:creationId xmlns:a16="http://schemas.microsoft.com/office/drawing/2014/main" xmlns="" id="{D45DB3B1-7702-A34D-B15A-E964B95D6FB5}"/>
+              </a:ext>
+            </a:extLst>
+          </p:cNvPr>
           <p:cNvSpPr>
             <a:spLocks noGrp="1"/>
           </p:cNvSpPr>
@@ -11169,11 +11397,11 @@
           <a:p>
             <a:pPr algn="ctr"/>
             <a:r>
-              <a:rPr lang="en-US" sz="3000" b="1" dirty="0" smtClean="0">
+              <a:rPr lang="en-US" b="1" dirty="0" smtClean="0" sz="3000">
                 <a:solidFill>
                   <a:srgbClr val="000000"/>
                 </a:solidFill>
-                <a:latin typeface="Calibri" panose="020F0502020204030204"/>
+                <a:latin typeface="Calibri"/>
               </a:rPr>
               <a:t>PROBLEM STATEMENT &amp; OBJECTIVES</a:t>
             </a:r>
@@ -11183,7 +11411,13 @@
       </p:sp>
       <p:sp>
         <p:nvSpPr>
-          <p:cNvPr id="5" name="Date Placeholder 4"/>
+          <p:cNvPr id="5" name="Date Placeholder 4">
+            <a:extLst>
+              <a:ext uri="{FF2B5EF4-FFF2-40B4-BE49-F238E27FC236}">
+                <a16:creationId xmlns:a16="http://schemas.microsoft.com/office/drawing/2014/main" xmlns="" id="{BD5C2420-26C9-65B4-41BA-D5CA69721C05}"/>
+              </a:ext>
+            </a:extLst>
+          </p:cNvPr>
           <p:cNvSpPr>
             <a:spLocks noGrp="1"/>
           </p:cNvSpPr>
@@ -11201,7 +11435,7 @@
                 <a:solidFill>
                   <a:srgbClr val="808080"/>
                 </a:solidFill>
-                <a:latin typeface="Calibri" panose="020F0502020204030204"/>
+                <a:latin typeface="Calibri"/>
               </a:rPr>
               <a:t>23-09-2026</a:t>
             </a:r>
@@ -11211,7 +11445,13 @@
       </p:sp>
       <p:sp>
         <p:nvSpPr>
-          <p:cNvPr id="6" name="Footer Placeholder 5"/>
+          <p:cNvPr id="6" name="Footer Placeholder 5">
+            <a:extLst>
+              <a:ext uri="{FF2B5EF4-FFF2-40B4-BE49-F238E27FC236}">
+                <a16:creationId xmlns:a16="http://schemas.microsoft.com/office/drawing/2014/main" xmlns="" id="{AE9B4454-96E6-70D8-1440-2142487397DF}"/>
+              </a:ext>
+            </a:extLst>
+          </p:cNvPr>
           <p:cNvSpPr>
             <a:spLocks noGrp="1"/>
           </p:cNvSpPr>
@@ -11234,7 +11474,7 @@
                 <a:solidFill>
                   <a:srgbClr val="808080"/>
                 </a:solidFill>
-                <a:latin typeface="Calibri" panose="020F0502020204030204"/>
+                <a:latin typeface="Calibri"/>
               </a:rPr>
               <a:t>Review-II                                                        Department of CSE-2</a:t>
             </a:r>
@@ -11244,7 +11484,13 @@
       </p:sp>
       <p:sp>
         <p:nvSpPr>
-          <p:cNvPr id="7" name="Slide Number Placeholder 6"/>
+          <p:cNvPr id="7" name="Slide Number Placeholder 6">
+            <a:extLst>
+              <a:ext uri="{FF2B5EF4-FFF2-40B4-BE49-F238E27FC236}">
+                <a16:creationId xmlns:a16="http://schemas.microsoft.com/office/drawing/2014/main" xmlns="" id="{5F827BAA-7E22-F268-D9DC-5E17D9155237}"/>
+              </a:ext>
+            </a:extLst>
+          </p:cNvPr>
           <p:cNvSpPr>
             <a:spLocks noGrp="1"/>
           </p:cNvSpPr>
@@ -11262,7 +11508,7 @@
                 <a:solidFill>
                   <a:srgbClr val="808080"/>
                 </a:solidFill>
-                <a:latin typeface="Calibri" panose="020F0502020204030204"/>
+                <a:latin typeface="Calibri"/>
               </a:rPr>
               <a:t>4</a:t>
             </a:r>
@@ -11390,16 +11636,10 @@
                 <a:solidFill>
                   <a:srgbClr val="C00000"/>
                 </a:solidFill>
-                <a:latin typeface="Calibri" panose="020F0502020204030204"/>
+                <a:latin typeface="Calibri"/>
               </a:rPr>
               <a:t>PROBLEM STATEMENT</a:t>
             </a:r>
-            <a:endParaRPr sz="2200" b="1">
-              <a:solidFill>
-                <a:srgbClr val="C00000"/>
-              </a:solidFill>
-              <a:latin typeface="Calibri" panose="020F0502020204030204"/>
-            </a:endParaRPr>
           </a:p>
         </p:txBody>
       </p:sp>
@@ -11420,38 +11660,32 @@
           <a:noFill/>
         </p:spPr>
         <p:txBody>
-          <a:bodyPr wrap="square" lIns="73152" tIns="27432" rIns="27432" bIns="0">
+          <a:bodyPr wrap="square" lIns="73152" rIns="27432" tIns="27432" bIns="0">
             <a:spAutoFit/>
           </a:bodyPr>
           <a:lstStyle/>
           <a:p>
             <a:pPr>
+              <a:buChar char="•"/>
               <a:lnSpc>
                 <a:spcPct val="100000"/>
               </a:lnSpc>
               <a:spcAft>
                 <a:spcPts val="500"/>
               </a:spcAft>
-              <a:buChar char="•"/>
             </a:pPr>
             <a:r>
               <a:rPr sz="2000" b="0">
                 <a:solidFill>
                   <a:srgbClr val="000000"/>
                 </a:solidFill>
-                <a:latin typeface="Calibri" panose="020F0502020204030204"/>
+                <a:latin typeface="Calibri"/>
               </a:rPr>
               <a:t>Parent placement group can reserve the whole cluster
 Nested child cannot be admitted although aggregate capacity looks sufficient
 FIFO and Greedy are hierarchy-blind
 Unbounded hangs are hard to compare or test</a:t>
             </a:r>
-            <a:endParaRPr sz="2000" b="0">
-              <a:solidFill>
-                <a:srgbClr val="000000"/>
-              </a:solidFill>
-              <a:latin typeface="Calibri" panose="020F0502020204030204"/>
-            </a:endParaRPr>
           </a:p>
         </p:txBody>
       </p:sp>
@@ -11487,16 +11721,10 @@
                 <a:solidFill>
                   <a:srgbClr val="000000"/>
                 </a:solidFill>
-                <a:latin typeface="Calibri" panose="020F0502020204030204"/>
+                <a:latin typeface="Calibri"/>
               </a:rPr>
               <a:t>Four measurable objectives</a:t>
             </a:r>
-            <a:endParaRPr sz="2400" b="1">
-              <a:solidFill>
-                <a:srgbClr val="000000"/>
-              </a:solidFill>
-              <a:latin typeface="Calibri" panose="020F0502020204030204"/>
-            </a:endParaRPr>
           </a:p>
         </p:txBody>
       </p:sp>
@@ -11532,16 +11760,10 @@
                 <a:solidFill>
                   <a:srgbClr val="0070C0"/>
                 </a:solidFill>
-                <a:latin typeface="Calibri" panose="020F0502020204030204"/>
+                <a:latin typeface="Calibri"/>
               </a:rPr>
               <a:t>01</a:t>
             </a:r>
-            <a:endParaRPr sz="2000" b="1">
-              <a:solidFill>
-                <a:srgbClr val="0070C0"/>
-              </a:solidFill>
-              <a:latin typeface="Calibri" panose="020F0502020204030204"/>
-            </a:endParaRPr>
           </a:p>
         </p:txBody>
       </p:sp>
@@ -11577,16 +11799,10 @@
                 <a:solidFill>
                   <a:srgbClr val="000000"/>
                 </a:solidFill>
-                <a:latin typeface="Calibri" panose="020F0502020204030204"/>
+                <a:latin typeface="Calibri"/>
               </a:rPr>
               <a:t>Model hierarchy</a:t>
             </a:r>
-            <a:endParaRPr sz="2000" b="1">
-              <a:solidFill>
-                <a:srgbClr val="000000"/>
-              </a:solidFill>
-              <a:latin typeface="Calibri" panose="020F0502020204030204"/>
-            </a:endParaRPr>
           </a:p>
         </p:txBody>
       </p:sp>
@@ -11622,16 +11838,10 @@
                 <a:solidFill>
                   <a:srgbClr val="666666"/>
                 </a:solidFill>
-                <a:latin typeface="Calibri" panose="020F0502020204030204"/>
+                <a:latin typeface="Calibri"/>
               </a:rPr>
               <a:t>Parent + child placement</a:t>
             </a:r>
-            <a:endParaRPr sz="1700" b="0">
-              <a:solidFill>
-                <a:srgbClr val="666666"/>
-              </a:solidFill>
-              <a:latin typeface="Calibri" panose="020F0502020204030204"/>
-            </a:endParaRPr>
           </a:p>
         </p:txBody>
       </p:sp>
@@ -11667,16 +11877,10 @@
                 <a:solidFill>
                   <a:srgbClr val="0070C0"/>
                 </a:solidFill>
-                <a:latin typeface="Calibri" panose="020F0502020204030204"/>
+                <a:latin typeface="Calibri"/>
               </a:rPr>
               <a:t>02</a:t>
             </a:r>
-            <a:endParaRPr sz="2000" b="1">
-              <a:solidFill>
-                <a:srgbClr val="0070C0"/>
-              </a:solidFill>
-              <a:latin typeface="Calibri" panose="020F0502020204030204"/>
-            </a:endParaRPr>
           </a:p>
         </p:txBody>
       </p:sp>
@@ -11712,16 +11916,10 @@
                 <a:solidFill>
                   <a:srgbClr val="000000"/>
                 </a:solidFill>
-                <a:latin typeface="Calibri" panose="020F0502020204030204"/>
+                <a:latin typeface="Calibri"/>
               </a:rPr>
               <a:t>Compare policies</a:t>
             </a:r>
-            <a:endParaRPr sz="2000" b="1">
-              <a:solidFill>
-                <a:srgbClr val="000000"/>
-              </a:solidFill>
-              <a:latin typeface="Calibri" panose="020F0502020204030204"/>
-            </a:endParaRPr>
           </a:p>
         </p:txBody>
       </p:sp>
@@ -11757,16 +11955,10 @@
                 <a:solidFill>
                   <a:srgbClr val="666666"/>
                 </a:solidFill>
-                <a:latin typeface="Calibri" panose="020F0502020204030204"/>
+                <a:latin typeface="Calibri"/>
               </a:rPr>
               <a:t>FIFO vs Greedy</a:t>
             </a:r>
-            <a:endParaRPr sz="1700" b="0">
-              <a:solidFill>
-                <a:srgbClr val="666666"/>
-              </a:solidFill>
-              <a:latin typeface="Calibri" panose="020F0502020204030204"/>
-            </a:endParaRPr>
           </a:p>
         </p:txBody>
       </p:sp>
@@ -11802,16 +11994,10 @@
                 <a:solidFill>
                   <a:srgbClr val="0070C0"/>
                 </a:solidFill>
-                <a:latin typeface="Calibri" panose="020F0502020204030204"/>
+                <a:latin typeface="Calibri"/>
               </a:rPr>
               <a:t>03</a:t>
             </a:r>
-            <a:endParaRPr sz="2000" b="1">
-              <a:solidFill>
-                <a:srgbClr val="0070C0"/>
-              </a:solidFill>
-              <a:latin typeface="Calibri" panose="020F0502020204030204"/>
-            </a:endParaRPr>
           </a:p>
         </p:txBody>
       </p:sp>
@@ -11847,16 +12033,10 @@
                 <a:solidFill>
                   <a:srgbClr val="000000"/>
                 </a:solidFill>
-                <a:latin typeface="Calibri" panose="020F0502020204030204"/>
+                <a:latin typeface="Calibri"/>
               </a:rPr>
               <a:t>Prevent deadlocks</a:t>
             </a:r>
-            <a:endParaRPr sz="2000" b="1">
-              <a:solidFill>
-                <a:srgbClr val="000000"/>
-              </a:solidFill>
-              <a:latin typeface="Calibri" panose="020F0502020204030204"/>
-            </a:endParaRPr>
           </a:p>
         </p:txBody>
       </p:sp>
@@ -11892,16 +12072,10 @@
                 <a:solidFill>
                   <a:srgbClr val="666666"/>
                 </a:solidFill>
-                <a:latin typeface="Calibri" panose="020F0502020204030204"/>
+                <a:latin typeface="Calibri"/>
               </a:rPr>
               <a:t>Reject / defer unsafe fit</a:t>
             </a:r>
-            <a:endParaRPr sz="1700" b="0">
-              <a:solidFill>
-                <a:srgbClr val="666666"/>
-              </a:solidFill>
-              <a:latin typeface="Calibri" panose="020F0502020204030204"/>
-            </a:endParaRPr>
           </a:p>
         </p:txBody>
       </p:sp>
@@ -11937,16 +12111,10 @@
                 <a:solidFill>
                   <a:srgbClr val="0070C0"/>
                 </a:solidFill>
-                <a:latin typeface="Calibri" panose="020F0502020204030204"/>
+                <a:latin typeface="Calibri"/>
               </a:rPr>
               <a:t>04</a:t>
             </a:r>
-            <a:endParaRPr sz="2000" b="1">
-              <a:solidFill>
-                <a:srgbClr val="0070C0"/>
-              </a:solidFill>
-              <a:latin typeface="Calibri" panose="020F0502020204030204"/>
-            </a:endParaRPr>
           </a:p>
         </p:txBody>
       </p:sp>
@@ -11982,16 +12150,10 @@
                 <a:solidFill>
                   <a:srgbClr val="000000"/>
                 </a:solidFill>
-                <a:latin typeface="Calibri" panose="020F0502020204030204"/>
+                <a:latin typeface="Calibri"/>
               </a:rPr>
               <a:t>Produce evidence</a:t>
             </a:r>
-            <a:endParaRPr sz="2000" b="1">
-              <a:solidFill>
-                <a:srgbClr val="000000"/>
-              </a:solidFill>
-              <a:latin typeface="Calibri" panose="020F0502020204030204"/>
-            </a:endParaRPr>
           </a:p>
         </p:txBody>
       </p:sp>
@@ -12027,20 +12189,19 @@
                 <a:solidFill>
                   <a:srgbClr val="666666"/>
                 </a:solidFill>
-                <a:latin typeface="Calibri" panose="020F0502020204030204"/>
+                <a:latin typeface="Calibri"/>
               </a:rPr>
               <a:t>30s bound + metrics + trace</a:t>
             </a:r>
-            <a:endParaRPr sz="1700" b="0">
-              <a:solidFill>
-                <a:srgbClr val="666666"/>
-              </a:solidFill>
-              <a:latin typeface="Calibri" panose="020F0502020204030204"/>
-            </a:endParaRPr>
           </a:p>
         </p:txBody>
       </p:sp>
     </p:spTree>
+    <p:extLst>
+      <p:ext uri="{BB962C8B-B14F-4D97-AF65-F5344CB8AC3E}">
+        <p14:creationId xmlns:p14="http://schemas.microsoft.com/office/powerpoint/2010/main" xmlns="" val="1023711160"/>
+      </p:ext>
+    </p:extLst>
   </p:cSld>
   <p:clrMapOvr>
     <a:masterClrMapping/>
@@ -12067,7 +12228,13 @@
       </p:grpSpPr>
       <p:sp>
         <p:nvSpPr>
-          <p:cNvPr id="8" name="Title 7"/>
+          <p:cNvPr id="8" name="Title 7">
+            <a:extLst>
+              <a:ext uri="{FF2B5EF4-FFF2-40B4-BE49-F238E27FC236}">
+                <a16:creationId xmlns:a16="http://schemas.microsoft.com/office/drawing/2014/main" xmlns="" id="{D45DB3B1-7702-A34D-B15A-E964B95D6FB5}"/>
+              </a:ext>
+            </a:extLst>
+          </p:cNvPr>
           <p:cNvSpPr>
             <a:spLocks noGrp="1"/>
           </p:cNvSpPr>
@@ -12089,13 +12256,22 @@
           <a:p>
             <a:pPr algn="ctr"/>
             <a:r>
-              <a:rPr lang="en-US" sz="3000" b="1" dirty="0" smtClean="0">
+              <a:rPr lang="en-US" b="1" dirty="0" smtClean="0" sz="3000">
                 <a:solidFill>
                   <a:srgbClr val="000000"/>
                 </a:solidFill>
-                <a:latin typeface="Calibri" panose="020F0502020204030204"/>
+                <a:latin typeface="Calibri"/>
               </a:rPr>
               <a:t>FUNCTIONAL &amp; NON-FUNCTIONAL REQUIREMENTS</a:t>
+            </a:r>
+            <a:r>
+              <a:rPr lang="en-IN" b="1" dirty="0" smtClean="0" sz="3000">
+                <a:solidFill>
+                  <a:srgbClr val="000000"/>
+                </a:solidFill>
+                <a:latin typeface="Calibri"/>
+              </a:rPr>
+              <a:t/>
             </a:r>
             <a:br>
               <a:rPr lang="en-IN" b="1" dirty="0" smtClean="0"/>
@@ -12106,7 +12282,13 @@
       </p:sp>
       <p:sp>
         <p:nvSpPr>
-          <p:cNvPr id="5" name="Date Placeholder 4"/>
+          <p:cNvPr id="5" name="Date Placeholder 4">
+            <a:extLst>
+              <a:ext uri="{FF2B5EF4-FFF2-40B4-BE49-F238E27FC236}">
+                <a16:creationId xmlns:a16="http://schemas.microsoft.com/office/drawing/2014/main" xmlns="" id="{BD5C2420-26C9-65B4-41BA-D5CA69721C05}"/>
+              </a:ext>
+            </a:extLst>
+          </p:cNvPr>
           <p:cNvSpPr>
             <a:spLocks noGrp="1"/>
           </p:cNvSpPr>
@@ -12124,7 +12306,7 @@
                 <a:solidFill>
                   <a:srgbClr val="808080"/>
                 </a:solidFill>
-                <a:latin typeface="Calibri" panose="020F0502020204030204"/>
+                <a:latin typeface="Calibri"/>
               </a:rPr>
               <a:t>23-09-2026</a:t>
             </a:r>
@@ -12134,7 +12316,13 @@
       </p:sp>
       <p:sp>
         <p:nvSpPr>
-          <p:cNvPr id="6" name="Footer Placeholder 5"/>
+          <p:cNvPr id="6" name="Footer Placeholder 5">
+            <a:extLst>
+              <a:ext uri="{FF2B5EF4-FFF2-40B4-BE49-F238E27FC236}">
+                <a16:creationId xmlns:a16="http://schemas.microsoft.com/office/drawing/2014/main" xmlns="" id="{AE9B4454-96E6-70D8-1440-2142487397DF}"/>
+              </a:ext>
+            </a:extLst>
+          </p:cNvPr>
           <p:cNvSpPr>
             <a:spLocks noGrp="1"/>
           </p:cNvSpPr>
@@ -12152,7 +12340,7 @@
                 <a:solidFill>
                   <a:srgbClr val="808080"/>
                 </a:solidFill>
-                <a:latin typeface="Calibri" panose="020F0502020204030204"/>
+                <a:latin typeface="Calibri"/>
               </a:rPr>
               <a:t>Review-II                                                        Department of CSE-2</a:t>
             </a:r>
@@ -12162,7 +12350,13 @@
       </p:sp>
       <p:sp>
         <p:nvSpPr>
-          <p:cNvPr id="7" name="Slide Number Placeholder 6"/>
+          <p:cNvPr id="7" name="Slide Number Placeholder 6">
+            <a:extLst>
+              <a:ext uri="{FF2B5EF4-FFF2-40B4-BE49-F238E27FC236}">
+                <a16:creationId xmlns:a16="http://schemas.microsoft.com/office/drawing/2014/main" xmlns="" id="{5F827BAA-7E22-F268-D9DC-5E17D9155237}"/>
+              </a:ext>
+            </a:extLst>
+          </p:cNvPr>
           <p:cNvSpPr>
             <a:spLocks noGrp="1"/>
           </p:cNvSpPr>
@@ -12180,7 +12374,7 @@
                 <a:solidFill>
                   <a:srgbClr val="808080"/>
                 </a:solidFill>
-                <a:latin typeface="Calibri" panose="020F0502020204030204"/>
+                <a:latin typeface="Calibri"/>
               </a:rPr>
               <a:t>5</a:t>
             </a:r>
@@ -12220,16 +12414,10 @@
                 <a:solidFill>
                   <a:srgbClr val="0070C0"/>
                 </a:solidFill>
-                <a:latin typeface="Calibri" panose="020F0502020204030204"/>
+                <a:latin typeface="Calibri"/>
               </a:rPr>
               <a:t>FUNCTIONAL REQUIREMENTS</a:t>
             </a:r>
-            <a:endParaRPr sz="2200" b="1">
-              <a:solidFill>
-                <a:srgbClr val="0070C0"/>
-              </a:solidFill>
-              <a:latin typeface="Calibri" panose="020F0502020204030204"/>
-            </a:endParaRPr>
           </a:p>
         </p:txBody>
       </p:sp>
@@ -12265,16 +12453,10 @@
                 <a:solidFill>
                   <a:srgbClr val="0070C0"/>
                 </a:solidFill>
-                <a:latin typeface="Calibri" panose="020F0502020204030204"/>
+                <a:latin typeface="Calibri"/>
               </a:rPr>
               <a:t>FR-1</a:t>
             </a:r>
-            <a:endParaRPr sz="1800" b="1">
-              <a:solidFill>
-                <a:srgbClr val="0070C0"/>
-              </a:solidFill>
-              <a:latin typeface="Calibri" panose="020F0502020204030204"/>
-            </a:endParaRPr>
           </a:p>
         </p:txBody>
       </p:sp>
@@ -12310,16 +12492,10 @@
                 <a:solidFill>
                   <a:srgbClr val="000000"/>
                 </a:solidFill>
-                <a:latin typeface="Calibri" panose="020F0502020204030204"/>
+                <a:latin typeface="Calibri"/>
               </a:rPr>
               <a:t>Validate workloads</a:t>
             </a:r>
-            <a:endParaRPr sz="1800" b="1">
-              <a:solidFill>
-                <a:srgbClr val="000000"/>
-              </a:solidFill>
-              <a:latin typeface="Calibri" panose="020F0502020204030204"/>
-            </a:endParaRPr>
           </a:p>
         </p:txBody>
       </p:sp>
@@ -12355,16 +12531,10 @@
                 <a:solidFill>
                   <a:srgbClr val="666666"/>
                 </a:solidFill>
-                <a:latin typeface="Calibri" panose="020F0502020204030204"/>
+                <a:latin typeface="Calibri"/>
               </a:rPr>
               <a:t>Schema + 7 dev fixtures</a:t>
             </a:r>
-            <a:endParaRPr sz="1600" b="0">
-              <a:solidFill>
-                <a:srgbClr val="666666"/>
-              </a:solidFill>
-              <a:latin typeface="Calibri" panose="020F0502020204030204"/>
-            </a:endParaRPr>
           </a:p>
         </p:txBody>
       </p:sp>
@@ -12400,16 +12570,10 @@
                 <a:solidFill>
                   <a:srgbClr val="0070C0"/>
                 </a:solidFill>
-                <a:latin typeface="Calibri" panose="020F0502020204030204"/>
+                <a:latin typeface="Calibri"/>
               </a:rPr>
               <a:t>FR-2</a:t>
             </a:r>
-            <a:endParaRPr sz="1800" b="1">
-              <a:solidFill>
-                <a:srgbClr val="0070C0"/>
-              </a:solidFill>
-              <a:latin typeface="Calibri" panose="020F0502020204030204"/>
-            </a:endParaRPr>
           </a:p>
         </p:txBody>
       </p:sp>
@@ -12445,16 +12609,10 @@
                 <a:solidFill>
                   <a:srgbClr val="000000"/>
                 </a:solidFill>
-                <a:latin typeface="Calibri" panose="020F0502020204030204"/>
+                <a:latin typeface="Calibri"/>
               </a:rPr>
               <a:t>Simulate hierarchy</a:t>
             </a:r>
-            <a:endParaRPr sz="1800" b="1">
-              <a:solidFill>
-                <a:srgbClr val="000000"/>
-              </a:solidFill>
-              <a:latin typeface="Calibri" panose="020F0502020204030204"/>
-            </a:endParaRPr>
           </a:p>
         </p:txBody>
       </p:sp>
@@ -12490,16 +12648,10 @@
                 <a:solidFill>
                   <a:srgbClr val="666666"/>
                 </a:solidFill>
-                <a:latin typeface="Calibri" panose="020F0502020204030204"/>
+                <a:latin typeface="Calibri"/>
               </a:rPr>
               <a:t>Atomic parent + child</a:t>
             </a:r>
-            <a:endParaRPr sz="1600" b="0">
-              <a:solidFill>
-                <a:srgbClr val="666666"/>
-              </a:solidFill>
-              <a:latin typeface="Calibri" panose="020F0502020204030204"/>
-            </a:endParaRPr>
           </a:p>
         </p:txBody>
       </p:sp>
@@ -12535,16 +12687,10 @@
                 <a:solidFill>
                   <a:srgbClr val="0070C0"/>
                 </a:solidFill>
-                <a:latin typeface="Calibri" panose="020F0502020204030204"/>
+                <a:latin typeface="Calibri"/>
               </a:rPr>
               <a:t>FR-3</a:t>
             </a:r>
-            <a:endParaRPr sz="1800" b="1">
-              <a:solidFill>
-                <a:srgbClr val="0070C0"/>
-              </a:solidFill>
-              <a:latin typeface="Calibri" panose="020F0502020204030204"/>
-            </a:endParaRPr>
           </a:p>
         </p:txBody>
       </p:sp>
@@ -12580,16 +12726,10 @@
                 <a:solidFill>
                   <a:srgbClr val="000000"/>
                 </a:solidFill>
-                <a:latin typeface="Calibri" panose="020F0502020204030204"/>
+                <a:latin typeface="Calibri"/>
               </a:rPr>
               <a:t>Compare policies</a:t>
             </a:r>
-            <a:endParaRPr sz="1800" b="1">
-              <a:solidFill>
-                <a:srgbClr val="000000"/>
-              </a:solidFill>
-              <a:latin typeface="Calibri" panose="020F0502020204030204"/>
-            </a:endParaRPr>
           </a:p>
         </p:txBody>
       </p:sp>
@@ -12625,16 +12765,10 @@
                 <a:solidFill>
                   <a:srgbClr val="666666"/>
                 </a:solidFill>
-                <a:latin typeface="Calibri" panose="020F0502020204030204"/>
+                <a:latin typeface="Calibri"/>
               </a:rPr>
               <a:t>FIFO / Greedy / CP-2</a:t>
             </a:r>
-            <a:endParaRPr sz="1600" b="0">
-              <a:solidFill>
-                <a:srgbClr val="666666"/>
-              </a:solidFill>
-              <a:latin typeface="Calibri" panose="020F0502020204030204"/>
-            </a:endParaRPr>
           </a:p>
         </p:txBody>
       </p:sp>
@@ -12670,16 +12804,10 @@
                 <a:solidFill>
                   <a:srgbClr val="0070C0"/>
                 </a:solidFill>
-                <a:latin typeface="Calibri" panose="020F0502020204030204"/>
+                <a:latin typeface="Calibri"/>
               </a:rPr>
               <a:t>FR-4</a:t>
             </a:r>
-            <a:endParaRPr sz="1800" b="1">
-              <a:solidFill>
-                <a:srgbClr val="0070C0"/>
-              </a:solidFill>
-              <a:latin typeface="Calibri" panose="020F0502020204030204"/>
-            </a:endParaRPr>
           </a:p>
         </p:txBody>
       </p:sp>
@@ -12715,16 +12843,10 @@
                 <a:solidFill>
                   <a:srgbClr val="000000"/>
                 </a:solidFill>
-                <a:latin typeface="Calibri" panose="020F0502020204030204"/>
+                <a:latin typeface="Calibri"/>
               </a:rPr>
               <a:t>Prevent unsafe admission</a:t>
             </a:r>
-            <a:endParaRPr sz="1800" b="1">
-              <a:solidFill>
-                <a:srgbClr val="000000"/>
-              </a:solidFill>
-              <a:latin typeface="Calibri" panose="020F0502020204030204"/>
-            </a:endParaRPr>
           </a:p>
         </p:txBody>
       </p:sp>
@@ -12760,16 +12882,10 @@
                 <a:solidFill>
                   <a:srgbClr val="666666"/>
                 </a:solidFill>
-                <a:latin typeface="Calibri" panose="020F0502020204030204"/>
+                <a:latin typeface="Calibri"/>
               </a:rPr>
               <a:t>Reject / defer / recover</a:t>
             </a:r>
-            <a:endParaRPr sz="1600" b="0">
-              <a:solidFill>
-                <a:srgbClr val="666666"/>
-              </a:solidFill>
-              <a:latin typeface="Calibri" panose="020F0502020204030204"/>
-            </a:endParaRPr>
           </a:p>
         </p:txBody>
       </p:sp>
@@ -12805,16 +12921,10 @@
                 <a:solidFill>
                   <a:srgbClr val="0070C0"/>
                 </a:solidFill>
-                <a:latin typeface="Calibri" panose="020F0502020204030204"/>
+                <a:latin typeface="Calibri"/>
               </a:rPr>
               <a:t>FR-5</a:t>
             </a:r>
-            <a:endParaRPr sz="1800" b="1">
-              <a:solidFill>
-                <a:srgbClr val="0070C0"/>
-              </a:solidFill>
-              <a:latin typeface="Calibri" panose="020F0502020204030204"/>
-            </a:endParaRPr>
           </a:p>
         </p:txBody>
       </p:sp>
@@ -12850,16 +12960,10 @@
                 <a:solidFill>
                   <a:srgbClr val="000000"/>
                 </a:solidFill>
-                <a:latin typeface="Calibri" panose="020F0502020204030204"/>
+                <a:latin typeface="Calibri"/>
               </a:rPr>
               <a:t>Expose evidence</a:t>
             </a:r>
-            <a:endParaRPr sz="1800" b="1">
-              <a:solidFill>
-                <a:srgbClr val="000000"/>
-              </a:solidFill>
-              <a:latin typeface="Calibri" panose="020F0502020204030204"/>
-            </a:endParaRPr>
           </a:p>
         </p:txBody>
       </p:sp>
@@ -12895,16 +12999,10 @@
                 <a:solidFill>
                   <a:srgbClr val="666666"/>
                 </a:solidFill>
-                <a:latin typeface="Calibri" panose="020F0502020204030204"/>
+                <a:latin typeface="Calibri"/>
               </a:rPr>
               <a:t>API + dashboard + reports</a:t>
             </a:r>
-            <a:endParaRPr sz="1600" b="0">
-              <a:solidFill>
-                <a:srgbClr val="666666"/>
-              </a:solidFill>
-              <a:latin typeface="Calibri" panose="020F0502020204030204"/>
-            </a:endParaRPr>
           </a:p>
         </p:txBody>
       </p:sp>
@@ -12940,16 +13038,10 @@
                 <a:solidFill>
                   <a:srgbClr val="00B050"/>
                 </a:solidFill>
-                <a:latin typeface="Calibri" panose="020F0502020204030204"/>
+                <a:latin typeface="Calibri"/>
               </a:rPr>
               <a:t>NON-FUNCTIONAL REQUIREMENTS</a:t>
             </a:r>
-            <a:endParaRPr sz="2200" b="1">
-              <a:solidFill>
-                <a:srgbClr val="00B050"/>
-              </a:solidFill>
-              <a:latin typeface="Calibri" panose="020F0502020204030204"/>
-            </a:endParaRPr>
           </a:p>
         </p:txBody>
       </p:sp>
@@ -13030,16 +13122,10 @@
                 <a:solidFill>
                   <a:srgbClr val="00B050"/>
                 </a:solidFill>
-                <a:latin typeface="Calibri" panose="020F0502020204030204"/>
+                <a:latin typeface="Calibri"/>
               </a:rPr>
               <a:t>NFR-1</a:t>
             </a:r>
-            <a:endParaRPr sz="1800" b="1">
-              <a:solidFill>
-                <a:srgbClr val="00B050"/>
-              </a:solidFill>
-              <a:latin typeface="Calibri" panose="020F0502020204030204"/>
-            </a:endParaRPr>
           </a:p>
         </p:txBody>
       </p:sp>
@@ -13075,16 +13161,10 @@
                 <a:solidFill>
                   <a:srgbClr val="000000"/>
                 </a:solidFill>
-                <a:latin typeface="Calibri" panose="020F0502020204030204"/>
+                <a:latin typeface="Calibri"/>
               </a:rPr>
               <a:t>Deterministic output</a:t>
             </a:r>
-            <a:endParaRPr sz="1900" b="0">
-              <a:solidFill>
-                <a:srgbClr val="000000"/>
-              </a:solidFill>
-              <a:latin typeface="Calibri" panose="020F0502020204030204"/>
-            </a:endParaRPr>
           </a:p>
         </p:txBody>
       </p:sp>
@@ -13165,16 +13245,10 @@
                 <a:solidFill>
                   <a:srgbClr val="00B050"/>
                 </a:solidFill>
-                <a:latin typeface="Calibri" panose="020F0502020204030204"/>
+                <a:latin typeface="Calibri"/>
               </a:rPr>
               <a:t>NFR-2</a:t>
             </a:r>
-            <a:endParaRPr sz="1800" b="1">
-              <a:solidFill>
-                <a:srgbClr val="00B050"/>
-              </a:solidFill>
-              <a:latin typeface="Calibri" panose="020F0502020204030204"/>
-            </a:endParaRPr>
           </a:p>
         </p:txBody>
       </p:sp>
@@ -13210,16 +13284,10 @@
                 <a:solidFill>
                   <a:srgbClr val="000000"/>
                 </a:solidFill>
-                <a:latin typeface="Calibri" panose="020F0502020204030204"/>
+                <a:latin typeface="Calibri"/>
               </a:rPr>
               <a:t>30-second bounded execution</a:t>
             </a:r>
-            <a:endParaRPr sz="1900" b="0">
-              <a:solidFill>
-                <a:srgbClr val="000000"/>
-              </a:solidFill>
-              <a:latin typeface="Calibri" panose="020F0502020204030204"/>
-            </a:endParaRPr>
           </a:p>
         </p:txBody>
       </p:sp>
@@ -13300,16 +13368,10 @@
                 <a:solidFill>
                   <a:srgbClr val="00B050"/>
                 </a:solidFill>
-                <a:latin typeface="Calibri" panose="020F0502020204030204"/>
+                <a:latin typeface="Calibri"/>
               </a:rPr>
               <a:t>NFR-3</a:t>
             </a:r>
-            <a:endParaRPr sz="1800" b="1">
-              <a:solidFill>
-                <a:srgbClr val="00B050"/>
-              </a:solidFill>
-              <a:latin typeface="Calibri" panose="020F0502020204030204"/>
-            </a:endParaRPr>
           </a:p>
         </p:txBody>
       </p:sp>
@@ -13345,16 +13407,10 @@
                 <a:solidFill>
                   <a:srgbClr val="000000"/>
                 </a:solidFill>
-                <a:latin typeface="Calibri" panose="020F0502020204030204"/>
+                <a:latin typeface="Calibri"/>
               </a:rPr>
               <a:t>Docker + pinned Ray 2.10.0</a:t>
             </a:r>
-            <a:endParaRPr sz="1900" b="0">
-              <a:solidFill>
-                <a:srgbClr val="000000"/>
-              </a:solidFill>
-              <a:latin typeface="Calibri" panose="020F0502020204030204"/>
-            </a:endParaRPr>
           </a:p>
         </p:txBody>
       </p:sp>
@@ -13435,16 +13491,10 @@
                 <a:solidFill>
                   <a:srgbClr val="00B050"/>
                 </a:solidFill>
-                <a:latin typeface="Calibri" panose="020F0502020204030204"/>
+                <a:latin typeface="Calibri"/>
               </a:rPr>
               <a:t>NFR-4</a:t>
             </a:r>
-            <a:endParaRPr sz="1800" b="1">
-              <a:solidFill>
-                <a:srgbClr val="00B050"/>
-              </a:solidFill>
-              <a:latin typeface="Calibri" panose="020F0502020204030204"/>
-            </a:endParaRPr>
           </a:p>
         </p:txBody>
       </p:sp>
@@ -13480,16 +13530,10 @@
                 <a:solidFill>
                   <a:srgbClr val="000000"/>
                 </a:solidFill>
-                <a:latin typeface="Calibri" panose="020F0502020204030204"/>
+                <a:latin typeface="Calibri"/>
               </a:rPr>
               <a:t>CI validates; no prod claim</a:t>
             </a:r>
-            <a:endParaRPr sz="1900" b="0">
-              <a:solidFill>
-                <a:srgbClr val="000000"/>
-              </a:solidFill>
-              <a:latin typeface="Calibri" panose="020F0502020204030204"/>
-            </a:endParaRPr>
           </a:p>
         </p:txBody>
       </p:sp>
@@ -13525,20 +13569,19 @@
                 <a:solidFill>
                   <a:srgbClr val="666666"/>
                 </a:solidFill>
-                <a:latin typeface="Calibri" panose="020F0502020204030204"/>
+                <a:latin typeface="Calibri"/>
               </a:rPr>
               <a:t>Acceptance: 70 tests + oracle + frozen CP-1 + CP-2 result</a:t>
             </a:r>
-            <a:endParaRPr sz="1800" b="0">
-              <a:solidFill>
-                <a:srgbClr val="666666"/>
-              </a:solidFill>
-              <a:latin typeface="Calibri" panose="020F0502020204030204"/>
-            </a:endParaRPr>
           </a:p>
         </p:txBody>
       </p:sp>
     </p:spTree>
+    <p:extLst>
+      <p:ext uri="{BB962C8B-B14F-4D97-AF65-F5344CB8AC3E}">
+        <p14:creationId xmlns:p14="http://schemas.microsoft.com/office/powerpoint/2010/main" xmlns="" val="930833320"/>
+      </p:ext>
+    </p:extLst>
   </p:cSld>
   <p:clrMapOvr>
     <a:masterClrMapping/>
@@ -13565,7 +13608,13 @@
       </p:grpSpPr>
       <p:sp>
         <p:nvSpPr>
-          <p:cNvPr id="8" name="Title 7"/>
+          <p:cNvPr id="8" name="Title 7">
+            <a:extLst>
+              <a:ext uri="{FF2B5EF4-FFF2-40B4-BE49-F238E27FC236}">
+                <a16:creationId xmlns:a16="http://schemas.microsoft.com/office/drawing/2014/main" xmlns="" id="{D45DB3B1-7702-A34D-B15A-E964B95D6FB5}"/>
+              </a:ext>
+            </a:extLst>
+          </p:cNvPr>
           <p:cNvSpPr>
             <a:spLocks noGrp="1"/>
           </p:cNvSpPr>
@@ -13587,11 +13636,11 @@
           <a:p>
             <a:pPr algn="ctr"/>
             <a:r>
-              <a:rPr lang="en-US" sz="3000" b="1" dirty="0" smtClean="0">
+              <a:rPr lang="en-US" b="1" dirty="0" smtClean="0" sz="3000">
                 <a:solidFill>
                   <a:srgbClr val="000000"/>
                 </a:solidFill>
-                <a:latin typeface="Calibri" panose="020F0502020204030204"/>
+                <a:latin typeface="Calibri"/>
               </a:rPr>
               <a:t>ALTERNATIVE SOLUTIONS &amp; TRADE-OFF ANALYSIS</a:t>
             </a:r>
@@ -13601,7 +13650,13 @@
       </p:sp>
       <p:sp>
         <p:nvSpPr>
-          <p:cNvPr id="5" name="Date Placeholder 4"/>
+          <p:cNvPr id="5" name="Date Placeholder 4">
+            <a:extLst>
+              <a:ext uri="{FF2B5EF4-FFF2-40B4-BE49-F238E27FC236}">
+                <a16:creationId xmlns:a16="http://schemas.microsoft.com/office/drawing/2014/main" xmlns="" id="{BD5C2420-26C9-65B4-41BA-D5CA69721C05}"/>
+              </a:ext>
+            </a:extLst>
+          </p:cNvPr>
           <p:cNvSpPr>
             <a:spLocks noGrp="1"/>
           </p:cNvSpPr>
@@ -13619,7 +13674,7 @@
                 <a:solidFill>
                   <a:srgbClr val="808080"/>
                 </a:solidFill>
-                <a:latin typeface="Calibri" panose="020F0502020204030204"/>
+                <a:latin typeface="Calibri"/>
               </a:rPr>
               <a:t>23-09-2026</a:t>
             </a:r>
@@ -13629,7 +13684,13 @@
       </p:sp>
       <p:sp>
         <p:nvSpPr>
-          <p:cNvPr id="6" name="Footer Placeholder 5"/>
+          <p:cNvPr id="6" name="Footer Placeholder 5">
+            <a:extLst>
+              <a:ext uri="{FF2B5EF4-FFF2-40B4-BE49-F238E27FC236}">
+                <a16:creationId xmlns:a16="http://schemas.microsoft.com/office/drawing/2014/main" xmlns="" id="{AE9B4454-96E6-70D8-1440-2142487397DF}"/>
+              </a:ext>
+            </a:extLst>
+          </p:cNvPr>
           <p:cNvSpPr>
             <a:spLocks noGrp="1"/>
           </p:cNvSpPr>
@@ -13647,7 +13708,7 @@
                 <a:solidFill>
                   <a:srgbClr val="808080"/>
                 </a:solidFill>
-                <a:latin typeface="Calibri" panose="020F0502020204030204"/>
+                <a:latin typeface="Calibri"/>
               </a:rPr>
               <a:t>Review-II                                                        Department of CSE-2</a:t>
             </a:r>
@@ -13657,7 +13718,13 @@
       </p:sp>
       <p:sp>
         <p:nvSpPr>
-          <p:cNvPr id="7" name="Slide Number Placeholder 6"/>
+          <p:cNvPr id="7" name="Slide Number Placeholder 6">
+            <a:extLst>
+              <a:ext uri="{FF2B5EF4-FFF2-40B4-BE49-F238E27FC236}">
+                <a16:creationId xmlns:a16="http://schemas.microsoft.com/office/drawing/2014/main" xmlns="" id="{5F827BAA-7E22-F268-D9DC-5E17D9155237}"/>
+              </a:ext>
+            </a:extLst>
+          </p:cNvPr>
           <p:cNvSpPr>
             <a:spLocks noGrp="1"/>
           </p:cNvSpPr>
@@ -13675,7 +13742,7 @@
                 <a:solidFill>
                   <a:srgbClr val="808080"/>
                 </a:solidFill>
-                <a:latin typeface="Calibri" panose="020F0502020204030204"/>
+                <a:latin typeface="Calibri"/>
               </a:rPr>
               <a:t>6</a:t>
             </a:r>
@@ -13760,16 +13827,10 @@
                 <a:solidFill>
                   <a:srgbClr val="666666"/>
                 </a:solidFill>
-                <a:latin typeface="Calibri" panose="020F0502020204030204"/>
+                <a:latin typeface="Calibri"/>
               </a:rPr>
               <a:t>BASELINE 1 · FIFO</a:t>
             </a:r>
-            <a:endParaRPr sz="1800" b="1">
-              <a:solidFill>
-                <a:srgbClr val="666666"/>
-              </a:solidFill>
-              <a:latin typeface="Calibri" panose="020F0502020204030204"/>
-            </a:endParaRPr>
           </a:p>
         </p:txBody>
       </p:sp>
@@ -13805,16 +13866,10 @@
                 <a:solidFill>
                   <a:srgbClr val="0070C0"/>
                 </a:solidFill>
-                <a:latin typeface="Calibri" panose="020F0502020204030204"/>
+                <a:latin typeface="Calibri"/>
               </a:rPr>
               <a:t>FIFO baseline</a:t>
             </a:r>
-            <a:endParaRPr sz="2000" b="1">
-              <a:solidFill>
-                <a:srgbClr val="0070C0"/>
-              </a:solidFill>
-              <a:latin typeface="Calibri" panose="020F0502020204030204"/>
-            </a:endParaRPr>
           </a:p>
         </p:txBody>
       </p:sp>
@@ -13850,16 +13905,10 @@
                 <a:solidFill>
                   <a:srgbClr val="000000"/>
                 </a:solidFill>
-                <a:latin typeface="Calibri" panose="020F0502020204030204"/>
+                <a:latin typeface="Calibri"/>
               </a:rPr>
               <a:t>Simple arrival-order reference</a:t>
             </a:r>
-            <a:endParaRPr sz="1800" b="1">
-              <a:solidFill>
-                <a:srgbClr val="000000"/>
-              </a:solidFill>
-              <a:latin typeface="Calibri" panose="020F0502020204030204"/>
-            </a:endParaRPr>
           </a:p>
         </p:txBody>
       </p:sp>
@@ -13895,16 +13944,10 @@
                 <a:solidFill>
                   <a:srgbClr val="666666"/>
                 </a:solidFill>
-                <a:latin typeface="Calibri" panose="020F0502020204030204"/>
+                <a:latin typeface="Calibri"/>
               </a:rPr>
               <a:t>Head-of-line blocking; hierarchy-blind</a:t>
             </a:r>
-            <a:endParaRPr sz="1700" b="0">
-              <a:solidFill>
-                <a:srgbClr val="666666"/>
-              </a:solidFill>
-              <a:latin typeface="Calibri" panose="020F0502020204030204"/>
-            </a:endParaRPr>
           </a:p>
         </p:txBody>
       </p:sp>
@@ -13985,16 +14028,10 @@
                 <a:solidFill>
                   <a:srgbClr val="666666"/>
                 </a:solidFill>
-                <a:latin typeface="Calibri" panose="020F0502020204030204"/>
+                <a:latin typeface="Calibri"/>
               </a:rPr>
               <a:t>BASELINE 2 · GREEDY</a:t>
             </a:r>
-            <a:endParaRPr sz="1800" b="1">
-              <a:solidFill>
-                <a:srgbClr val="666666"/>
-              </a:solidFill>
-              <a:latin typeface="Calibri" panose="020F0502020204030204"/>
-            </a:endParaRPr>
           </a:p>
         </p:txBody>
       </p:sp>
@@ -14030,16 +14067,10 @@
                 <a:solidFill>
                   <a:srgbClr val="0070C0"/>
                 </a:solidFill>
-                <a:latin typeface="Calibri" panose="020F0502020204030204"/>
+                <a:latin typeface="Calibri"/>
               </a:rPr>
               <a:t>Greedy / backfilling</a:t>
             </a:r>
-            <a:endParaRPr sz="2000" b="1">
-              <a:solidFill>
-                <a:srgbClr val="0070C0"/>
-              </a:solidFill>
-              <a:latin typeface="Calibri" panose="020F0502020204030204"/>
-            </a:endParaRPr>
           </a:p>
         </p:txBody>
       </p:sp>
@@ -14075,16 +14106,10 @@
                 <a:solidFill>
                   <a:srgbClr val="000000"/>
                 </a:solidFill>
-                <a:latin typeface="Calibri" panose="020F0502020204030204"/>
+                <a:latin typeface="Calibri"/>
               </a:rPr>
               <a:t>Skips blocked head; improves throughput</a:t>
             </a:r>
-            <a:endParaRPr sz="1800" b="1">
-              <a:solidFill>
-                <a:srgbClr val="000000"/>
-              </a:solidFill>
-              <a:latin typeface="Calibri" panose="020F0502020204030204"/>
-            </a:endParaRPr>
           </a:p>
         </p:txBody>
       </p:sp>
@@ -14120,16 +14145,10 @@
                 <a:solidFill>
                   <a:srgbClr val="666666"/>
                 </a:solidFill>
-                <a:latin typeface="Calibri" panose="020F0502020204030204"/>
+                <a:latin typeface="Calibri"/>
               </a:rPr>
               <a:t>Still admits unsafe parent-only fits</a:t>
             </a:r>
-            <a:endParaRPr sz="1700" b="0">
-              <a:solidFill>
-                <a:srgbClr val="666666"/>
-              </a:solidFill>
-              <a:latin typeface="Calibri" panose="020F0502020204030204"/>
-            </a:endParaRPr>
           </a:p>
         </p:txBody>
       </p:sp>
@@ -14210,16 +14229,10 @@
                 <a:solidFill>
                   <a:srgbClr val="666666"/>
                 </a:solidFill>
-                <a:latin typeface="Calibri" panose="020F0502020204030204"/>
+                <a:latin typeface="Calibri"/>
               </a:rPr>
               <a:t>CP-2 CONTROLLER</a:t>
             </a:r>
-            <a:endParaRPr sz="1800" b="1">
-              <a:solidFill>
-                <a:srgbClr val="666666"/>
-              </a:solidFill>
-              <a:latin typeface="Calibri" panose="020F0502020204030204"/>
-            </a:endParaRPr>
           </a:p>
         </p:txBody>
       </p:sp>
@@ -14255,16 +14268,10 @@
                 <a:solidFill>
                   <a:srgbClr val="0070C0"/>
                 </a:solidFill>
-                <a:latin typeface="Calibri" panose="020F0502020204030204"/>
+                <a:latin typeface="Calibri"/>
               </a:rPr>
               <a:t>Deadlock-aware policy</a:t>
             </a:r>
-            <a:endParaRPr sz="2000" b="1">
-              <a:solidFill>
-                <a:srgbClr val="0070C0"/>
-              </a:solidFill>
-              <a:latin typeface="Calibri" panose="020F0502020204030204"/>
-            </a:endParaRPr>
           </a:p>
         </p:txBody>
       </p:sp>
@@ -14300,16 +14307,10 @@
                 <a:solidFill>
                   <a:srgbClr val="000000"/>
                 </a:solidFill>
-                <a:latin typeface="Calibri" panose="020F0502020204030204"/>
+                <a:latin typeface="Calibri"/>
               </a:rPr>
               <a:t>Checks parent + child before admission</a:t>
             </a:r>
-            <a:endParaRPr sz="1800" b="1">
-              <a:solidFill>
-                <a:srgbClr val="000000"/>
-              </a:solidFill>
-              <a:latin typeface="Calibri" panose="020F0502020204030204"/>
-            </a:endParaRPr>
           </a:p>
         </p:txBody>
       </p:sp>
@@ -14345,16 +14346,10 @@
                 <a:solidFill>
                   <a:srgbClr val="666666"/>
                 </a:solidFill>
-                <a:latin typeface="Calibri" panose="020F0502020204030204"/>
+                <a:latin typeface="Calibri"/>
               </a:rPr>
               <a:t>Rejects infeasible; defers unsafe; explains why</a:t>
             </a:r>
-            <a:endParaRPr sz="1700" b="0">
-              <a:solidFill>
-                <a:srgbClr val="666666"/>
-              </a:solidFill>
-              <a:latin typeface="Calibri" panose="020F0502020204030204"/>
-            </a:endParaRPr>
           </a:p>
         </p:txBody>
       </p:sp>
@@ -14390,20 +14385,19 @@
                 <a:solidFill>
                   <a:srgbClr val="000000"/>
                 </a:solidFill>
-                <a:latin typeface="Calibri" panose="020F0502020204030204"/>
+                <a:latin typeface="Calibri"/>
               </a:rPr>
               <a:t>Research basis: Ray [1] • Tune [2] • DRF [3] • deadlock detection [4] • Hyperband/ASHA [5][6]</a:t>
             </a:r>
-            <a:endParaRPr sz="1800" b="1">
-              <a:solidFill>
-                <a:srgbClr val="000000"/>
-              </a:solidFill>
-              <a:latin typeface="Calibri" panose="020F0502020204030204"/>
-            </a:endParaRPr>
           </a:p>
         </p:txBody>
       </p:sp>
     </p:spTree>
+    <p:extLst>
+      <p:ext uri="{BB962C8B-B14F-4D97-AF65-F5344CB8AC3E}">
+        <p14:creationId xmlns:p14="http://schemas.microsoft.com/office/powerpoint/2010/main" xmlns="" val="1932801886"/>
+      </p:ext>
+    </p:extLst>
   </p:cSld>
   <p:clrMapOvr>
     <a:masterClrMapping/>
@@ -14430,7 +14424,13 @@
       </p:grpSpPr>
       <p:sp>
         <p:nvSpPr>
-          <p:cNvPr id="8" name="Title 7"/>
+          <p:cNvPr id="8" name="Title 7">
+            <a:extLst>
+              <a:ext uri="{FF2B5EF4-FFF2-40B4-BE49-F238E27FC236}">
+                <a16:creationId xmlns:a16="http://schemas.microsoft.com/office/drawing/2014/main" xmlns="" id="{D45DB3B1-7702-A34D-B15A-E964B95D6FB5}"/>
+              </a:ext>
+            </a:extLst>
+          </p:cNvPr>
           <p:cNvSpPr>
             <a:spLocks noGrp="1"/>
           </p:cNvSpPr>
@@ -14450,11 +14450,11 @@
           <a:p>
             <a:pPr marL="514350" indent="-514350" algn="ctr"/>
             <a:r>
-              <a:rPr lang="en-US" sz="3000" b="1" dirty="0" smtClean="0">
+              <a:rPr lang="en-US" b="1" dirty="0" smtClean="0" sz="3000">
                 <a:solidFill>
                   <a:srgbClr val="000000"/>
                 </a:solidFill>
-                <a:latin typeface="Calibri" panose="020F0502020204030204"/>
+                <a:latin typeface="Calibri"/>
               </a:rPr>
               <a:t>COMPLETE SYSTEM ARCHITECTURE</a:t>
             </a:r>
@@ -14464,7 +14464,13 @@
       </p:sp>
       <p:sp>
         <p:nvSpPr>
-          <p:cNvPr id="5" name="Date Placeholder 4"/>
+          <p:cNvPr id="5" name="Date Placeholder 4">
+            <a:extLst>
+              <a:ext uri="{FF2B5EF4-FFF2-40B4-BE49-F238E27FC236}">
+                <a16:creationId xmlns:a16="http://schemas.microsoft.com/office/drawing/2014/main" xmlns="" id="{BD5C2420-26C9-65B4-41BA-D5CA69721C05}"/>
+              </a:ext>
+            </a:extLst>
+          </p:cNvPr>
           <p:cNvSpPr>
             <a:spLocks noGrp="1"/>
           </p:cNvSpPr>
@@ -14482,7 +14488,7 @@
                 <a:solidFill>
                   <a:srgbClr val="808080"/>
                 </a:solidFill>
-                <a:latin typeface="Calibri" panose="020F0502020204030204"/>
+                <a:latin typeface="Calibri"/>
               </a:rPr>
               <a:t>23-09-2026</a:t>
             </a:r>
@@ -14492,7 +14498,13 @@
       </p:sp>
       <p:sp>
         <p:nvSpPr>
-          <p:cNvPr id="6" name="Footer Placeholder 5"/>
+          <p:cNvPr id="6" name="Footer Placeholder 5">
+            <a:extLst>
+              <a:ext uri="{FF2B5EF4-FFF2-40B4-BE49-F238E27FC236}">
+                <a16:creationId xmlns:a16="http://schemas.microsoft.com/office/drawing/2014/main" xmlns="" id="{AE9B4454-96E6-70D8-1440-2142487397DF}"/>
+              </a:ext>
+            </a:extLst>
+          </p:cNvPr>
           <p:cNvSpPr>
             <a:spLocks noGrp="1"/>
           </p:cNvSpPr>
@@ -14510,7 +14522,7 @@
                 <a:solidFill>
                   <a:srgbClr val="808080"/>
                 </a:solidFill>
-                <a:latin typeface="Calibri" panose="020F0502020204030204"/>
+                <a:latin typeface="Calibri"/>
               </a:rPr>
               <a:t>Review-II                                                        Department of CSE-2</a:t>
             </a:r>
@@ -14520,7 +14532,13 @@
       </p:sp>
       <p:sp>
         <p:nvSpPr>
-          <p:cNvPr id="7" name="Slide Number Placeholder 6"/>
+          <p:cNvPr id="7" name="Slide Number Placeholder 6">
+            <a:extLst>
+              <a:ext uri="{FF2B5EF4-FFF2-40B4-BE49-F238E27FC236}">
+                <a16:creationId xmlns:a16="http://schemas.microsoft.com/office/drawing/2014/main" xmlns="" id="{5F827BAA-7E22-F268-D9DC-5E17D9155237}"/>
+              </a:ext>
+            </a:extLst>
+          </p:cNvPr>
           <p:cNvSpPr>
             <a:spLocks noGrp="1"/>
           </p:cNvSpPr>
@@ -14538,7 +14556,7 @@
                 <a:solidFill>
                   <a:srgbClr val="808080"/>
                 </a:solidFill>
-                <a:latin typeface="Calibri" panose="020F0502020204030204"/>
+                <a:latin typeface="Calibri"/>
               </a:rPr>
               <a:t>7</a:t>
             </a:r>
@@ -14623,16 +14641,10 @@
                 <a:solidFill>
                   <a:srgbClr val="0070C0"/>
                 </a:solidFill>
-                <a:latin typeface="Calibri" panose="020F0502020204030204"/>
+                <a:latin typeface="Calibri"/>
               </a:rPr>
               <a:t>1</a:t>
             </a:r>
-            <a:endParaRPr sz="2000" b="1">
-              <a:solidFill>
-                <a:srgbClr val="0070C0"/>
-              </a:solidFill>
-              <a:latin typeface="Calibri" panose="020F0502020204030204"/>
-            </a:endParaRPr>
           </a:p>
         </p:txBody>
       </p:sp>
@@ -14668,16 +14680,10 @@
                 <a:solidFill>
                   <a:srgbClr val="000000"/>
                 </a:solidFill>
-                <a:latin typeface="Calibri" panose="020F0502020204030204"/>
+                <a:latin typeface="Calibri"/>
               </a:rPr>
               <a:t>JSON fixtures</a:t>
             </a:r>
-            <a:endParaRPr sz="1900" b="1">
-              <a:solidFill>
-                <a:srgbClr val="000000"/>
-              </a:solidFill>
-              <a:latin typeface="Calibri" panose="020F0502020204030204"/>
-            </a:endParaRPr>
           </a:p>
         </p:txBody>
       </p:sp>
@@ -14713,16 +14719,10 @@
                 <a:solidFill>
                   <a:srgbClr val="666666"/>
                 </a:solidFill>
-                <a:latin typeface="Calibri" panose="020F0502020204030204"/>
+                <a:latin typeface="Calibri"/>
               </a:rPr>
               <a:t>Cluster + trials</a:t>
             </a:r>
-            <a:endParaRPr sz="1600" b="0">
-              <a:solidFill>
-                <a:srgbClr val="666666"/>
-              </a:solidFill>
-              <a:latin typeface="Calibri" panose="020F0502020204030204"/>
-            </a:endParaRPr>
           </a:p>
         </p:txBody>
       </p:sp>
@@ -14838,16 +14838,10 @@
                 <a:solidFill>
                   <a:srgbClr val="0070C0"/>
                 </a:solidFill>
-                <a:latin typeface="Calibri" panose="020F0502020204030204"/>
+                <a:latin typeface="Calibri"/>
               </a:rPr>
               <a:t>2</a:t>
             </a:r>
-            <a:endParaRPr sz="2000" b="1">
-              <a:solidFill>
-                <a:srgbClr val="0070C0"/>
-              </a:solidFill>
-              <a:latin typeface="Calibri" panose="020F0502020204030204"/>
-            </a:endParaRPr>
           </a:p>
         </p:txBody>
       </p:sp>
@@ -14883,16 +14877,10 @@
                 <a:solidFill>
                   <a:srgbClr val="000000"/>
                 </a:solidFill>
-                <a:latin typeface="Calibri" panose="020F0502020204030204"/>
+                <a:latin typeface="Calibri"/>
               </a:rPr>
               <a:t>Validation</a:t>
             </a:r>
-            <a:endParaRPr sz="1900" b="1">
-              <a:solidFill>
-                <a:srgbClr val="000000"/>
-              </a:solidFill>
-              <a:latin typeface="Calibri" panose="020F0502020204030204"/>
-            </a:endParaRPr>
           </a:p>
         </p:txBody>
       </p:sp>
@@ -14928,16 +14916,10 @@
                 <a:solidFill>
                   <a:srgbClr val="666666"/>
                 </a:solidFill>
-                <a:latin typeface="Calibri" panose="020F0502020204030204"/>
+                <a:latin typeface="Calibri"/>
               </a:rPr>
               <a:t>Schema checks</a:t>
             </a:r>
-            <a:endParaRPr sz="1600" b="0">
-              <a:solidFill>
-                <a:srgbClr val="666666"/>
-              </a:solidFill>
-              <a:latin typeface="Calibri" panose="020F0502020204030204"/>
-            </a:endParaRPr>
           </a:p>
         </p:txBody>
       </p:sp>
@@ -15053,16 +15035,10 @@
                 <a:solidFill>
                   <a:srgbClr val="0070C0"/>
                 </a:solidFill>
-                <a:latin typeface="Calibri" panose="020F0502020204030204"/>
+                <a:latin typeface="Calibri"/>
               </a:rPr>
               <a:t>3</a:t>
             </a:r>
-            <a:endParaRPr sz="2000" b="1">
-              <a:solidFill>
-                <a:srgbClr val="0070C0"/>
-              </a:solidFill>
-              <a:latin typeface="Calibri" panose="020F0502020204030204"/>
-            </a:endParaRPr>
           </a:p>
         </p:txBody>
       </p:sp>
@@ -15098,16 +15074,10 @@
                 <a:solidFill>
                   <a:srgbClr val="000000"/>
                 </a:solidFill>
-                <a:latin typeface="Calibri" panose="020F0502020204030204"/>
+                <a:latin typeface="Calibri"/>
               </a:rPr>
               <a:t>Simulator</a:t>
             </a:r>
-            <a:endParaRPr sz="1900" b="1">
-              <a:solidFill>
-                <a:srgbClr val="000000"/>
-              </a:solidFill>
-              <a:latin typeface="Calibri" panose="020F0502020204030204"/>
-            </a:endParaRPr>
           </a:p>
         </p:txBody>
       </p:sp>
@@ -15143,16 +15113,10 @@
                 <a:solidFill>
                   <a:srgbClr val="666666"/>
                 </a:solidFill>
-                <a:latin typeface="Calibri" panose="020F0502020204030204"/>
+                <a:latin typeface="Calibri"/>
               </a:rPr>
               <a:t>0.1s ticks</a:t>
             </a:r>
-            <a:endParaRPr sz="1600" b="0">
-              <a:solidFill>
-                <a:srgbClr val="666666"/>
-              </a:solidFill>
-              <a:latin typeface="Calibri" panose="020F0502020204030204"/>
-            </a:endParaRPr>
           </a:p>
         </p:txBody>
       </p:sp>
@@ -15268,16 +15232,10 @@
                 <a:solidFill>
                   <a:srgbClr val="0070C0"/>
                 </a:solidFill>
-                <a:latin typeface="Calibri" panose="020F0502020204030204"/>
+                <a:latin typeface="Calibri"/>
               </a:rPr>
               <a:t>4</a:t>
             </a:r>
-            <a:endParaRPr sz="2000" b="1">
-              <a:solidFill>
-                <a:srgbClr val="0070C0"/>
-              </a:solidFill>
-              <a:latin typeface="Calibri" panose="020F0502020204030204"/>
-            </a:endParaRPr>
           </a:p>
         </p:txBody>
       </p:sp>
@@ -15313,16 +15271,10 @@
                 <a:solidFill>
                   <a:srgbClr val="000000"/>
                 </a:solidFill>
-                <a:latin typeface="Calibri" panose="020F0502020204030204"/>
+                <a:latin typeface="Calibri"/>
               </a:rPr>
               <a:t>Policy engine</a:t>
             </a:r>
-            <a:endParaRPr sz="1900" b="1">
-              <a:solidFill>
-                <a:srgbClr val="000000"/>
-              </a:solidFill>
-              <a:latin typeface="Calibri" panose="020F0502020204030204"/>
-            </a:endParaRPr>
           </a:p>
         </p:txBody>
       </p:sp>
@@ -15358,16 +15310,10 @@
                 <a:solidFill>
                   <a:srgbClr val="666666"/>
                 </a:solidFill>
-                <a:latin typeface="Calibri" panose="020F0502020204030204"/>
+                <a:latin typeface="Calibri"/>
               </a:rPr>
               <a:t>FIFO • Greedy • CP-2</a:t>
             </a:r>
-            <a:endParaRPr sz="1600" b="0">
-              <a:solidFill>
-                <a:srgbClr val="666666"/>
-              </a:solidFill>
-              <a:latin typeface="Calibri" panose="020F0502020204030204"/>
-            </a:endParaRPr>
           </a:p>
         </p:txBody>
       </p:sp>
@@ -15483,16 +15429,10 @@
                 <a:solidFill>
                   <a:srgbClr val="0070C0"/>
                 </a:solidFill>
-                <a:latin typeface="Calibri" panose="020F0502020204030204"/>
+                <a:latin typeface="Calibri"/>
               </a:rPr>
               <a:t>5</a:t>
             </a:r>
-            <a:endParaRPr sz="2000" b="1">
-              <a:solidFill>
-                <a:srgbClr val="0070C0"/>
-              </a:solidFill>
-              <a:latin typeface="Calibri" panose="020F0502020204030204"/>
-            </a:endParaRPr>
           </a:p>
         </p:txBody>
       </p:sp>
@@ -15528,16 +15468,10 @@
                 <a:solidFill>
                   <a:srgbClr val="000000"/>
                 </a:solidFill>
-                <a:latin typeface="Calibri" panose="020F0502020204030204"/>
+                <a:latin typeface="Calibri"/>
               </a:rPr>
               <a:t>Telemetry</a:t>
             </a:r>
-            <a:endParaRPr sz="1900" b="1">
-              <a:solidFill>
-                <a:srgbClr val="000000"/>
-              </a:solidFill>
-              <a:latin typeface="Calibri" panose="020F0502020204030204"/>
-            </a:endParaRPr>
           </a:p>
         </p:txBody>
       </p:sp>
@@ -15573,16 +15507,10 @@
                 <a:solidFill>
                   <a:srgbClr val="666666"/>
                 </a:solidFill>
-                <a:latin typeface="Calibri" panose="020F0502020204030204"/>
+                <a:latin typeface="Calibri"/>
               </a:rPr>
               <a:t>Cycles + stranding</a:t>
             </a:r>
-            <a:endParaRPr sz="1600" b="0">
-              <a:solidFill>
-                <a:srgbClr val="666666"/>
-              </a:solidFill>
-              <a:latin typeface="Calibri" panose="020F0502020204030204"/>
-            </a:endParaRPr>
           </a:p>
         </p:txBody>
       </p:sp>
@@ -15698,16 +15626,10 @@
                 <a:solidFill>
                   <a:srgbClr val="0070C0"/>
                 </a:solidFill>
-                <a:latin typeface="Calibri" panose="020F0502020204030204"/>
+                <a:latin typeface="Calibri"/>
               </a:rPr>
               <a:t>6</a:t>
             </a:r>
-            <a:endParaRPr sz="2000" b="1">
-              <a:solidFill>
-                <a:srgbClr val="0070C0"/>
-              </a:solidFill>
-              <a:latin typeface="Calibri" panose="020F0502020204030204"/>
-            </a:endParaRPr>
           </a:p>
         </p:txBody>
       </p:sp>
@@ -15743,16 +15665,10 @@
                 <a:solidFill>
                   <a:srgbClr val="000000"/>
                 </a:solidFill>
-                <a:latin typeface="Calibri" panose="020F0502020204030204"/>
+                <a:latin typeface="Calibri"/>
               </a:rPr>
               <a:t>API + UI</a:t>
             </a:r>
-            <a:endParaRPr sz="1900" b="1">
-              <a:solidFill>
-                <a:srgbClr val="000000"/>
-              </a:solidFill>
-              <a:latin typeface="Calibri" panose="020F0502020204030204"/>
-            </a:endParaRPr>
           </a:p>
         </p:txBody>
       </p:sp>
@@ -15788,16 +15704,10 @@
                 <a:solidFill>
                   <a:srgbClr val="666666"/>
                 </a:solidFill>
-                <a:latin typeface="Calibri" panose="020F0502020204030204"/>
+                <a:latin typeface="Calibri"/>
               </a:rPr>
               <a:t>FastAPI + Next.js</a:t>
             </a:r>
-            <a:endParaRPr sz="1600" b="0">
-              <a:solidFill>
-                <a:srgbClr val="666666"/>
-              </a:solidFill>
-              <a:latin typeface="Calibri" panose="020F0502020204030204"/>
-            </a:endParaRPr>
           </a:p>
         </p:txBody>
       </p:sp>
@@ -15833,16 +15743,10 @@
                 <a:solidFill>
                   <a:srgbClr val="000000"/>
                 </a:solidFill>
-                <a:latin typeface="Calibri" panose="020F0502020204030204"/>
+                <a:latin typeface="Calibri"/>
               </a:rPr>
               <a:t>Frozen CP-1 baseline → CP-2 controller → evidence</a:t>
             </a:r>
-            <a:endParaRPr sz="1900" b="1">
-              <a:solidFill>
-                <a:srgbClr val="000000"/>
-              </a:solidFill>
-              <a:latin typeface="Calibri" panose="020F0502020204030204"/>
-            </a:endParaRPr>
           </a:p>
         </p:txBody>
       </p:sp>
@@ -15878,20 +15782,19 @@
                 <a:solidFill>
                   <a:srgbClr val="666666"/>
                 </a:solidFill>
-                <a:latin typeface="Calibri" panose="020F0502020204030204"/>
+                <a:latin typeface="Calibri"/>
               </a:rPr>
               <a:t>Python • FastAPI • Next.js • Docker • K8s • Helm • Ray 2.10</a:t>
             </a:r>
-            <a:endParaRPr sz="1800" b="0">
-              <a:solidFill>
-                <a:srgbClr val="666666"/>
-              </a:solidFill>
-              <a:latin typeface="Calibri" panose="020F0502020204030204"/>
-            </a:endParaRPr>
           </a:p>
         </p:txBody>
       </p:sp>
     </p:spTree>
+    <p:extLst>
+      <p:ext uri="{BB962C8B-B14F-4D97-AF65-F5344CB8AC3E}">
+        <p14:creationId xmlns:p14="http://schemas.microsoft.com/office/powerpoint/2010/main" xmlns="" val="227084336"/>
+      </p:ext>
+    </p:extLst>
   </p:cSld>
   <p:clrMapOvr>
     <a:masterClrMapping/>
@@ -15918,7 +15821,13 @@
       </p:grpSpPr>
       <p:sp>
         <p:nvSpPr>
-          <p:cNvPr id="8" name="Title 7"/>
+          <p:cNvPr id="8" name="Title 7">
+            <a:extLst>
+              <a:ext uri="{FF2B5EF4-FFF2-40B4-BE49-F238E27FC236}">
+                <a16:creationId xmlns:a16="http://schemas.microsoft.com/office/drawing/2014/main" xmlns="" id="{D45DB3B1-7702-A34D-B15A-E964B95D6FB5}"/>
+              </a:ext>
+            </a:extLst>
+          </p:cNvPr>
           <p:cNvSpPr>
             <a:spLocks noGrp="1"/>
           </p:cNvSpPr>
@@ -15940,20 +15849,20 @@
           <a:p>
             <a:pPr marL="514350" indent="-514350" algn="ctr"/>
             <a:r>
-              <a:rPr lang="en-IN" sz="3000" b="1" dirty="0" smtClean="0">
+              <a:rPr lang="en-IN" b="1" dirty="0" smtClean="0" sz="3000">
                 <a:solidFill>
                   <a:srgbClr val="000000"/>
                 </a:solidFill>
-                <a:latin typeface="Calibri" panose="020F0502020204030204"/>
+                <a:latin typeface="Calibri"/>
               </a:rPr>
               <a:t> </a:t>
             </a:r>
             <a:r>
-              <a:rPr lang="en-US" sz="3000" b="1" dirty="0" smtClean="0">
+              <a:rPr lang="en-US" b="1" dirty="0" smtClean="0" sz="3000">
                 <a:solidFill>
                   <a:srgbClr val="000000"/>
                 </a:solidFill>
-                <a:latin typeface="Calibri" panose="020F0502020204030204"/>
+                <a:latin typeface="Calibri"/>
               </a:rPr>
               <a:t>DETAILED DESIGN &amp; DATA FLOW</a:t>
             </a:r>
@@ -15963,7 +15872,13 @@
       </p:sp>
       <p:sp>
         <p:nvSpPr>
-          <p:cNvPr id="5" name="Date Placeholder 4"/>
+          <p:cNvPr id="5" name="Date Placeholder 4">
+            <a:extLst>
+              <a:ext uri="{FF2B5EF4-FFF2-40B4-BE49-F238E27FC236}">
+                <a16:creationId xmlns:a16="http://schemas.microsoft.com/office/drawing/2014/main" xmlns="" id="{BD5C2420-26C9-65B4-41BA-D5CA69721C05}"/>
+              </a:ext>
+            </a:extLst>
+          </p:cNvPr>
           <p:cNvSpPr>
             <a:spLocks noGrp="1"/>
           </p:cNvSpPr>
@@ -15981,7 +15896,7 @@
                 <a:solidFill>
                   <a:srgbClr val="808080"/>
                 </a:solidFill>
-                <a:latin typeface="Calibri" panose="020F0502020204030204"/>
+                <a:latin typeface="Calibri"/>
               </a:rPr>
               <a:t>23-09-2026</a:t>
             </a:r>
@@ -15991,7 +15906,13 @@
       </p:sp>
       <p:sp>
         <p:nvSpPr>
-          <p:cNvPr id="6" name="Footer Placeholder 5"/>
+          <p:cNvPr id="6" name="Footer Placeholder 5">
+            <a:extLst>
+              <a:ext uri="{FF2B5EF4-FFF2-40B4-BE49-F238E27FC236}">
+                <a16:creationId xmlns:a16="http://schemas.microsoft.com/office/drawing/2014/main" xmlns="" id="{AE9B4454-96E6-70D8-1440-2142487397DF}"/>
+              </a:ext>
+            </a:extLst>
+          </p:cNvPr>
           <p:cNvSpPr>
             <a:spLocks noGrp="1"/>
           </p:cNvSpPr>
@@ -16009,7 +15930,7 @@
                 <a:solidFill>
                   <a:srgbClr val="808080"/>
                 </a:solidFill>
-                <a:latin typeface="Calibri" panose="020F0502020204030204"/>
+                <a:latin typeface="Calibri"/>
               </a:rPr>
               <a:t>Review-II                                                        Department of CSE-2</a:t>
             </a:r>
@@ -16019,7 +15940,13 @@
       </p:sp>
       <p:sp>
         <p:nvSpPr>
-          <p:cNvPr id="7" name="Slide Number Placeholder 6"/>
+          <p:cNvPr id="7" name="Slide Number Placeholder 6">
+            <a:extLst>
+              <a:ext uri="{FF2B5EF4-FFF2-40B4-BE49-F238E27FC236}">
+                <a16:creationId xmlns:a16="http://schemas.microsoft.com/office/drawing/2014/main" xmlns="" id="{5F827BAA-7E22-F268-D9DC-5E17D9155237}"/>
+              </a:ext>
+            </a:extLst>
+          </p:cNvPr>
           <p:cNvSpPr>
             <a:spLocks noGrp="1"/>
           </p:cNvSpPr>
@@ -16037,7 +15964,7 @@
                 <a:solidFill>
                   <a:srgbClr val="808080"/>
                 </a:solidFill>
-                <a:latin typeface="Calibri" panose="020F0502020204030204"/>
+                <a:latin typeface="Calibri"/>
               </a:rPr>
               <a:t>8</a:t>
             </a:r>
@@ -16122,16 +16049,10 @@
                 <a:solidFill>
                   <a:srgbClr val="0070C0"/>
                 </a:solidFill>
-                <a:latin typeface="Calibri" panose="020F0502020204030204"/>
+                <a:latin typeface="Calibri"/>
               </a:rPr>
               <a:t>INPUT</a:t>
             </a:r>
-            <a:endParaRPr sz="2000" b="1">
-              <a:solidFill>
-                <a:srgbClr val="0070C0"/>
-              </a:solidFill>
-              <a:latin typeface="Calibri" panose="020F0502020204030204"/>
-            </a:endParaRPr>
           </a:p>
         </p:txBody>
       </p:sp>
@@ -16167,16 +16088,10 @@
                 <a:solidFill>
                   <a:srgbClr val="000000"/>
                 </a:solidFill>
-                <a:latin typeface="Calibri" panose="020F0502020204030204"/>
+                <a:latin typeface="Calibri"/>
               </a:rPr>
               <a:t>Workload JSON</a:t>
             </a:r>
-            <a:endParaRPr sz="2100" b="1">
-              <a:solidFill>
-                <a:srgbClr val="000000"/>
-              </a:solidFill>
-              <a:latin typeface="Calibri" panose="020F0502020204030204"/>
-            </a:endParaRPr>
           </a:p>
         </p:txBody>
       </p:sp>
@@ -16197,35 +16112,29 @@
           <a:noFill/>
         </p:spPr>
         <p:txBody>
-          <a:bodyPr wrap="square" lIns="73152" tIns="27432" rIns="27432" bIns="0">
+          <a:bodyPr wrap="square" lIns="73152" rIns="27432" tIns="27432" bIns="0">
             <a:spAutoFit/>
           </a:bodyPr>
           <a:lstStyle/>
           <a:p>
             <a:pPr>
+              <a:buChar char="•"/>
               <a:lnSpc>
                 <a:spcPct val="100000"/>
               </a:lnSpc>
               <a:spcAft>
                 <a:spcPts val="500"/>
               </a:spcAft>
-              <a:buChar char="•"/>
             </a:pPr>
             <a:r>
               <a:rPr sz="1800" b="0">
                 <a:solidFill>
                   <a:srgbClr val="000000"/>
                 </a:solidFill>
-                <a:latin typeface="Calibri" panose="020F0502020204030204"/>
+                <a:latin typeface="Calibri"/>
               </a:rPr>
               <a:t>Capacity | arrival | duration | parent/child bundles</a:t>
             </a:r>
-            <a:endParaRPr sz="1800" b="0">
-              <a:solidFill>
-                <a:srgbClr val="000000"/>
-              </a:solidFill>
-              <a:latin typeface="Calibri" panose="020F0502020204030204"/>
-            </a:endParaRPr>
           </a:p>
         </p:txBody>
       </p:sp>
@@ -16341,16 +16250,10 @@
                 <a:solidFill>
                   <a:srgbClr val="0070C0"/>
                 </a:solidFill>
-                <a:latin typeface="Calibri" panose="020F0502020204030204"/>
+                <a:latin typeface="Calibri"/>
               </a:rPr>
               <a:t>INTELLIGENCE</a:t>
             </a:r>
-            <a:endParaRPr sz="2000" b="1">
-              <a:solidFill>
-                <a:srgbClr val="0070C0"/>
-              </a:solidFill>
-              <a:latin typeface="Calibri" panose="020F0502020204030204"/>
-            </a:endParaRPr>
           </a:p>
         </p:txBody>
       </p:sp>
@@ -16386,16 +16289,10 @@
                 <a:solidFill>
                   <a:srgbClr val="000000"/>
                 </a:solidFill>
-                <a:latin typeface="Calibri" panose="020F0502020204030204"/>
+                <a:latin typeface="Calibri"/>
               </a:rPr>
               <a:t>Simulation tick</a:t>
             </a:r>
-            <a:endParaRPr sz="2100" b="1">
-              <a:solidFill>
-                <a:srgbClr val="000000"/>
-              </a:solidFill>
-              <a:latin typeface="Calibri" panose="020F0502020204030204"/>
-            </a:endParaRPr>
           </a:p>
         </p:txBody>
       </p:sp>
@@ -16416,35 +16313,29 @@
           <a:noFill/>
         </p:spPr>
         <p:txBody>
-          <a:bodyPr wrap="square" lIns="73152" tIns="27432" rIns="27432" bIns="0">
+          <a:bodyPr wrap="square" lIns="73152" rIns="27432" tIns="27432" bIns="0">
             <a:spAutoFit/>
           </a:bodyPr>
           <a:lstStyle/>
           <a:p>
             <a:pPr>
+              <a:buChar char="•"/>
               <a:lnSpc>
                 <a:spcPct val="100000"/>
               </a:lnSpc>
               <a:spcAft>
                 <a:spcPts val="500"/>
               </a:spcAft>
-              <a:buChar char="•"/>
             </a:pPr>
             <a:r>
               <a:rPr sz="1800" b="0">
                 <a:solidFill>
                   <a:srgbClr val="000000"/>
                 </a:solidFill>
-                <a:latin typeface="Calibri" panose="020F0502020204030204"/>
+                <a:latin typeface="Calibri"/>
               </a:rPr>
               <a:t>Policy decides → parent admit → child fit → state/event</a:t>
             </a:r>
-            <a:endParaRPr sz="1800" b="0">
-              <a:solidFill>
-                <a:srgbClr val="000000"/>
-              </a:solidFill>
-              <a:latin typeface="Calibri" panose="020F0502020204030204"/>
-            </a:endParaRPr>
           </a:p>
         </p:txBody>
       </p:sp>
@@ -16560,16 +16451,10 @@
                 <a:solidFill>
                   <a:srgbClr val="0070C0"/>
                 </a:solidFill>
-                <a:latin typeface="Calibri" panose="020F0502020204030204"/>
+                <a:latin typeface="Calibri"/>
               </a:rPr>
               <a:t>OUTPUT</a:t>
             </a:r>
-            <a:endParaRPr sz="2000" b="1">
-              <a:solidFill>
-                <a:srgbClr val="0070C0"/>
-              </a:solidFill>
-              <a:latin typeface="Calibri" panose="020F0502020204030204"/>
-            </a:endParaRPr>
           </a:p>
         </p:txBody>
       </p:sp>
@@ -16605,16 +16490,10 @@
                 <a:solidFill>
                   <a:srgbClr val="000000"/>
                 </a:solidFill>
-                <a:latin typeface="Calibri" panose="020F0502020204030204"/>
+                <a:latin typeface="Calibri"/>
               </a:rPr>
               <a:t>Evidence + interfaces</a:t>
             </a:r>
-            <a:endParaRPr sz="2100" b="1">
-              <a:solidFill>
-                <a:srgbClr val="000000"/>
-              </a:solidFill>
-              <a:latin typeface="Calibri" panose="020F0502020204030204"/>
-            </a:endParaRPr>
           </a:p>
         </p:txBody>
       </p:sp>
@@ -16635,35 +16514,29 @@
           <a:noFill/>
         </p:spPr>
         <p:txBody>
-          <a:bodyPr wrap="square" lIns="73152" tIns="27432" rIns="27432" bIns="0">
+          <a:bodyPr wrap="square" lIns="73152" rIns="27432" tIns="27432" bIns="0">
             <a:spAutoFit/>
           </a:bodyPr>
           <a:lstStyle/>
           <a:p>
             <a:pPr>
+              <a:buChar char="•"/>
               <a:lnSpc>
                 <a:spcPct val="100000"/>
               </a:lnSpc>
               <a:spcAft>
                 <a:spcPts val="500"/>
               </a:spcAft>
-              <a:buChar char="•"/>
             </a:pPr>
             <a:r>
               <a:rPr sz="1800" b="0">
                 <a:solidFill>
                   <a:srgbClr val="000000"/>
                 </a:solidFill>
-                <a:latin typeface="Calibri" panose="020F0502020204030204"/>
+                <a:latin typeface="Calibri"/>
               </a:rPr>
               <a:t>JSON/CSV/PNG | /health /scenarios /simulate /benchmark /validate</a:t>
             </a:r>
-            <a:endParaRPr sz="1800" b="0">
-              <a:solidFill>
-                <a:srgbClr val="000000"/>
-              </a:solidFill>
-              <a:latin typeface="Calibri" panose="020F0502020204030204"/>
-            </a:endParaRPr>
           </a:p>
         </p:txBody>
       </p:sp>
@@ -16699,20 +16572,19 @@
                 <a:solidFill>
                   <a:srgbClr val="000000"/>
                 </a:solidFill>
-                <a:latin typeface="Calibri" panose="020F0502020204030204"/>
+                <a:latin typeface="Calibri"/>
               </a:rPr>
               <a:t>WAITING_CHILD → observer self-cycle → CP-2 reject/defer → bounded result</a:t>
             </a:r>
-            <a:endParaRPr sz="2000" b="1">
-              <a:solidFill>
-                <a:srgbClr val="000000"/>
-              </a:solidFill>
-              <a:latin typeface="Calibri" panose="020F0502020204030204"/>
-            </a:endParaRPr>
           </a:p>
         </p:txBody>
       </p:sp>
     </p:spTree>
+    <p:extLst>
+      <p:ext uri="{BB962C8B-B14F-4D97-AF65-F5344CB8AC3E}">
+        <p14:creationId xmlns:p14="http://schemas.microsoft.com/office/powerpoint/2010/main" xmlns="" val="3455230001"/>
+      </p:ext>
+    </p:extLst>
   </p:cSld>
   <p:clrMapOvr>
     <a:masterClrMapping/>
@@ -16754,11 +16626,11 @@
           <a:p>
             <a:pPr marL="514350" indent="-514350" algn="ctr"/>
             <a:r>
-              <a:rPr lang="en-US" sz="3000" b="1" dirty="0" smtClean="0">
+              <a:rPr lang="en-US" b="1" dirty="0" smtClean="0" sz="3000">
                 <a:solidFill>
                   <a:srgbClr val="000000"/>
                 </a:solidFill>
-                <a:latin typeface="Calibri" panose="020F0502020204030204"/>
+                <a:latin typeface="Calibri"/>
               </a:rPr>
               <a:t>IMPLEMENTATION &amp; UNIT-LEVEL PROGRESS</a:t>
             </a:r>
@@ -16786,7 +16658,7 @@
                 <a:solidFill>
                   <a:srgbClr val="808080"/>
                 </a:solidFill>
-                <a:latin typeface="Calibri" panose="020F0502020204030204"/>
+                <a:latin typeface="Calibri"/>
               </a:rPr>
               <a:t>23-09-2026</a:t>
             </a:r>
@@ -16814,7 +16686,7 @@
                 <a:solidFill>
                   <a:srgbClr val="808080"/>
                 </a:solidFill>
-                <a:latin typeface="Calibri" panose="020F0502020204030204"/>
+                <a:latin typeface="Calibri"/>
               </a:rPr>
               <a:t>Review-II                                                        Department of CSE-2</a:t>
             </a:r>
@@ -16842,7 +16714,7 @@
                 <a:solidFill>
                   <a:srgbClr val="808080"/>
                 </a:solidFill>
-                <a:latin typeface="Calibri" panose="020F0502020204030204"/>
+                <a:latin typeface="Calibri"/>
               </a:rPr>
               <a:t>9</a:t>
             </a:r>
@@ -16858,7 +16730,7 @@
         </p:nvSpPr>
         <p:spPr>
           <a:xfrm>
-            <a:off x="841248" y="918083"/>
+            <a:off x="841248" y="1389888"/>
             <a:ext cx="2926080" cy="384048"/>
           </a:xfrm>
           <a:prstGeom prst="rect">
@@ -16882,16 +16754,10 @@
                 <a:solidFill>
                   <a:srgbClr val="0070C0"/>
                 </a:solidFill>
-                <a:latin typeface="Calibri" panose="020F0502020204030204"/>
+                <a:latin typeface="Calibri"/>
               </a:rPr>
               <a:t>10 review deliverables implemented</a:t>
             </a:r>
-            <a:endParaRPr sz="2500" b="1">
-              <a:solidFill>
-                <a:srgbClr val="0070C0"/>
-              </a:solidFill>
-              <a:latin typeface="Calibri" panose="020F0502020204030204"/>
-            </a:endParaRPr>
           </a:p>
         </p:txBody>
       </p:sp>
@@ -17017,16 +16883,10 @@
                 <a:solidFill>
                   <a:srgbClr val="000000"/>
                 </a:solidFill>
-                <a:latin typeface="Calibri" panose="020F0502020204030204"/>
+                <a:latin typeface="Calibri"/>
               </a:rPr>
               <a:t>Schema + fixtures</a:t>
             </a:r>
-            <a:endParaRPr sz="1900" b="1">
-              <a:solidFill>
-                <a:srgbClr val="000000"/>
-              </a:solidFill>
-              <a:latin typeface="Calibri" panose="020F0502020204030204"/>
-            </a:endParaRPr>
           </a:p>
         </p:txBody>
       </p:sp>
@@ -17107,16 +16967,10 @@
                 <a:solidFill>
                   <a:srgbClr val="00B050"/>
                 </a:solidFill>
-                <a:latin typeface="Calibri" panose="020F0502020204030204"/>
+                <a:latin typeface="Calibri"/>
               </a:rPr>
               <a:t>Verified</a:t>
             </a:r>
-            <a:endParaRPr sz="1500" b="1">
-              <a:solidFill>
-                <a:srgbClr val="00B050"/>
-              </a:solidFill>
-              <a:latin typeface="Calibri" panose="020F0502020204030204"/>
-            </a:endParaRPr>
           </a:p>
         </p:txBody>
       </p:sp>
@@ -17152,16 +17006,10 @@
                 <a:solidFill>
                   <a:srgbClr val="000000"/>
                 </a:solidFill>
-                <a:latin typeface="Calibri" panose="020F0502020204030204"/>
+                <a:latin typeface="Calibri"/>
               </a:rPr>
               <a:t>Simulator + telemetry</a:t>
             </a:r>
-            <a:endParaRPr sz="1900" b="1">
-              <a:solidFill>
-                <a:srgbClr val="000000"/>
-              </a:solidFill>
-              <a:latin typeface="Calibri" panose="020F0502020204030204"/>
-            </a:endParaRPr>
           </a:p>
         </p:txBody>
       </p:sp>
@@ -17242,16 +17090,10 @@
                 <a:solidFill>
                   <a:srgbClr val="00B050"/>
                 </a:solidFill>
-                <a:latin typeface="Calibri" panose="020F0502020204030204"/>
+                <a:latin typeface="Calibri"/>
               </a:rPr>
               <a:t>Verified</a:t>
             </a:r>
-            <a:endParaRPr sz="1500" b="1">
-              <a:solidFill>
-                <a:srgbClr val="00B050"/>
-              </a:solidFill>
-              <a:latin typeface="Calibri" panose="020F0502020204030204"/>
-            </a:endParaRPr>
           </a:p>
         </p:txBody>
       </p:sp>
@@ -17287,16 +17129,10 @@
                 <a:solidFill>
                   <a:srgbClr val="000000"/>
                 </a:solidFill>
-                <a:latin typeface="Calibri" panose="020F0502020204030204"/>
+                <a:latin typeface="Calibri"/>
               </a:rPr>
               <a:t>FIFO / Greedy baselines</a:t>
             </a:r>
-            <a:endParaRPr sz="1900" b="1">
-              <a:solidFill>
-                <a:srgbClr val="000000"/>
-              </a:solidFill>
-              <a:latin typeface="Calibri" panose="020F0502020204030204"/>
-            </a:endParaRPr>
           </a:p>
         </p:txBody>
       </p:sp>
@@ -17377,16 +17213,10 @@
                 <a:solidFill>
                   <a:srgbClr val="00B050"/>
                 </a:solidFill>
-                <a:latin typeface="Calibri" panose="020F0502020204030204"/>
+                <a:latin typeface="Calibri"/>
               </a:rPr>
               <a:t>Verified</a:t>
             </a:r>
-            <a:endParaRPr sz="1500" b="1">
-              <a:solidFill>
-                <a:srgbClr val="00B050"/>
-              </a:solidFill>
-              <a:latin typeface="Calibri" panose="020F0502020204030204"/>
-            </a:endParaRPr>
           </a:p>
         </p:txBody>
       </p:sp>
@@ -17422,16 +17252,10 @@
                 <a:solidFill>
                   <a:srgbClr val="000000"/>
                 </a:solidFill>
-                <a:latin typeface="Calibri" panose="020F0502020204030204"/>
+                <a:latin typeface="Calibri"/>
               </a:rPr>
               <a:t>Deadlock-aware controller</a:t>
             </a:r>
-            <a:endParaRPr sz="1900" b="1">
-              <a:solidFill>
-                <a:srgbClr val="000000"/>
-              </a:solidFill>
-              <a:latin typeface="Calibri" panose="020F0502020204030204"/>
-            </a:endParaRPr>
           </a:p>
         </p:txBody>
       </p:sp>
@@ -17512,16 +17336,10 @@
                 <a:solidFill>
                   <a:srgbClr val="00B050"/>
                 </a:solidFill>
-                <a:latin typeface="Calibri" panose="020F0502020204030204"/>
+                <a:latin typeface="Calibri"/>
               </a:rPr>
               <a:t>Verified</a:t>
             </a:r>
-            <a:endParaRPr sz="1500" b="1">
-              <a:solidFill>
-                <a:srgbClr val="00B050"/>
-              </a:solidFill>
-              <a:latin typeface="Calibri" panose="020F0502020204030204"/>
-            </a:endParaRPr>
           </a:p>
         </p:txBody>
       </p:sp>
@@ -17557,16 +17375,10 @@
                 <a:solidFill>
                   <a:srgbClr val="000000"/>
                 </a:solidFill>
-                <a:latin typeface="Calibri" panose="020F0502020204030204"/>
+                <a:latin typeface="Calibri"/>
               </a:rPr>
               <a:t>Oracle + deterministic gate</a:t>
             </a:r>
-            <a:endParaRPr sz="1900" b="1">
-              <a:solidFill>
-                <a:srgbClr val="000000"/>
-              </a:solidFill>
-              <a:latin typeface="Calibri" panose="020F0502020204030204"/>
-            </a:endParaRPr>
           </a:p>
         </p:txBody>
       </p:sp>
@@ -17647,16 +17459,10 @@
                 <a:solidFill>
                   <a:srgbClr val="00B050"/>
                 </a:solidFill>
-                <a:latin typeface="Calibri" panose="020F0502020204030204"/>
+                <a:latin typeface="Calibri"/>
               </a:rPr>
               <a:t>70 PASS</a:t>
             </a:r>
-            <a:endParaRPr sz="1500" b="1">
-              <a:solidFill>
-                <a:srgbClr val="00B050"/>
-              </a:solidFill>
-              <a:latin typeface="Calibri" panose="020F0502020204030204"/>
-            </a:endParaRPr>
           </a:p>
         </p:txBody>
       </p:sp>
@@ -17692,16 +17498,10 @@
                 <a:solidFill>
                   <a:srgbClr val="000000"/>
                 </a:solidFill>
-                <a:latin typeface="Calibri" panose="020F0502020204030204"/>
+                <a:latin typeface="Calibri"/>
               </a:rPr>
               <a:t>FastAPI + advisor</a:t>
             </a:r>
-            <a:endParaRPr sz="1900" b="1">
-              <a:solidFill>
-                <a:srgbClr val="000000"/>
-              </a:solidFill>
-              <a:latin typeface="Calibri" panose="020F0502020204030204"/>
-            </a:endParaRPr>
           </a:p>
         </p:txBody>
       </p:sp>
@@ -17782,16 +17582,10 @@
                 <a:solidFill>
                   <a:srgbClr val="00B050"/>
                 </a:solidFill>
-                <a:latin typeface="Calibri" panose="020F0502020204030204"/>
+                <a:latin typeface="Calibri"/>
               </a:rPr>
               <a:t>Verified</a:t>
             </a:r>
-            <a:endParaRPr sz="1500" b="1">
-              <a:solidFill>
-                <a:srgbClr val="00B050"/>
-              </a:solidFill>
-              <a:latin typeface="Calibri" panose="020F0502020204030204"/>
-            </a:endParaRPr>
           </a:p>
         </p:txBody>
       </p:sp>
@@ -17827,16 +17621,10 @@
                 <a:solidFill>
                   <a:srgbClr val="000000"/>
                 </a:solidFill>
-                <a:latin typeface="Calibri" panose="020F0502020204030204"/>
+                <a:latin typeface="Calibri"/>
               </a:rPr>
               <a:t>Next.js dashboard</a:t>
             </a:r>
-            <a:endParaRPr sz="1900" b="1">
-              <a:solidFill>
-                <a:srgbClr val="000000"/>
-              </a:solidFill>
-              <a:latin typeface="Calibri" panose="020F0502020204030204"/>
-            </a:endParaRPr>
           </a:p>
         </p:txBody>
       </p:sp>
@@ -17917,16 +17705,10 @@
                 <a:solidFill>
                   <a:srgbClr val="ED7D31"/>
                 </a:solidFill>
-                <a:latin typeface="Calibri" panose="020F0502020204030204"/>
+                <a:latin typeface="Calibri"/>
               </a:rPr>
               <a:t>Built</a:t>
             </a:r>
-            <a:endParaRPr sz="1500" b="1">
-              <a:solidFill>
-                <a:srgbClr val="ED7D31"/>
-              </a:solidFill>
-              <a:latin typeface="Calibri" panose="020F0502020204030204"/>
-            </a:endParaRPr>
           </a:p>
         </p:txBody>
       </p:sp>
@@ -17962,16 +17744,10 @@
                 <a:solidFill>
                   <a:srgbClr val="000000"/>
                 </a:solidFill>
-                <a:latin typeface="Calibri" panose="020F0502020204030204"/>
+                <a:latin typeface="Calibri"/>
               </a:rPr>
               <a:t>Ray 2.10 Docker repro</a:t>
             </a:r>
-            <a:endParaRPr sz="1900" b="1">
-              <a:solidFill>
-                <a:srgbClr val="000000"/>
-              </a:solidFill>
-              <a:latin typeface="Calibri" panose="020F0502020204030204"/>
-            </a:endParaRPr>
           </a:p>
         </p:txBody>
       </p:sp>
@@ -18052,16 +17828,10 @@
                 <a:solidFill>
                   <a:srgbClr val="ED7D31"/>
                 </a:solidFill>
-                <a:latin typeface="Calibri" panose="020F0502020204030204"/>
+                <a:latin typeface="Calibri"/>
               </a:rPr>
               <a:t>Verified</a:t>
             </a:r>
-            <a:endParaRPr sz="1500" b="1">
-              <a:solidFill>
-                <a:srgbClr val="ED7D31"/>
-              </a:solidFill>
-              <a:latin typeface="Calibri" panose="020F0502020204030204"/>
-            </a:endParaRPr>
           </a:p>
         </p:txBody>
       </p:sp>
@@ -18097,16 +17867,10 @@
                 <a:solidFill>
                   <a:srgbClr val="000000"/>
                 </a:solidFill>
-                <a:latin typeface="Calibri" panose="020F0502020204030204"/>
+                <a:latin typeface="Calibri"/>
               </a:rPr>
               <a:t>K8s + Helm packaging</a:t>
             </a:r>
-            <a:endParaRPr sz="1900" b="1">
-              <a:solidFill>
-                <a:srgbClr val="000000"/>
-              </a:solidFill>
-              <a:latin typeface="Calibri" panose="020F0502020204030204"/>
-            </a:endParaRPr>
           </a:p>
         </p:txBody>
       </p:sp>
@@ -18187,16 +17951,10 @@
                 <a:solidFill>
                   <a:srgbClr val="ED7D31"/>
                 </a:solidFill>
-                <a:latin typeface="Calibri" panose="020F0502020204030204"/>
+                <a:latin typeface="Calibri"/>
               </a:rPr>
               <a:t>CI PASS</a:t>
             </a:r>
-            <a:endParaRPr sz="1500" b="1">
-              <a:solidFill>
-                <a:srgbClr val="ED7D31"/>
-              </a:solidFill>
-              <a:latin typeface="Calibri" panose="020F0502020204030204"/>
-            </a:endParaRPr>
           </a:p>
         </p:txBody>
       </p:sp>
@@ -18232,16 +17990,10 @@
                 <a:solidFill>
                   <a:srgbClr val="000000"/>
                 </a:solidFill>
-                <a:latin typeface="Calibri" panose="020F0502020204030204"/>
+                <a:latin typeface="Calibri"/>
               </a:rPr>
               <a:t>Viva metadata / literature</a:t>
             </a:r>
-            <a:endParaRPr sz="1900" b="1">
-              <a:solidFill>
-                <a:srgbClr val="000000"/>
-              </a:solidFill>
-              <a:latin typeface="Calibri" panose="020F0502020204030204"/>
-            </a:endParaRPr>
           </a:p>
         </p:txBody>
       </p:sp>
@@ -18322,16 +18074,10 @@
                 <a:solidFill>
                   <a:srgbClr val="666666"/>
                 </a:solidFill>
-                <a:latin typeface="Calibri" panose="020F0502020204030204"/>
+                <a:latin typeface="Calibri"/>
               </a:rPr>
               <a:t>Pending</a:t>
             </a:r>
-            <a:endParaRPr sz="1500" b="1">
-              <a:solidFill>
-                <a:srgbClr val="666666"/>
-              </a:solidFill>
-              <a:latin typeface="Calibri" panose="020F0502020204030204"/>
-            </a:endParaRPr>
           </a:p>
         </p:txBody>
       </p:sp>
@@ -18367,16 +18113,10 @@
                 <a:solidFill>
                   <a:srgbClr val="000000"/>
                 </a:solidFill>
-                <a:latin typeface="Calibri" panose="020F0502020204030204"/>
+                <a:latin typeface="Calibri"/>
               </a:rPr>
               <a:t>Next critical path: rehearse the viva, fill names/guide, read the cited papers, and choose a venue.</a:t>
             </a:r>
-            <a:endParaRPr sz="1800" b="1">
-              <a:solidFill>
-                <a:srgbClr val="000000"/>
-              </a:solidFill>
-              <a:latin typeface="Calibri" panose="020F0502020204030204"/>
-            </a:endParaRPr>
           </a:p>
         </p:txBody>
       </p:sp>
@@ -18464,6 +18204,23 @@
         <a:font script="Viet" typeface="Times New Roman"/>
         <a:font script="Uigh" typeface="Microsoft Uighur"/>
         <a:font script="Geor" typeface="Sylfaen"/>
+        <a:font script="Armn" typeface="Arial"/>
+        <a:font script="Bugi" typeface="Leelawadee UI"/>
+        <a:font script="Bopo" typeface="Microsoft JhengHei"/>
+        <a:font script="Java" typeface="Javanese Text"/>
+        <a:font script="Lisu" typeface="Segoe UI"/>
+        <a:font script="Mymr" typeface="Myanmar Text"/>
+        <a:font script="Nkoo" typeface="Ebrima"/>
+        <a:font script="Olck" typeface="Nirmala UI"/>
+        <a:font script="Osma" typeface="Ebrima"/>
+        <a:font script="Phag" typeface="Phagspa"/>
+        <a:font script="Syrn" typeface="Estrangelo Edessa"/>
+        <a:font script="Syrj" typeface="Estrangelo Edessa"/>
+        <a:font script="Syre" typeface="Estrangelo Edessa"/>
+        <a:font script="Sora" typeface="Nirmala UI"/>
+        <a:font script="Tale" typeface="Microsoft Tai Le"/>
+        <a:font script="Talu" typeface="Microsoft New Tai Lue"/>
+        <a:font script="Tfng" typeface="Ebrima"/>
       </a:majorFont>
       <a:minorFont>
         <a:latin typeface="Calibri"/>
@@ -18499,6 +18256,23 @@
         <a:font script="Viet" typeface="Arial"/>
         <a:font script="Uigh" typeface="Microsoft Uighur"/>
         <a:font script="Geor" typeface="Sylfaen"/>
+        <a:font script="Armn" typeface="Arial"/>
+        <a:font script="Bugi" typeface="Leelawadee UI"/>
+        <a:font script="Bopo" typeface="Microsoft JhengHei"/>
+        <a:font script="Java" typeface="Javanese Text"/>
+        <a:font script="Lisu" typeface="Segoe UI"/>
+        <a:font script="Mymr" typeface="Myanmar Text"/>
+        <a:font script="Nkoo" typeface="Ebrima"/>
+        <a:font script="Olck" typeface="Nirmala UI"/>
+        <a:font script="Osma" typeface="Ebrima"/>
+        <a:font script="Phag" typeface="Phagspa"/>
+        <a:font script="Syrn" typeface="Estrangelo Edessa"/>
+        <a:font script="Syrj" typeface="Estrangelo Edessa"/>
+        <a:font script="Syre" typeface="Estrangelo Edessa"/>
+        <a:font script="Sora" typeface="Nirmala UI"/>
+        <a:font script="Tale" typeface="Microsoft Tai Le"/>
+        <a:font script="Talu" typeface="Microsoft New Tai Lue"/>
+        <a:font script="Tfng" typeface="Ebrima"/>
       </a:minorFont>
     </a:fontScheme>
     <a:fmtScheme name="Office">
@@ -18639,9 +18413,11 @@
       </a:bgFillStyleLst>
     </a:fmtScheme>
   </a:themeElements>
+  <a:objectDefaults/>
+  <a:extraClrSchemeLst/>
   <a:extLst>
     <a:ext uri="{05A4C25C-085E-4340-85A3-A5531E510DB2}">
-      <thm15:themeFamily xmlns:thm15="http://schemas.microsoft.com/office/thememl/2012/main" name="Office Theme" id="{62F939B6-93AF-4DB8-9C6B-D6C7DFDC589F}" vid="{4A3C46E8-61CC-4603-A589-7422A47A8E4A}"/>
+      <thm15:themeFamily xmlns:thm15="http://schemas.microsoft.com/office/thememl/2012/main" xmlns="" name="Office Theme" id="{62F939B6-93AF-4DB8-9C6B-D6C7DFDC589F}" vid="{4A3C46E8-61CC-4603-A589-7422A47A8E4A}"/>
     </a:ext>
   </a:extLst>
 </a:theme>
@@ -18723,6 +18499,23 @@
         <a:font script="Viet" typeface="Times New Roman"/>
         <a:font script="Uigh" typeface="Microsoft Uighur"/>
         <a:font script="Geor" typeface="Sylfaen"/>
+        <a:font script="Armn" typeface="Arial"/>
+        <a:font script="Bugi" typeface="Leelawadee UI"/>
+        <a:font script="Bopo" typeface="Microsoft JhengHei"/>
+        <a:font script="Java" typeface="Javanese Text"/>
+        <a:font script="Lisu" typeface="Segoe UI"/>
+        <a:font script="Mymr" typeface="Myanmar Text"/>
+        <a:font script="Nkoo" typeface="Ebrima"/>
+        <a:font script="Olck" typeface="Nirmala UI"/>
+        <a:font script="Osma" typeface="Ebrima"/>
+        <a:font script="Phag" typeface="Phagspa"/>
+        <a:font script="Syrn" typeface="Estrangelo Edessa"/>
+        <a:font script="Syrj" typeface="Estrangelo Edessa"/>
+        <a:font script="Syre" typeface="Estrangelo Edessa"/>
+        <a:font script="Sora" typeface="Nirmala UI"/>
+        <a:font script="Tale" typeface="Microsoft Tai Le"/>
+        <a:font script="Talu" typeface="Microsoft New Tai Lue"/>
+        <a:font script="Tfng" typeface="Ebrima"/>
       </a:majorFont>
       <a:minorFont>
         <a:latin typeface="Calibri"/>
@@ -18758,6 +18551,23 @@
         <a:font script="Viet" typeface="Arial"/>
         <a:font script="Uigh" typeface="Microsoft Uighur"/>
         <a:font script="Geor" typeface="Sylfaen"/>
+        <a:font script="Armn" typeface="Arial"/>
+        <a:font script="Bugi" typeface="Leelawadee UI"/>
+        <a:font script="Bopo" typeface="Microsoft JhengHei"/>
+        <a:font script="Java" typeface="Javanese Text"/>
+        <a:font script="Lisu" typeface="Segoe UI"/>
+        <a:font script="Mymr" typeface="Myanmar Text"/>
+        <a:font script="Nkoo" typeface="Ebrima"/>
+        <a:font script="Olck" typeface="Nirmala UI"/>
+        <a:font script="Osma" typeface="Ebrima"/>
+        <a:font script="Phag" typeface="Phagspa"/>
+        <a:font script="Syrn" typeface="Estrangelo Edessa"/>
+        <a:font script="Syrj" typeface="Estrangelo Edessa"/>
+        <a:font script="Syre" typeface="Estrangelo Edessa"/>
+        <a:font script="Sora" typeface="Nirmala UI"/>
+        <a:font script="Tale" typeface="Microsoft Tai Le"/>
+        <a:font script="Talu" typeface="Microsoft New Tai Lue"/>
+        <a:font script="Tfng" typeface="Ebrima"/>
       </a:minorFont>
     </a:fontScheme>
     <a:fmtScheme name="Office">
@@ -18898,9 +18708,11 @@
       </a:bgFillStyleLst>
     </a:fmtScheme>
   </a:themeElements>
+  <a:objectDefaults/>
+  <a:extraClrSchemeLst/>
   <a:extLst>
     <a:ext uri="{05A4C25C-085E-4340-85A3-A5531E510DB2}">
-      <thm15:themeFamily xmlns:thm15="http://schemas.microsoft.com/office/thememl/2012/main" name="Office Theme" id="{62F939B6-93AF-4DB8-9C6B-D6C7DFDC589F}" vid="{4A3C46E8-61CC-4603-A589-7422A47A8E4A}"/>
+      <thm15:themeFamily xmlns:thm15="http://schemas.microsoft.com/office/thememl/2012/main" xmlns="" name="Office Theme" id="{62F939B6-93AF-4DB8-9C6B-D6C7DFDC589F}" vid="{4A3C46E8-61CC-4603-A589-7422A47A8E4A}"/>
     </a:ext>
   </a:extLst>
 </a:theme>
@@ -18982,6 +18794,23 @@
         <a:font script="Viet" typeface="Times New Roman"/>
         <a:font script="Uigh" typeface="Microsoft Uighur"/>
         <a:font script="Geor" typeface="Sylfaen"/>
+        <a:font script="Armn" typeface="Arial"/>
+        <a:font script="Bugi" typeface="Leelawadee UI"/>
+        <a:font script="Bopo" typeface="Microsoft JhengHei"/>
+        <a:font script="Java" typeface="Javanese Text"/>
+        <a:font script="Lisu" typeface="Segoe UI"/>
+        <a:font script="Mymr" typeface="Myanmar Text"/>
+        <a:font script="Nkoo" typeface="Ebrima"/>
+        <a:font script="Olck" typeface="Nirmala UI"/>
+        <a:font script="Osma" typeface="Ebrima"/>
+        <a:font script="Phag" typeface="Phagspa"/>
+        <a:font script="Syrn" typeface="Estrangelo Edessa"/>
+        <a:font script="Syrj" typeface="Estrangelo Edessa"/>
+        <a:font script="Syre" typeface="Estrangelo Edessa"/>
+        <a:font script="Sora" typeface="Nirmala UI"/>
+        <a:font script="Tale" typeface="Microsoft Tai Le"/>
+        <a:font script="Talu" typeface="Microsoft New Tai Lue"/>
+        <a:font script="Tfng" typeface="Ebrima"/>
       </a:majorFont>
       <a:minorFont>
         <a:latin typeface="Calibri"/>
@@ -19017,6 +18846,23 @@
         <a:font script="Viet" typeface="Arial"/>
         <a:font script="Uigh" typeface="Microsoft Uighur"/>
         <a:font script="Geor" typeface="Sylfaen"/>
+        <a:font script="Armn" typeface="Arial"/>
+        <a:font script="Bugi" typeface="Leelawadee UI"/>
+        <a:font script="Bopo" typeface="Microsoft JhengHei"/>
+        <a:font script="Java" typeface="Javanese Text"/>
+        <a:font script="Lisu" typeface="Segoe UI"/>
+        <a:font script="Mymr" typeface="Myanmar Text"/>
+        <a:font script="Nkoo" typeface="Ebrima"/>
+        <a:font script="Olck" typeface="Nirmala UI"/>
+        <a:font script="Osma" typeface="Ebrima"/>
+        <a:font script="Phag" typeface="Phagspa"/>
+        <a:font script="Syrn" typeface="Estrangelo Edessa"/>
+        <a:font script="Syrj" typeface="Estrangelo Edessa"/>
+        <a:font script="Syre" typeface="Estrangelo Edessa"/>
+        <a:font script="Sora" typeface="Nirmala UI"/>
+        <a:font script="Tale" typeface="Microsoft Tai Le"/>
+        <a:font script="Talu" typeface="Microsoft New Tai Lue"/>
+        <a:font script="Tfng" typeface="Ebrima"/>
       </a:minorFont>
     </a:fontScheme>
     <a:fmtScheme name="Office">
@@ -19157,9 +19003,11 @@
       </a:bgFillStyleLst>
     </a:fmtScheme>
   </a:themeElements>
+  <a:objectDefaults/>
+  <a:extraClrSchemeLst/>
   <a:extLst>
     <a:ext uri="{05A4C25C-085E-4340-85A3-A5531E510DB2}">
-      <thm15:themeFamily xmlns:thm15="http://schemas.microsoft.com/office/thememl/2012/main" name="Office Theme" id="{62F939B6-93AF-4DB8-9C6B-D6C7DFDC589F}" vid="{4A3C46E8-61CC-4603-A589-7422A47A8E4A}"/>
+      <thm15:themeFamily xmlns:thm15="http://schemas.microsoft.com/office/thememl/2012/main" xmlns="" name="Office Theme" id="{62F939B6-93AF-4DB8-9C6B-D6C7DFDC589F}" vid="{4A3C46E8-61CC-4603-A589-7422A47A8E4A}"/>
     </a:ext>
   </a:extLst>
 </a:theme>
@@ -19241,6 +19089,23 @@
         <a:font script="Viet" typeface="Times New Roman"/>
         <a:font script="Uigh" typeface="Microsoft Uighur"/>
         <a:font script="Geor" typeface="Sylfaen"/>
+        <a:font script="Armn" typeface="Arial"/>
+        <a:font script="Bugi" typeface="Leelawadee UI"/>
+        <a:font script="Bopo" typeface="Microsoft JhengHei"/>
+        <a:font script="Java" typeface="Javanese Text"/>
+        <a:font script="Lisu" typeface="Segoe UI"/>
+        <a:font script="Mymr" typeface="Myanmar Text"/>
+        <a:font script="Nkoo" typeface="Ebrima"/>
+        <a:font script="Olck" typeface="Nirmala UI"/>
+        <a:font script="Osma" typeface="Ebrima"/>
+        <a:font script="Phag" typeface="Phagspa"/>
+        <a:font script="Syrn" typeface="Estrangelo Edessa"/>
+        <a:font script="Syrj" typeface="Estrangelo Edessa"/>
+        <a:font script="Syre" typeface="Estrangelo Edessa"/>
+        <a:font script="Sora" typeface="Nirmala UI"/>
+        <a:font script="Tale" typeface="Microsoft Tai Le"/>
+        <a:font script="Talu" typeface="Microsoft New Tai Lue"/>
+        <a:font script="Tfng" typeface="Ebrima"/>
       </a:majorFont>
       <a:minorFont>
         <a:latin typeface="Calibri"/>
@@ -19276,6 +19141,23 @@
         <a:font script="Viet" typeface="Arial"/>
         <a:font script="Uigh" typeface="Microsoft Uighur"/>
         <a:font script="Geor" typeface="Sylfaen"/>
+        <a:font script="Armn" typeface="Arial"/>
+        <a:font script="Bugi" typeface="Leelawadee UI"/>
+        <a:font script="Bopo" typeface="Microsoft JhengHei"/>
+        <a:font script="Java" typeface="Javanese Text"/>
+        <a:font script="Lisu" typeface="Segoe UI"/>
+        <a:font script="Mymr" typeface="Myanmar Text"/>
+        <a:font script="Nkoo" typeface="Ebrima"/>
+        <a:font script="Olck" typeface="Nirmala UI"/>
+        <a:font script="Osma" typeface="Ebrima"/>
+        <a:font script="Phag" typeface="Phagspa"/>
+        <a:font script="Syrn" typeface="Estrangelo Edessa"/>
+        <a:font script="Syrj" typeface="Estrangelo Edessa"/>
+        <a:font script="Syre" typeface="Estrangelo Edessa"/>
+        <a:font script="Sora" typeface="Nirmala UI"/>
+        <a:font script="Tale" typeface="Microsoft Tai Le"/>
+        <a:font script="Talu" typeface="Microsoft New Tai Lue"/>
+        <a:font script="Tfng" typeface="Ebrima"/>
       </a:minorFont>
     </a:fontScheme>
     <a:fmtScheme name="Office">
@@ -19416,9 +19298,11 @@
       </a:bgFillStyleLst>
     </a:fmtScheme>
   </a:themeElements>
+  <a:objectDefaults/>
+  <a:extraClrSchemeLst/>
   <a:extLst>
     <a:ext uri="{05A4C25C-085E-4340-85A3-A5531E510DB2}">
-      <thm15:themeFamily xmlns:thm15="http://schemas.microsoft.com/office/thememl/2012/main" name="Office Theme" id="{62F939B6-93AF-4DB8-9C6B-D6C7DFDC589F}" vid="{4A3C46E8-61CC-4603-A589-7422A47A8E4A}"/>
+      <thm15:themeFamily xmlns:thm15="http://schemas.microsoft.com/office/thememl/2012/main" xmlns="" name="Office Theme" id="{62F939B6-93AF-4DB8-9C6B-D6C7DFDC589F}" vid="{4A3C46E8-61CC-4603-A589-7422A47A8E4A}"/>
     </a:ext>
   </a:extLst>
 </a:theme>
